--- a/Slides/MMTOResults.pptx
+++ b/Slides/MMTOResults.pptx
@@ -5,7 +5,7 @@
     <p:sldMasterId id="2147483648" r:id="rId1"/>
   </p:sldMasterIdLst>
   <p:notesMasterIdLst>
-    <p:notesMasterId r:id="rId10"/>
+    <p:notesMasterId r:id="rId11"/>
   </p:notesMasterIdLst>
   <p:sldIdLst>
     <p:sldId id="2381" r:id="rId2"/>
@@ -16,6 +16,7 @@
     <p:sldId id="2389" r:id="rId7"/>
     <p:sldId id="2390" r:id="rId8"/>
     <p:sldId id="2391" r:id="rId9"/>
+    <p:sldId id="2392" r:id="rId10"/>
   </p:sldIdLst>
   <p:sldSz cx="12192000" cy="6858000"/>
   <p:notesSz cx="6858000" cy="9144000"/>
@@ -204,7 +205,7 @@
           <a:p>
             <a:fld id="{317BC63F-E652-456B-B880-2F318D1A1929}" type="datetimeFigureOut">
               <a:rPr lang="en-US" smtClean="0"/>
-              <a:t>10/21/2025</a:t>
+              <a:t>10/22/2025</a:t>
             </a:fld>
             <a:endParaRPr lang="en-US"/>
           </a:p>
@@ -618,7 +619,7 @@
           <a:p>
             <a:fld id="{935B4303-DE67-4DA8-B375-7E6264E8BDE4}" type="datetimeFigureOut">
               <a:rPr lang="en-US" smtClean="0"/>
-              <a:t>10/21/2025</a:t>
+              <a:t>10/22/2025</a:t>
             </a:fld>
             <a:endParaRPr lang="en-US"/>
           </a:p>
@@ -816,7 +817,7 @@
           <a:p>
             <a:fld id="{935B4303-DE67-4DA8-B375-7E6264E8BDE4}" type="datetimeFigureOut">
               <a:rPr lang="en-US" smtClean="0"/>
-              <a:t>10/21/2025</a:t>
+              <a:t>10/22/2025</a:t>
             </a:fld>
             <a:endParaRPr lang="en-US"/>
           </a:p>
@@ -1024,7 +1025,7 @@
           <a:p>
             <a:fld id="{935B4303-DE67-4DA8-B375-7E6264E8BDE4}" type="datetimeFigureOut">
               <a:rPr lang="en-US" smtClean="0"/>
-              <a:t>10/21/2025</a:t>
+              <a:t>10/22/2025</a:t>
             </a:fld>
             <a:endParaRPr lang="en-US"/>
           </a:p>
@@ -1534,7 +1535,7 @@
           <a:p>
             <a:fld id="{935B4303-DE67-4DA8-B375-7E6264E8BDE4}" type="datetimeFigureOut">
               <a:rPr lang="en-US" smtClean="0"/>
-              <a:t>10/21/2025</a:t>
+              <a:t>10/22/2025</a:t>
             </a:fld>
             <a:endParaRPr lang="en-US"/>
           </a:p>
@@ -1809,7 +1810,7 @@
           <a:p>
             <a:fld id="{935B4303-DE67-4DA8-B375-7E6264E8BDE4}" type="datetimeFigureOut">
               <a:rPr lang="en-US" smtClean="0"/>
-              <a:t>10/21/2025</a:t>
+              <a:t>10/22/2025</a:t>
             </a:fld>
             <a:endParaRPr lang="en-US"/>
           </a:p>
@@ -2074,7 +2075,7 @@
           <a:p>
             <a:fld id="{935B4303-DE67-4DA8-B375-7E6264E8BDE4}" type="datetimeFigureOut">
               <a:rPr lang="en-US" smtClean="0"/>
-              <a:t>10/21/2025</a:t>
+              <a:t>10/22/2025</a:t>
             </a:fld>
             <a:endParaRPr lang="en-US"/>
           </a:p>
@@ -2486,7 +2487,7 @@
           <a:p>
             <a:fld id="{935B4303-DE67-4DA8-B375-7E6264E8BDE4}" type="datetimeFigureOut">
               <a:rPr lang="en-US" smtClean="0"/>
-              <a:t>10/21/2025</a:t>
+              <a:t>10/22/2025</a:t>
             </a:fld>
             <a:endParaRPr lang="en-US"/>
           </a:p>
@@ -2627,7 +2628,7 @@
           <a:p>
             <a:fld id="{935B4303-DE67-4DA8-B375-7E6264E8BDE4}" type="datetimeFigureOut">
               <a:rPr lang="en-US" smtClean="0"/>
-              <a:t>10/21/2025</a:t>
+              <a:t>10/22/2025</a:t>
             </a:fld>
             <a:endParaRPr lang="en-US"/>
           </a:p>
@@ -2740,7 +2741,7 @@
           <a:p>
             <a:fld id="{935B4303-DE67-4DA8-B375-7E6264E8BDE4}" type="datetimeFigureOut">
               <a:rPr lang="en-US" smtClean="0"/>
-              <a:t>10/21/2025</a:t>
+              <a:t>10/22/2025</a:t>
             </a:fld>
             <a:endParaRPr lang="en-US"/>
           </a:p>
@@ -3051,7 +3052,7 @@
           <a:p>
             <a:fld id="{935B4303-DE67-4DA8-B375-7E6264E8BDE4}" type="datetimeFigureOut">
               <a:rPr lang="en-US" smtClean="0"/>
-              <a:t>10/21/2025</a:t>
+              <a:t>10/22/2025</a:t>
             </a:fld>
             <a:endParaRPr lang="en-US"/>
           </a:p>
@@ -3339,7 +3340,7 @@
           <a:p>
             <a:fld id="{935B4303-DE67-4DA8-B375-7E6264E8BDE4}" type="datetimeFigureOut">
               <a:rPr lang="en-US" smtClean="0"/>
-              <a:t>10/21/2025</a:t>
+              <a:t>10/22/2025</a:t>
             </a:fld>
             <a:endParaRPr lang="en-US"/>
           </a:p>
@@ -3580,7 +3581,7 @@
           <a:p>
             <a:fld id="{935B4303-DE67-4DA8-B375-7E6264E8BDE4}" type="datetimeFigureOut">
               <a:rPr lang="en-US" smtClean="0"/>
-              <a:t>10/21/2025</a:t>
+              <a:t>10/22/2025</a:t>
             </a:fld>
             <a:endParaRPr lang="en-US"/>
           </a:p>
@@ -4184,7 +4185,7 @@
         </p:blipFill>
         <p:spPr>
           <a:xfrm>
-            <a:off x="381000" y="1725885"/>
+            <a:off x="647218" y="1579280"/>
             <a:ext cx="3685714" cy="2200000"/>
           </a:xfrm>
           <a:prstGeom prst="rect">
@@ -4214,7 +4215,7 @@
         </p:blipFill>
         <p:spPr>
           <a:xfrm>
-            <a:off x="284990" y="4587464"/>
+            <a:off x="409122" y="4056233"/>
             <a:ext cx="4161905" cy="990476"/>
           </a:xfrm>
           <a:prstGeom prst="rect">
@@ -4244,7 +4245,7 @@
         </p:blipFill>
         <p:spPr>
           <a:xfrm>
-            <a:off x="5656894" y="1579280"/>
+            <a:off x="6032499" y="1127317"/>
             <a:ext cx="5780952" cy="4190476"/>
           </a:xfrm>
           <a:prstGeom prst="rect">
@@ -5242,6 +5243,96 @@
           </a:p>
         </p:txBody>
       </p:sp>
+      <p:pic>
+        <p:nvPicPr>
+          <p:cNvPr id="4" name="Picture 3">
+            <a:extLst>
+              <a:ext uri="{FF2B5EF4-FFF2-40B4-BE49-F238E27FC236}">
+                <a16:creationId xmlns:a16="http://schemas.microsoft.com/office/drawing/2014/main" id="{662F36F5-8DA5-AD25-4C0A-50562B827858}"/>
+              </a:ext>
+            </a:extLst>
+          </p:cNvPr>
+          <p:cNvPicPr>
+            <a:picLocks noChangeAspect="1"/>
+          </p:cNvPicPr>
+          <p:nvPr/>
+        </p:nvPicPr>
+        <p:blipFill>
+          <a:blip r:embed="rId2"/>
+          <a:stretch>
+            <a:fillRect/>
+          </a:stretch>
+        </p:blipFill>
+        <p:spPr>
+          <a:xfrm>
+            <a:off x="1198026" y="1934419"/>
+            <a:ext cx="4168966" cy="2741753"/>
+          </a:xfrm>
+          <a:prstGeom prst="rect">
+            <a:avLst/>
+          </a:prstGeom>
+        </p:spPr>
+      </p:pic>
+      <p:pic>
+        <p:nvPicPr>
+          <p:cNvPr id="7" name="Picture 6">
+            <a:extLst>
+              <a:ext uri="{FF2B5EF4-FFF2-40B4-BE49-F238E27FC236}">
+                <a16:creationId xmlns:a16="http://schemas.microsoft.com/office/drawing/2014/main" id="{70325408-D924-2902-FD3D-ABCAA2213D93}"/>
+              </a:ext>
+            </a:extLst>
+          </p:cNvPr>
+          <p:cNvPicPr>
+            <a:picLocks noChangeAspect="1"/>
+          </p:cNvPicPr>
+          <p:nvPr/>
+        </p:nvPicPr>
+        <p:blipFill>
+          <a:blip r:embed="rId3"/>
+          <a:stretch>
+            <a:fillRect/>
+          </a:stretch>
+        </p:blipFill>
+        <p:spPr>
+          <a:xfrm>
+            <a:off x="6301090" y="916055"/>
+            <a:ext cx="5593565" cy="4099915"/>
+          </a:xfrm>
+          <a:prstGeom prst="rect">
+            <a:avLst/>
+          </a:prstGeom>
+        </p:spPr>
+      </p:pic>
+      <p:pic>
+        <p:nvPicPr>
+          <p:cNvPr id="10" name="Picture 9">
+            <a:extLst>
+              <a:ext uri="{FF2B5EF4-FFF2-40B4-BE49-F238E27FC236}">
+                <a16:creationId xmlns:a16="http://schemas.microsoft.com/office/drawing/2014/main" id="{C5EED1B8-7B1E-16E6-B557-3E153A0E7E34}"/>
+              </a:ext>
+            </a:extLst>
+          </p:cNvPr>
+          <p:cNvPicPr>
+            <a:picLocks noChangeAspect="1"/>
+          </p:cNvPicPr>
+          <p:nvPr/>
+        </p:nvPicPr>
+        <p:blipFill>
+          <a:blip r:embed="rId4"/>
+          <a:stretch>
+            <a:fillRect/>
+          </a:stretch>
+        </p:blipFill>
+        <p:spPr>
+          <a:xfrm>
+            <a:off x="895212" y="5340616"/>
+            <a:ext cx="4313294" cy="899238"/>
+          </a:xfrm>
+          <a:prstGeom prst="rect">
+            <a:avLst/>
+          </a:prstGeom>
+        </p:spPr>
+      </p:pic>
     </p:spTree>
     <p:extLst>
       <p:ext uri="{BB962C8B-B14F-4D97-AF65-F5344CB8AC3E}">
@@ -5542,7 +5633,7 @@
         </p:nvSpPr>
         <p:spPr>
           <a:xfrm>
-            <a:off x="284534" y="1466748"/>
+            <a:off x="87764" y="1107933"/>
             <a:ext cx="6094378" cy="286360"/>
           </a:xfrm>
           <a:prstGeom prst="rect">
@@ -5604,10 +5695,10 @@
       </p:sp>
       <p:pic>
         <p:nvPicPr>
-          <p:cNvPr id="7" name="Picture 6">
-            <a:extLst>
-              <a:ext uri="{FF2B5EF4-FFF2-40B4-BE49-F238E27FC236}">
-                <a16:creationId xmlns:a16="http://schemas.microsoft.com/office/drawing/2014/main" id="{DCB8C05F-29A3-CC09-F828-3FAD6834188B}"/>
+          <p:cNvPr id="5" name="Picture 4">
+            <a:extLst>
+              <a:ext uri="{FF2B5EF4-FFF2-40B4-BE49-F238E27FC236}">
+                <a16:creationId xmlns:a16="http://schemas.microsoft.com/office/drawing/2014/main" id="{9DD676ED-6E14-68CA-546A-0944F6FC8161}"/>
               </a:ext>
             </a:extLst>
           </p:cNvPr>
@@ -5624,8 +5715,8 @@
         </p:blipFill>
         <p:spPr>
           <a:xfrm>
-            <a:off x="767281" y="1965523"/>
-            <a:ext cx="4330013" cy="2776036"/>
+            <a:off x="784930" y="1535373"/>
+            <a:ext cx="3955123" cy="2591025"/>
           </a:xfrm>
           <a:prstGeom prst="rect">
             <a:avLst/>
@@ -5634,10 +5725,10 @@
       </p:pic>
       <p:pic>
         <p:nvPicPr>
-          <p:cNvPr id="10" name="Picture 9">
-            <a:extLst>
-              <a:ext uri="{FF2B5EF4-FFF2-40B4-BE49-F238E27FC236}">
-                <a16:creationId xmlns:a16="http://schemas.microsoft.com/office/drawing/2014/main" id="{1A51C0F2-AA24-852D-3BC4-DDB0029768D4}"/>
+          <p:cNvPr id="8" name="Picture 7">
+            <a:extLst>
+              <a:ext uri="{FF2B5EF4-FFF2-40B4-BE49-F238E27FC236}">
+                <a16:creationId xmlns:a16="http://schemas.microsoft.com/office/drawing/2014/main" id="{781D96A8-2486-4A62-4667-CA433D52955A}"/>
               </a:ext>
             </a:extLst>
           </p:cNvPr>
@@ -5654,8 +5745,8 @@
         </p:blipFill>
         <p:spPr>
           <a:xfrm>
-            <a:off x="381000" y="5308731"/>
-            <a:ext cx="3819048" cy="1047619"/>
+            <a:off x="5930400" y="1394293"/>
+            <a:ext cx="5753599" cy="4183743"/>
           </a:xfrm>
           <a:prstGeom prst="rect">
             <a:avLst/>
@@ -5664,10 +5755,10 @@
       </p:pic>
       <p:pic>
         <p:nvPicPr>
-          <p:cNvPr id="12" name="Picture 11">
-            <a:extLst>
-              <a:ext uri="{FF2B5EF4-FFF2-40B4-BE49-F238E27FC236}">
-                <a16:creationId xmlns:a16="http://schemas.microsoft.com/office/drawing/2014/main" id="{7755B613-5359-9B64-5171-669CD7D96CDF}"/>
+          <p:cNvPr id="13" name="Picture 12">
+            <a:extLst>
+              <a:ext uri="{FF2B5EF4-FFF2-40B4-BE49-F238E27FC236}">
+                <a16:creationId xmlns:a16="http://schemas.microsoft.com/office/drawing/2014/main" id="{00AA5BB2-E0A4-97C1-C986-3DF2FF5B4AD1}"/>
               </a:ext>
             </a:extLst>
           </p:cNvPr>
@@ -5684,8 +5775,8 @@
         </p:blipFill>
         <p:spPr>
           <a:xfrm>
-            <a:off x="5864951" y="1670635"/>
-            <a:ext cx="5819048" cy="4161905"/>
+            <a:off x="381000" y="4657968"/>
+            <a:ext cx="3741744" cy="1036410"/>
           </a:xfrm>
           <a:prstGeom prst="rect">
             <a:avLst/>
@@ -5798,86 +5889,12 @@
           </a:p>
         </p:txBody>
       </p:sp>
-      <p:sp>
-        <p:nvSpPr>
-          <p:cNvPr id="5" name="TextBox 4">
-            <a:extLst>
-              <a:ext uri="{FF2B5EF4-FFF2-40B4-BE49-F238E27FC236}">
-                <a16:creationId xmlns:a16="http://schemas.microsoft.com/office/drawing/2014/main" id="{F06DF53C-50AD-AFFE-8417-72A2597DF826}"/>
-              </a:ext>
-            </a:extLst>
-          </p:cNvPr>
-          <p:cNvSpPr txBox="1"/>
-          <p:nvPr/>
-        </p:nvSpPr>
-        <p:spPr>
-          <a:xfrm>
-            <a:off x="0" y="1260248"/>
-            <a:ext cx="7838062" cy="286360"/>
-          </a:xfrm>
-          <a:prstGeom prst="rect">
-            <a:avLst/>
-          </a:prstGeom>
-          <a:noFill/>
-        </p:spPr>
-        <p:txBody>
-          <a:bodyPr wrap="square">
-            <a:spAutoFit/>
-          </a:bodyPr>
-          <a:lstStyle/>
-          <a:p>
-            <a:pPr>
-              <a:lnSpc>
-                <a:spcPts val="1425"/>
-              </a:lnSpc>
-              <a:buNone/>
-            </a:pPr>
-            <a:r>
-              <a:rPr lang="en-US" b="0" dirty="0" err="1">
-                <a:solidFill>
-                  <a:srgbClr val="4EC9B0"/>
-                </a:solidFill>
-                <a:effectLst/>
-                <a:latin typeface="Consolas" panose="020B0609020204030204" pitchFamily="49" charset="0"/>
-              </a:rPr>
-              <a:t>MMTOExamples</a:t>
-            </a:r>
-            <a:r>
-              <a:rPr lang="en-US" b="0" dirty="0" err="1">
-                <a:solidFill>
-                  <a:srgbClr val="CCCCCC"/>
-                </a:solidFill>
-                <a:effectLst/>
-                <a:latin typeface="Consolas" panose="020B0609020204030204" pitchFamily="49" charset="0"/>
-              </a:rPr>
-              <a:t>.</a:t>
-            </a:r>
-            <a:r>
-              <a:rPr lang="en-US" b="0" dirty="0" err="1">
-                <a:solidFill>
-                  <a:srgbClr val="4FC1FF"/>
-                </a:solidFill>
-                <a:effectLst/>
-                <a:latin typeface="Consolas" panose="020B0609020204030204" pitchFamily="49" charset="0"/>
-              </a:rPr>
-              <a:t>BliskSection_Mass_ComplianceCriticality</a:t>
-            </a:r>
-            <a:endParaRPr lang="en-US" b="0" dirty="0">
-              <a:solidFill>
-                <a:srgbClr val="CCCCCC"/>
-              </a:solidFill>
-              <a:effectLst/>
-              <a:latin typeface="Consolas" panose="020B0609020204030204" pitchFamily="49" charset="0"/>
-            </a:endParaRPr>
-          </a:p>
-        </p:txBody>
-      </p:sp>
       <p:pic>
         <p:nvPicPr>
-          <p:cNvPr id="15" name="Picture 14">
-            <a:extLst>
-              <a:ext uri="{FF2B5EF4-FFF2-40B4-BE49-F238E27FC236}">
-                <a16:creationId xmlns:a16="http://schemas.microsoft.com/office/drawing/2014/main" id="{7331ECF3-8C23-F14E-E5F8-B399FB83D7B4}"/>
+          <p:cNvPr id="4" name="Picture 3">
+            <a:extLst>
+              <a:ext uri="{FF2B5EF4-FFF2-40B4-BE49-F238E27FC236}">
+                <a16:creationId xmlns:a16="http://schemas.microsoft.com/office/drawing/2014/main" id="{D312A068-B35E-CC70-14FD-C2F3E2EE5D2B}"/>
               </a:ext>
             </a:extLst>
           </p:cNvPr>
@@ -5894,8 +5911,8 @@
         </p:blipFill>
         <p:spPr>
           <a:xfrm>
-            <a:off x="702906" y="1828799"/>
-            <a:ext cx="4222981" cy="2904587"/>
+            <a:off x="381000" y="1833695"/>
+            <a:ext cx="4138019" cy="2773920"/>
           </a:xfrm>
           <a:prstGeom prst="rect">
             <a:avLst/>
@@ -5904,10 +5921,10 @@
       </p:pic>
       <p:pic>
         <p:nvPicPr>
-          <p:cNvPr id="17" name="Picture 16">
-            <a:extLst>
-              <a:ext uri="{FF2B5EF4-FFF2-40B4-BE49-F238E27FC236}">
-                <a16:creationId xmlns:a16="http://schemas.microsoft.com/office/drawing/2014/main" id="{20806C39-8634-CFAD-BEA7-19B4E3C7EE63}"/>
+          <p:cNvPr id="7" name="Picture 6">
+            <a:extLst>
+              <a:ext uri="{FF2B5EF4-FFF2-40B4-BE49-F238E27FC236}">
+                <a16:creationId xmlns:a16="http://schemas.microsoft.com/office/drawing/2014/main" id="{C115B7ED-B570-AD1E-456D-22C29485C908}"/>
               </a:ext>
             </a:extLst>
           </p:cNvPr>
@@ -5924,8 +5941,8 @@
         </p:blipFill>
         <p:spPr>
           <a:xfrm>
-            <a:off x="577514" y="5171734"/>
-            <a:ext cx="3819048" cy="1047619"/>
+            <a:off x="525971" y="5068116"/>
+            <a:ext cx="4496190" cy="1059272"/>
           </a:xfrm>
           <a:prstGeom prst="rect">
             <a:avLst/>
@@ -5934,10 +5951,10 @@
       </p:pic>
       <p:pic>
         <p:nvPicPr>
-          <p:cNvPr id="19" name="Picture 18">
-            <a:extLst>
-              <a:ext uri="{FF2B5EF4-FFF2-40B4-BE49-F238E27FC236}">
-                <a16:creationId xmlns:a16="http://schemas.microsoft.com/office/drawing/2014/main" id="{1015963A-9538-5F06-FF03-165666246944}"/>
+          <p:cNvPr id="10" name="Picture 9">
+            <a:extLst>
+              <a:ext uri="{FF2B5EF4-FFF2-40B4-BE49-F238E27FC236}">
+                <a16:creationId xmlns:a16="http://schemas.microsoft.com/office/drawing/2014/main" id="{7436DF42-A97A-929F-8C65-387CE8D9D82F}"/>
               </a:ext>
             </a:extLst>
           </p:cNvPr>
@@ -5954,18 +5971,272 @@
         </p:blipFill>
         <p:spPr>
           <a:xfrm>
-            <a:off x="5753800" y="1828799"/>
-            <a:ext cx="5600000" cy="4266667"/>
+            <a:off x="5930400" y="1660788"/>
+            <a:ext cx="5753599" cy="4115157"/>
           </a:xfrm>
           <a:prstGeom prst="rect">
             <a:avLst/>
           </a:prstGeom>
         </p:spPr>
       </p:pic>
+      <p:sp>
+        <p:nvSpPr>
+          <p:cNvPr id="6" name="TextBox 5">
+            <a:extLst>
+              <a:ext uri="{FF2B5EF4-FFF2-40B4-BE49-F238E27FC236}">
+                <a16:creationId xmlns:a16="http://schemas.microsoft.com/office/drawing/2014/main" id="{A2D0B6FA-25B9-761F-32B1-9C0DF31E0509}"/>
+              </a:ext>
+            </a:extLst>
+          </p:cNvPr>
+          <p:cNvSpPr txBox="1"/>
+          <p:nvPr/>
+        </p:nvSpPr>
+        <p:spPr>
+          <a:xfrm>
+            <a:off x="380999" y="1075848"/>
+            <a:ext cx="7837025" cy="267124"/>
+          </a:xfrm>
+          <a:prstGeom prst="rect">
+            <a:avLst/>
+          </a:prstGeom>
+          <a:noFill/>
+        </p:spPr>
+        <p:txBody>
+          <a:bodyPr wrap="square">
+            <a:spAutoFit/>
+          </a:bodyPr>
+          <a:lstStyle/>
+          <a:p>
+            <a:pPr>
+              <a:lnSpc>
+                <a:spcPts val="1200"/>
+              </a:lnSpc>
+              <a:buNone/>
+            </a:pPr>
+            <a:r>
+              <a:rPr lang="en-US" b="0" dirty="0" err="1">
+                <a:solidFill>
+                  <a:srgbClr val="4EC9B0"/>
+                </a:solidFill>
+                <a:effectLst/>
+                <a:latin typeface="Consolas" panose="020B0609020204030204" pitchFamily="49" charset="0"/>
+              </a:rPr>
+              <a:t>MMTOExamples</a:t>
+            </a:r>
+            <a:r>
+              <a:rPr lang="en-US" b="0" dirty="0" err="1">
+                <a:solidFill>
+                  <a:srgbClr val="CCCCCC"/>
+                </a:solidFill>
+                <a:effectLst/>
+                <a:latin typeface="Consolas" panose="020B0609020204030204" pitchFamily="49" charset="0"/>
+              </a:rPr>
+              <a:t>.</a:t>
+            </a:r>
+            <a:r>
+              <a:rPr lang="en-US" b="0" dirty="0" err="1">
+                <a:solidFill>
+                  <a:srgbClr val="4FC1FF"/>
+                </a:solidFill>
+                <a:effectLst/>
+                <a:latin typeface="Consolas" panose="020B0609020204030204" pitchFamily="49" charset="0"/>
+              </a:rPr>
+              <a:t>BliskSection_Compliance_MassCriticality</a:t>
+            </a:r>
+            <a:endParaRPr lang="en-US" b="0" dirty="0">
+              <a:solidFill>
+                <a:srgbClr val="CCCCCC"/>
+              </a:solidFill>
+              <a:effectLst/>
+              <a:latin typeface="Consolas" panose="020B0609020204030204" pitchFamily="49" charset="0"/>
+            </a:endParaRPr>
+          </a:p>
+        </p:txBody>
+      </p:sp>
     </p:spTree>
     <p:extLst>
       <p:ext uri="{BB962C8B-B14F-4D97-AF65-F5344CB8AC3E}">
         <p14:creationId xmlns:p14="http://schemas.microsoft.com/office/powerpoint/2010/main" val="2687041123"/>
+      </p:ext>
+    </p:extLst>
+  </p:cSld>
+  <p:clrMapOvr>
+    <a:masterClrMapping/>
+  </p:clrMapOvr>
+</p:sld>
+</file>
+
+<file path=ppt/slides/slide9.xml><?xml version="1.0" encoding="utf-8"?>
+<p:sld xmlns:a="http://schemas.openxmlformats.org/drawingml/2006/main" xmlns:r="http://schemas.openxmlformats.org/officeDocument/2006/relationships" xmlns:p="http://schemas.openxmlformats.org/presentationml/2006/main">
+  <p:cSld>
+    <p:spTree>
+      <p:nvGrpSpPr>
+        <p:cNvPr id="1" name="">
+          <a:extLst>
+            <a:ext uri="{FF2B5EF4-FFF2-40B4-BE49-F238E27FC236}">
+              <a16:creationId xmlns:a16="http://schemas.microsoft.com/office/drawing/2014/main" id="{7E6F1A8C-814F-7C47-61A6-3EA5E2054511}"/>
+            </a:ext>
+          </a:extLst>
+        </p:cNvPr>
+        <p:cNvGrpSpPr/>
+        <p:nvPr/>
+      </p:nvGrpSpPr>
+      <p:grpSpPr>
+        <a:xfrm>
+          <a:off x="0" y="0"/>
+          <a:ext cx="0" cy="0"/>
+          <a:chOff x="0" y="0"/>
+          <a:chExt cx="0" cy="0"/>
+        </a:xfrm>
+      </p:grpSpPr>
+      <p:sp>
+        <p:nvSpPr>
+          <p:cNvPr id="3" name="Slide Number Placeholder 2">
+            <a:extLst>
+              <a:ext uri="{FF2B5EF4-FFF2-40B4-BE49-F238E27FC236}">
+                <a16:creationId xmlns:a16="http://schemas.microsoft.com/office/drawing/2014/main" id="{45F96852-22AA-5E5B-2629-375771764254}"/>
+              </a:ext>
+            </a:extLst>
+          </p:cNvPr>
+          <p:cNvSpPr>
+            <a:spLocks noGrp="1"/>
+          </p:cNvSpPr>
+          <p:nvPr>
+            <p:ph type="sldNum" sz="quarter" idx="11"/>
+          </p:nvPr>
+        </p:nvSpPr>
+        <p:spPr/>
+        <p:txBody>
+          <a:bodyPr/>
+          <a:lstStyle/>
+          <a:p>
+            <a:pPr>
+              <a:defRPr/>
+            </a:pPr>
+            <a:fld id="{231CC523-8BC6-4921-807A-66BD262F34AB}" type="slidenum">
+              <a:rPr lang="en-US" smtClean="0"/>
+              <a:pPr>
+                <a:defRPr/>
+              </a:pPr>
+              <a:t>9</a:t>
+            </a:fld>
+            <a:endParaRPr lang="en-US"/>
+          </a:p>
+        </p:txBody>
+      </p:sp>
+      <p:sp>
+        <p:nvSpPr>
+          <p:cNvPr id="9" name="Title 8">
+            <a:extLst>
+              <a:ext uri="{FF2B5EF4-FFF2-40B4-BE49-F238E27FC236}">
+                <a16:creationId xmlns:a16="http://schemas.microsoft.com/office/drawing/2014/main" id="{201E4D27-C554-A0B0-BD84-A666D5EDB116}"/>
+              </a:ext>
+            </a:extLst>
+          </p:cNvPr>
+          <p:cNvSpPr>
+            <a:spLocks noGrp="1"/>
+          </p:cNvSpPr>
+          <p:nvPr>
+            <p:ph type="ctrTitle"/>
+          </p:nvPr>
+        </p:nvSpPr>
+        <p:spPr>
+          <a:xfrm>
+            <a:off x="381000" y="126366"/>
+            <a:ext cx="11302999" cy="612648"/>
+          </a:xfrm>
+        </p:spPr>
+        <p:txBody>
+          <a:bodyPr>
+            <a:normAutofit/>
+          </a:bodyPr>
+          <a:lstStyle/>
+          <a:p>
+            <a:r>
+              <a:rPr lang="en-US" dirty="0"/>
+              <a:t>Example 10</a:t>
+            </a:r>
+          </a:p>
+        </p:txBody>
+      </p:sp>
+      <p:sp>
+        <p:nvSpPr>
+          <p:cNvPr id="11" name="TextBox 10">
+            <a:extLst>
+              <a:ext uri="{FF2B5EF4-FFF2-40B4-BE49-F238E27FC236}">
+                <a16:creationId xmlns:a16="http://schemas.microsoft.com/office/drawing/2014/main" id="{823E5D6D-1EA0-15B1-F54B-BE0CBCB90C82}"/>
+              </a:ext>
+            </a:extLst>
+          </p:cNvPr>
+          <p:cNvSpPr txBox="1"/>
+          <p:nvPr/>
+        </p:nvSpPr>
+        <p:spPr>
+          <a:xfrm>
+            <a:off x="222812" y="1311564"/>
+            <a:ext cx="6953491" cy="267124"/>
+          </a:xfrm>
+          <a:prstGeom prst="rect">
+            <a:avLst/>
+          </a:prstGeom>
+          <a:noFill/>
+        </p:spPr>
+        <p:txBody>
+          <a:bodyPr wrap="square">
+            <a:spAutoFit/>
+          </a:bodyPr>
+          <a:lstStyle/>
+          <a:p>
+            <a:pPr>
+              <a:lnSpc>
+                <a:spcPts val="1200"/>
+              </a:lnSpc>
+              <a:buNone/>
+            </a:pPr>
+            <a:r>
+              <a:rPr lang="en-US" b="0" dirty="0" err="1">
+                <a:solidFill>
+                  <a:srgbClr val="4EC9B0"/>
+                </a:solidFill>
+                <a:effectLst/>
+                <a:latin typeface="Consolas" panose="020B0609020204030204" pitchFamily="49" charset="0"/>
+              </a:rPr>
+              <a:t>MMTOExamples</a:t>
+            </a:r>
+            <a:r>
+              <a:rPr lang="en-US" b="0" dirty="0" err="1">
+                <a:solidFill>
+                  <a:srgbClr val="CCCCCC"/>
+                </a:solidFill>
+                <a:effectLst/>
+                <a:latin typeface="Consolas" panose="020B0609020204030204" pitchFamily="49" charset="0"/>
+              </a:rPr>
+              <a:t>.</a:t>
+            </a:r>
+            <a:r>
+              <a:rPr lang="en-US" b="0" dirty="0" err="1">
+                <a:solidFill>
+                  <a:srgbClr val="4FC1FF"/>
+                </a:solidFill>
+                <a:effectLst/>
+                <a:latin typeface="Consolas" panose="020B0609020204030204" pitchFamily="49" charset="0"/>
+              </a:rPr>
+              <a:t>BliskSection_Mass_StressSFCriticality</a:t>
+            </a:r>
+            <a:endParaRPr lang="en-US" b="0" dirty="0">
+              <a:solidFill>
+                <a:srgbClr val="CCCCCC"/>
+              </a:solidFill>
+              <a:effectLst/>
+              <a:latin typeface="Consolas" panose="020B0609020204030204" pitchFamily="49" charset="0"/>
+            </a:endParaRPr>
+          </a:p>
+        </p:txBody>
+      </p:sp>
+    </p:spTree>
+    <p:extLst>
+      <p:ext uri="{BB962C8B-B14F-4D97-AF65-F5344CB8AC3E}">
+        <p14:creationId xmlns:p14="http://schemas.microsoft.com/office/powerpoint/2010/main" val="1956195768"/>
       </p:ext>
     </p:extLst>
   </p:cSld>

--- a/Slides/MMTOResults.pptx
+++ b/Slides/MMTOResults.pptx
@@ -5,18 +5,25 @@
     <p:sldMasterId id="2147483648" r:id="rId1"/>
   </p:sldMasterIdLst>
   <p:notesMasterIdLst>
-    <p:notesMasterId r:id="rId11"/>
+    <p:notesMasterId r:id="rId18"/>
   </p:notesMasterIdLst>
   <p:sldIdLst>
-    <p:sldId id="2381" r:id="rId2"/>
-    <p:sldId id="2385" r:id="rId3"/>
-    <p:sldId id="2386" r:id="rId4"/>
-    <p:sldId id="2387" r:id="rId5"/>
-    <p:sldId id="2388" r:id="rId6"/>
-    <p:sldId id="2389" r:id="rId7"/>
-    <p:sldId id="2390" r:id="rId8"/>
-    <p:sldId id="2391" r:id="rId9"/>
-    <p:sldId id="2392" r:id="rId10"/>
+    <p:sldId id="2403" r:id="rId2"/>
+    <p:sldId id="2404" r:id="rId3"/>
+    <p:sldId id="2405" r:id="rId4"/>
+    <p:sldId id="2396" r:id="rId5"/>
+    <p:sldId id="2381" r:id="rId6"/>
+    <p:sldId id="2395" r:id="rId7"/>
+    <p:sldId id="2406" r:id="rId8"/>
+    <p:sldId id="2385" r:id="rId9"/>
+    <p:sldId id="2386" r:id="rId10"/>
+    <p:sldId id="2387" r:id="rId11"/>
+    <p:sldId id="2388" r:id="rId12"/>
+    <p:sldId id="2393" r:id="rId13"/>
+    <p:sldId id="2394" r:id="rId14"/>
+    <p:sldId id="2390" r:id="rId15"/>
+    <p:sldId id="2391" r:id="rId16"/>
+    <p:sldId id="2392" r:id="rId17"/>
   </p:sldIdLst>
   <p:sldSz cx="12192000" cy="6858000"/>
   <p:notesSz cx="6858000" cy="9144000"/>
@@ -205,7 +212,7 @@
           <a:p>
             <a:fld id="{317BC63F-E652-456B-B880-2F318D1A1929}" type="datetimeFigureOut">
               <a:rPr lang="en-US" smtClean="0"/>
-              <a:t>10/22/2025</a:t>
+              <a:t>10/23/2025</a:t>
             </a:fld>
             <a:endParaRPr lang="en-US"/>
           </a:p>
@@ -472,6 +479,114 @@
 </p:notesMaster>
 </file>
 
+<file path=ppt/notesSlides/notesSlide1.xml><?xml version="1.0" encoding="utf-8"?>
+<p:notes xmlns:a="http://schemas.openxmlformats.org/drawingml/2006/main" xmlns:r="http://schemas.openxmlformats.org/officeDocument/2006/relationships" xmlns:p="http://schemas.openxmlformats.org/presentationml/2006/main">
+  <p:cSld>
+    <p:spTree>
+      <p:nvGrpSpPr>
+        <p:cNvPr id="1" name="">
+          <a:extLst>
+            <a:ext uri="{FF2B5EF4-FFF2-40B4-BE49-F238E27FC236}">
+              <a16:creationId xmlns:a16="http://schemas.microsoft.com/office/drawing/2014/main" id="{E063E921-FB76-0F4E-CF67-342D994340B7}"/>
+            </a:ext>
+          </a:extLst>
+        </p:cNvPr>
+        <p:cNvGrpSpPr/>
+        <p:nvPr/>
+      </p:nvGrpSpPr>
+      <p:grpSpPr>
+        <a:xfrm>
+          <a:off x="0" y="0"/>
+          <a:ext cx="0" cy="0"/>
+          <a:chOff x="0" y="0"/>
+          <a:chExt cx="0" cy="0"/>
+        </a:xfrm>
+      </p:grpSpPr>
+      <p:sp>
+        <p:nvSpPr>
+          <p:cNvPr id="2" name="Slide Image Placeholder 1">
+            <a:extLst>
+              <a:ext uri="{FF2B5EF4-FFF2-40B4-BE49-F238E27FC236}">
+                <a16:creationId xmlns:a16="http://schemas.microsoft.com/office/drawing/2014/main" id="{39F3B462-56C8-46A7-CCE8-306B8EEB4964}"/>
+              </a:ext>
+            </a:extLst>
+          </p:cNvPr>
+          <p:cNvSpPr>
+            <a:spLocks noGrp="1" noRot="1" noChangeAspect="1"/>
+          </p:cNvSpPr>
+          <p:nvPr>
+            <p:ph type="sldImg"/>
+          </p:nvPr>
+        </p:nvSpPr>
+        <p:spPr/>
+      </p:sp>
+      <p:sp>
+        <p:nvSpPr>
+          <p:cNvPr id="3" name="Notes Placeholder 2">
+            <a:extLst>
+              <a:ext uri="{FF2B5EF4-FFF2-40B4-BE49-F238E27FC236}">
+                <a16:creationId xmlns:a16="http://schemas.microsoft.com/office/drawing/2014/main" id="{97B38E72-6F95-C42B-2756-4A763FFE7FCD}"/>
+              </a:ext>
+            </a:extLst>
+          </p:cNvPr>
+          <p:cNvSpPr>
+            <a:spLocks noGrp="1"/>
+          </p:cNvSpPr>
+          <p:nvPr>
+            <p:ph type="body" idx="1"/>
+          </p:nvPr>
+        </p:nvSpPr>
+        <p:spPr/>
+        <p:txBody>
+          <a:bodyPr/>
+          <a:lstStyle/>
+          <a:p>
+            <a:endParaRPr lang="en-US" dirty="0"/>
+          </a:p>
+        </p:txBody>
+      </p:sp>
+      <p:sp>
+        <p:nvSpPr>
+          <p:cNvPr id="4" name="Slide Number Placeholder 3">
+            <a:extLst>
+              <a:ext uri="{FF2B5EF4-FFF2-40B4-BE49-F238E27FC236}">
+                <a16:creationId xmlns:a16="http://schemas.microsoft.com/office/drawing/2014/main" id="{EA47CD1C-4385-157B-93D0-0E661B20C07D}"/>
+              </a:ext>
+            </a:extLst>
+          </p:cNvPr>
+          <p:cNvSpPr>
+            <a:spLocks noGrp="1"/>
+          </p:cNvSpPr>
+          <p:nvPr>
+            <p:ph type="sldNum" sz="quarter" idx="5"/>
+          </p:nvPr>
+        </p:nvSpPr>
+        <p:spPr/>
+        <p:txBody>
+          <a:bodyPr/>
+          <a:lstStyle/>
+          <a:p>
+            <a:fld id="{2F865DCE-AB5F-46FA-B07C-E9C2FA20270E}" type="slidenum">
+              <a:rPr lang="en-US" smtClean="0"/>
+              <a:t>1</a:t>
+            </a:fld>
+            <a:endParaRPr lang="en-US"/>
+          </a:p>
+        </p:txBody>
+      </p:sp>
+    </p:spTree>
+    <p:extLst>
+      <p:ext uri="{BB962C8B-B14F-4D97-AF65-F5344CB8AC3E}">
+        <p14:creationId xmlns:p14="http://schemas.microsoft.com/office/powerpoint/2010/main" val="2533738908"/>
+      </p:ext>
+    </p:extLst>
+  </p:cSld>
+  <p:clrMapOvr>
+    <a:masterClrMapping/>
+  </p:clrMapOvr>
+</p:notes>
+</file>
+
 <file path=ppt/slideLayouts/slideLayout1.xml><?xml version="1.0" encoding="utf-8"?>
 <p:sldLayout xmlns:a="http://schemas.openxmlformats.org/drawingml/2006/main" xmlns:r="http://schemas.openxmlformats.org/officeDocument/2006/relationships" xmlns:p="http://schemas.openxmlformats.org/presentationml/2006/main" type="title" preserve="1">
   <p:cSld name="Title Slide">
@@ -619,7 +734,7 @@
           <a:p>
             <a:fld id="{935B4303-DE67-4DA8-B375-7E6264E8BDE4}" type="datetimeFigureOut">
               <a:rPr lang="en-US" smtClean="0"/>
-              <a:t>10/22/2025</a:t>
+              <a:t>10/23/2025</a:t>
             </a:fld>
             <a:endParaRPr lang="en-US"/>
           </a:p>
@@ -817,7 +932,7 @@
           <a:p>
             <a:fld id="{935B4303-DE67-4DA8-B375-7E6264E8BDE4}" type="datetimeFigureOut">
               <a:rPr lang="en-US" smtClean="0"/>
-              <a:t>10/22/2025</a:t>
+              <a:t>10/23/2025</a:t>
             </a:fld>
             <a:endParaRPr lang="en-US"/>
           </a:p>
@@ -1025,7 +1140,7 @@
           <a:p>
             <a:fld id="{935B4303-DE67-4DA8-B375-7E6264E8BDE4}" type="datetimeFigureOut">
               <a:rPr lang="en-US" smtClean="0"/>
-              <a:t>10/22/2025</a:t>
+              <a:t>10/23/2025</a:t>
             </a:fld>
             <a:endParaRPr lang="en-US"/>
           </a:p>
@@ -1535,7 +1650,7 @@
           <a:p>
             <a:fld id="{935B4303-DE67-4DA8-B375-7E6264E8BDE4}" type="datetimeFigureOut">
               <a:rPr lang="en-US" smtClean="0"/>
-              <a:t>10/22/2025</a:t>
+              <a:t>10/23/2025</a:t>
             </a:fld>
             <a:endParaRPr lang="en-US"/>
           </a:p>
@@ -1810,7 +1925,7 @@
           <a:p>
             <a:fld id="{935B4303-DE67-4DA8-B375-7E6264E8BDE4}" type="datetimeFigureOut">
               <a:rPr lang="en-US" smtClean="0"/>
-              <a:t>10/22/2025</a:t>
+              <a:t>10/23/2025</a:t>
             </a:fld>
             <a:endParaRPr lang="en-US"/>
           </a:p>
@@ -2075,7 +2190,7 @@
           <a:p>
             <a:fld id="{935B4303-DE67-4DA8-B375-7E6264E8BDE4}" type="datetimeFigureOut">
               <a:rPr lang="en-US" smtClean="0"/>
-              <a:t>10/22/2025</a:t>
+              <a:t>10/23/2025</a:t>
             </a:fld>
             <a:endParaRPr lang="en-US"/>
           </a:p>
@@ -2487,7 +2602,7 @@
           <a:p>
             <a:fld id="{935B4303-DE67-4DA8-B375-7E6264E8BDE4}" type="datetimeFigureOut">
               <a:rPr lang="en-US" smtClean="0"/>
-              <a:t>10/22/2025</a:t>
+              <a:t>10/23/2025</a:t>
             </a:fld>
             <a:endParaRPr lang="en-US"/>
           </a:p>
@@ -2628,7 +2743,7 @@
           <a:p>
             <a:fld id="{935B4303-DE67-4DA8-B375-7E6264E8BDE4}" type="datetimeFigureOut">
               <a:rPr lang="en-US" smtClean="0"/>
-              <a:t>10/22/2025</a:t>
+              <a:t>10/23/2025</a:t>
             </a:fld>
             <a:endParaRPr lang="en-US"/>
           </a:p>
@@ -2741,7 +2856,7 @@
           <a:p>
             <a:fld id="{935B4303-DE67-4DA8-B375-7E6264E8BDE4}" type="datetimeFigureOut">
               <a:rPr lang="en-US" smtClean="0"/>
-              <a:t>10/22/2025</a:t>
+              <a:t>10/23/2025</a:t>
             </a:fld>
             <a:endParaRPr lang="en-US"/>
           </a:p>
@@ -3052,7 +3167,7 @@
           <a:p>
             <a:fld id="{935B4303-DE67-4DA8-B375-7E6264E8BDE4}" type="datetimeFigureOut">
               <a:rPr lang="en-US" smtClean="0"/>
-              <a:t>10/22/2025</a:t>
+              <a:t>10/23/2025</a:t>
             </a:fld>
             <a:endParaRPr lang="en-US"/>
           </a:p>
@@ -3340,7 +3455,7 @@
           <a:p>
             <a:fld id="{935B4303-DE67-4DA8-B375-7E6264E8BDE4}" type="datetimeFigureOut">
               <a:rPr lang="en-US" smtClean="0"/>
-              <a:t>10/22/2025</a:t>
+              <a:t>10/23/2025</a:t>
             </a:fld>
             <a:endParaRPr lang="en-US"/>
           </a:p>
@@ -3581,7 +3696,7 @@
           <a:p>
             <a:fld id="{935B4303-DE67-4DA8-B375-7E6264E8BDE4}" type="datetimeFigureOut">
               <a:rPr lang="en-US" smtClean="0"/>
-              <a:t>10/22/2025</a:t>
+              <a:t>10/23/2025</a:t>
             </a:fld>
             <a:endParaRPr lang="en-US"/>
           </a:p>
@@ -3990,6 +4105,3423 @@
         <p:cNvPr id="1" name="">
           <a:extLst>
             <a:ext uri="{FF2B5EF4-FFF2-40B4-BE49-F238E27FC236}">
+              <a16:creationId xmlns:a16="http://schemas.microsoft.com/office/drawing/2014/main" id="{5749AB31-8040-8323-B077-BC801A1BA720}"/>
+            </a:ext>
+          </a:extLst>
+        </p:cNvPr>
+        <p:cNvGrpSpPr/>
+        <p:nvPr/>
+      </p:nvGrpSpPr>
+      <p:grpSpPr>
+        <a:xfrm>
+          <a:off x="0" y="0"/>
+          <a:ext cx="0" cy="0"/>
+          <a:chOff x="0" y="0"/>
+          <a:chExt cx="0" cy="0"/>
+        </a:xfrm>
+      </p:grpSpPr>
+      <p:sp>
+        <p:nvSpPr>
+          <p:cNvPr id="3" name="Slide Number Placeholder 2">
+            <a:extLst>
+              <a:ext uri="{FF2B5EF4-FFF2-40B4-BE49-F238E27FC236}">
+                <a16:creationId xmlns:a16="http://schemas.microsoft.com/office/drawing/2014/main" id="{181E6319-EB59-2F14-7917-A039812DBC26}"/>
+              </a:ext>
+            </a:extLst>
+          </p:cNvPr>
+          <p:cNvSpPr>
+            <a:spLocks noGrp="1"/>
+          </p:cNvSpPr>
+          <p:nvPr>
+            <p:ph type="sldNum" sz="quarter" idx="11"/>
+          </p:nvPr>
+        </p:nvSpPr>
+        <p:spPr>
+          <a:xfrm>
+            <a:off x="9222902" y="6492875"/>
+            <a:ext cx="2743200" cy="365125"/>
+          </a:xfrm>
+        </p:spPr>
+        <p:txBody>
+          <a:bodyPr/>
+          <a:lstStyle/>
+          <a:p>
+            <a:pPr>
+              <a:defRPr/>
+            </a:pPr>
+            <a:fld id="{231CC523-8BC6-4921-807A-66BD262F34AB}" type="slidenum">
+              <a:rPr lang="en-US" smtClean="0"/>
+              <a:pPr>
+                <a:defRPr/>
+              </a:pPr>
+              <a:t>1</a:t>
+            </a:fld>
+            <a:endParaRPr lang="en-US"/>
+          </a:p>
+        </p:txBody>
+      </p:sp>
+      <p:sp>
+        <p:nvSpPr>
+          <p:cNvPr id="6" name="Title 5">
+            <a:extLst>
+              <a:ext uri="{FF2B5EF4-FFF2-40B4-BE49-F238E27FC236}">
+                <a16:creationId xmlns:a16="http://schemas.microsoft.com/office/drawing/2014/main" id="{2F4CBB14-5163-3CAF-43FE-009FFE315BB8}"/>
+              </a:ext>
+            </a:extLst>
+          </p:cNvPr>
+          <p:cNvSpPr>
+            <a:spLocks noGrp="1"/>
+          </p:cNvSpPr>
+          <p:nvPr>
+            <p:ph type="ctrTitle"/>
+          </p:nvPr>
+        </p:nvSpPr>
+        <p:spPr>
+          <a:xfrm>
+            <a:off x="1854651" y="3414294"/>
+            <a:ext cx="8739851" cy="886032"/>
+          </a:xfrm>
+        </p:spPr>
+        <p:txBody>
+          <a:bodyPr>
+            <a:normAutofit/>
+          </a:bodyPr>
+          <a:lstStyle/>
+          <a:p>
+            <a:pPr algn="ctr"/>
+            <a:r>
+              <a:rPr lang="en-US" dirty="0"/>
+              <a:t>Results and observations for </a:t>
+            </a:r>
+            <a:r>
+              <a:rPr lang="en-US" b="1" dirty="0"/>
+              <a:t>constant-temperature</a:t>
+            </a:r>
+            <a:r>
+              <a:rPr lang="en-US" dirty="0"/>
+              <a:t> MMTO</a:t>
+            </a:r>
+            <a:br>
+              <a:rPr lang="en-US" dirty="0"/>
+            </a:br>
+            <a:r>
+              <a:rPr lang="en-US" dirty="0"/>
+              <a:t>See MMTO_main.py</a:t>
+            </a:r>
+          </a:p>
+        </p:txBody>
+      </p:sp>
+    </p:spTree>
+    <p:extLst>
+      <p:ext uri="{BB962C8B-B14F-4D97-AF65-F5344CB8AC3E}">
+        <p14:creationId xmlns:p14="http://schemas.microsoft.com/office/powerpoint/2010/main" val="3517157959"/>
+      </p:ext>
+    </p:extLst>
+  </p:cSld>
+  <p:clrMapOvr>
+    <a:masterClrMapping/>
+  </p:clrMapOvr>
+</p:sld>
+</file>
+
+<file path=ppt/slides/slide10.xml><?xml version="1.0" encoding="utf-8"?>
+<p:sld xmlns:a="http://schemas.openxmlformats.org/drawingml/2006/main" xmlns:r="http://schemas.openxmlformats.org/officeDocument/2006/relationships" xmlns:p="http://schemas.openxmlformats.org/presentationml/2006/main">
+  <p:cSld>
+    <p:spTree>
+      <p:nvGrpSpPr>
+        <p:cNvPr id="1" name="">
+          <a:extLst>
+            <a:ext uri="{FF2B5EF4-FFF2-40B4-BE49-F238E27FC236}">
+              <a16:creationId xmlns:a16="http://schemas.microsoft.com/office/drawing/2014/main" id="{3474BEB7-381A-92B9-858C-B8615447E85D}"/>
+            </a:ext>
+          </a:extLst>
+        </p:cNvPr>
+        <p:cNvGrpSpPr/>
+        <p:nvPr/>
+      </p:nvGrpSpPr>
+      <p:grpSpPr>
+        <a:xfrm>
+          <a:off x="0" y="0"/>
+          <a:ext cx="0" cy="0"/>
+          <a:chOff x="0" y="0"/>
+          <a:chExt cx="0" cy="0"/>
+        </a:xfrm>
+      </p:grpSpPr>
+      <p:sp>
+        <p:nvSpPr>
+          <p:cNvPr id="3" name="Slide Number Placeholder 2">
+            <a:extLst>
+              <a:ext uri="{FF2B5EF4-FFF2-40B4-BE49-F238E27FC236}">
+                <a16:creationId xmlns:a16="http://schemas.microsoft.com/office/drawing/2014/main" id="{BD86F46A-6FBD-2762-42AA-0B99BC9C37CB}"/>
+              </a:ext>
+            </a:extLst>
+          </p:cNvPr>
+          <p:cNvSpPr>
+            <a:spLocks noGrp="1"/>
+          </p:cNvSpPr>
+          <p:nvPr>
+            <p:ph type="sldNum" sz="quarter" idx="11"/>
+          </p:nvPr>
+        </p:nvSpPr>
+        <p:spPr/>
+        <p:txBody>
+          <a:bodyPr/>
+          <a:lstStyle/>
+          <a:p>
+            <a:pPr>
+              <a:defRPr/>
+            </a:pPr>
+            <a:fld id="{231CC523-8BC6-4921-807A-66BD262F34AB}" type="slidenum">
+              <a:rPr lang="en-US" smtClean="0"/>
+              <a:pPr>
+                <a:defRPr/>
+              </a:pPr>
+              <a:t>10</a:t>
+            </a:fld>
+            <a:endParaRPr lang="en-US"/>
+          </a:p>
+        </p:txBody>
+      </p:sp>
+      <p:sp>
+        <p:nvSpPr>
+          <p:cNvPr id="9" name="Title 8">
+            <a:extLst>
+              <a:ext uri="{FF2B5EF4-FFF2-40B4-BE49-F238E27FC236}">
+                <a16:creationId xmlns:a16="http://schemas.microsoft.com/office/drawing/2014/main" id="{7A51E40B-FA75-0448-F479-3F7E6BBF7001}"/>
+              </a:ext>
+            </a:extLst>
+          </p:cNvPr>
+          <p:cNvSpPr>
+            <a:spLocks noGrp="1"/>
+          </p:cNvSpPr>
+          <p:nvPr>
+            <p:ph type="ctrTitle"/>
+          </p:nvPr>
+        </p:nvSpPr>
+        <p:spPr>
+          <a:xfrm>
+            <a:off x="381000" y="126366"/>
+            <a:ext cx="11302999" cy="612648"/>
+          </a:xfrm>
+        </p:spPr>
+        <p:txBody>
+          <a:bodyPr>
+            <a:normAutofit/>
+          </a:bodyPr>
+          <a:lstStyle/>
+          <a:p>
+            <a:r>
+              <a:rPr lang="en-US" dirty="0"/>
+              <a:t>Example 4</a:t>
+            </a:r>
+          </a:p>
+        </p:txBody>
+      </p:sp>
+      <p:sp>
+        <p:nvSpPr>
+          <p:cNvPr id="6" name="TextBox 5">
+            <a:extLst>
+              <a:ext uri="{FF2B5EF4-FFF2-40B4-BE49-F238E27FC236}">
+                <a16:creationId xmlns:a16="http://schemas.microsoft.com/office/drawing/2014/main" id="{84435818-279E-6DB7-25EA-65ED6FAD8590}"/>
+              </a:ext>
+            </a:extLst>
+          </p:cNvPr>
+          <p:cNvSpPr txBox="1"/>
+          <p:nvPr/>
+        </p:nvSpPr>
+        <p:spPr>
+          <a:xfrm>
+            <a:off x="187257" y="1297408"/>
+            <a:ext cx="7341952" cy="286360"/>
+          </a:xfrm>
+          <a:prstGeom prst="rect">
+            <a:avLst/>
+          </a:prstGeom>
+          <a:noFill/>
+        </p:spPr>
+        <p:txBody>
+          <a:bodyPr wrap="square">
+            <a:spAutoFit/>
+          </a:bodyPr>
+          <a:lstStyle/>
+          <a:p>
+            <a:pPr>
+              <a:lnSpc>
+                <a:spcPts val="1425"/>
+              </a:lnSpc>
+              <a:buNone/>
+            </a:pPr>
+            <a:r>
+              <a:rPr lang="en-US" b="0" dirty="0" err="1">
+                <a:solidFill>
+                  <a:srgbClr val="4EC9B0"/>
+                </a:solidFill>
+                <a:effectLst/>
+                <a:latin typeface="Consolas" panose="020B0609020204030204" pitchFamily="49" charset="0"/>
+              </a:rPr>
+              <a:t>MMTOExamples</a:t>
+            </a:r>
+            <a:r>
+              <a:rPr lang="en-US" b="0" dirty="0" err="1">
+                <a:solidFill>
+                  <a:srgbClr val="CCCCCC"/>
+                </a:solidFill>
+                <a:effectLst/>
+                <a:latin typeface="Consolas" panose="020B0609020204030204" pitchFamily="49" charset="0"/>
+              </a:rPr>
+              <a:t>.</a:t>
+            </a:r>
+            <a:r>
+              <a:rPr lang="en-US" b="0" dirty="0" err="1">
+                <a:solidFill>
+                  <a:srgbClr val="4FC1FF"/>
+                </a:solidFill>
+                <a:effectLst/>
+                <a:latin typeface="Consolas" panose="020B0609020204030204" pitchFamily="49" charset="0"/>
+              </a:rPr>
+              <a:t>LBracketTopLoad_Compliance_MassCriticality</a:t>
+            </a:r>
+            <a:endParaRPr lang="en-US" b="0" dirty="0">
+              <a:solidFill>
+                <a:srgbClr val="CCCCCC"/>
+              </a:solidFill>
+              <a:effectLst/>
+              <a:latin typeface="Consolas" panose="020B0609020204030204" pitchFamily="49" charset="0"/>
+            </a:endParaRPr>
+          </a:p>
+        </p:txBody>
+      </p:sp>
+      <p:pic>
+        <p:nvPicPr>
+          <p:cNvPr id="4" name="Picture 3">
+            <a:extLst>
+              <a:ext uri="{FF2B5EF4-FFF2-40B4-BE49-F238E27FC236}">
+                <a16:creationId xmlns:a16="http://schemas.microsoft.com/office/drawing/2014/main" id="{E5F5AA58-2830-EC77-3ED8-CC5BC05DDB3C}"/>
+              </a:ext>
+            </a:extLst>
+          </p:cNvPr>
+          <p:cNvPicPr>
+            <a:picLocks noChangeAspect="1"/>
+          </p:cNvPicPr>
+          <p:nvPr/>
+        </p:nvPicPr>
+        <p:blipFill>
+          <a:blip r:embed="rId2"/>
+          <a:stretch>
+            <a:fillRect/>
+          </a:stretch>
+        </p:blipFill>
+        <p:spPr>
+          <a:xfrm>
+            <a:off x="660579" y="1737765"/>
+            <a:ext cx="3523809" cy="2295238"/>
+          </a:xfrm>
+          <a:prstGeom prst="rect">
+            <a:avLst/>
+          </a:prstGeom>
+        </p:spPr>
+      </p:pic>
+      <p:pic>
+        <p:nvPicPr>
+          <p:cNvPr id="13" name="Picture 12">
+            <a:extLst>
+              <a:ext uri="{FF2B5EF4-FFF2-40B4-BE49-F238E27FC236}">
+                <a16:creationId xmlns:a16="http://schemas.microsoft.com/office/drawing/2014/main" id="{5B86AE06-3CC8-9464-1860-F21B26CF0614}"/>
+              </a:ext>
+            </a:extLst>
+          </p:cNvPr>
+          <p:cNvPicPr>
+            <a:picLocks noChangeAspect="1"/>
+          </p:cNvPicPr>
+          <p:nvPr/>
+        </p:nvPicPr>
+        <p:blipFill>
+          <a:blip r:embed="rId3"/>
+          <a:stretch>
+            <a:fillRect/>
+          </a:stretch>
+        </p:blipFill>
+        <p:spPr>
+          <a:xfrm>
+            <a:off x="5961623" y="1737765"/>
+            <a:ext cx="5647619" cy="4219048"/>
+          </a:xfrm>
+          <a:prstGeom prst="rect">
+            <a:avLst/>
+          </a:prstGeom>
+        </p:spPr>
+      </p:pic>
+      <p:pic>
+        <p:nvPicPr>
+          <p:cNvPr id="5" name="Picture 4">
+            <a:extLst>
+              <a:ext uri="{FF2B5EF4-FFF2-40B4-BE49-F238E27FC236}">
+                <a16:creationId xmlns:a16="http://schemas.microsoft.com/office/drawing/2014/main" id="{603875CE-B21F-29D5-A630-A1884A3EB673}"/>
+              </a:ext>
+            </a:extLst>
+          </p:cNvPr>
+          <p:cNvPicPr>
+            <a:picLocks noChangeAspect="1"/>
+          </p:cNvPicPr>
+          <p:nvPr/>
+        </p:nvPicPr>
+        <p:blipFill>
+          <a:blip r:embed="rId4"/>
+          <a:stretch>
+            <a:fillRect/>
+          </a:stretch>
+        </p:blipFill>
+        <p:spPr>
+          <a:xfrm>
+            <a:off x="381000" y="4187000"/>
+            <a:ext cx="4778154" cy="1135478"/>
+          </a:xfrm>
+          <a:prstGeom prst="rect">
+            <a:avLst/>
+          </a:prstGeom>
+        </p:spPr>
+      </p:pic>
+      <p:sp>
+        <p:nvSpPr>
+          <p:cNvPr id="7" name="TextBox 6">
+            <a:extLst>
+              <a:ext uri="{FF2B5EF4-FFF2-40B4-BE49-F238E27FC236}">
+                <a16:creationId xmlns:a16="http://schemas.microsoft.com/office/drawing/2014/main" id="{863D3D90-2A0C-DF3D-FDC5-66DAD2049E04}"/>
+              </a:ext>
+            </a:extLst>
+          </p:cNvPr>
+          <p:cNvSpPr txBox="1"/>
+          <p:nvPr/>
+        </p:nvSpPr>
+        <p:spPr>
+          <a:xfrm>
+            <a:off x="165342" y="5505748"/>
+            <a:ext cx="6339630" cy="830997"/>
+          </a:xfrm>
+          <a:prstGeom prst="rect">
+            <a:avLst/>
+          </a:prstGeom>
+          <a:noFill/>
+        </p:spPr>
+        <p:txBody>
+          <a:bodyPr wrap="square" rtlCol="0">
+            <a:spAutoFit/>
+          </a:bodyPr>
+          <a:lstStyle/>
+          <a:p>
+            <a:r>
+              <a:rPr lang="en-US" sz="2400" dirty="0">
+                <a:highlight>
+                  <a:srgbClr val="FFFF00"/>
+                </a:highlight>
+              </a:rPr>
+              <a:t>Max criticality constraint ensures that materials of criticality are avoided</a:t>
+            </a:r>
+          </a:p>
+        </p:txBody>
+      </p:sp>
+    </p:spTree>
+    <p:extLst>
+      <p:ext uri="{BB962C8B-B14F-4D97-AF65-F5344CB8AC3E}">
+        <p14:creationId xmlns:p14="http://schemas.microsoft.com/office/powerpoint/2010/main" val="2732281813"/>
+      </p:ext>
+    </p:extLst>
+  </p:cSld>
+  <p:clrMapOvr>
+    <a:masterClrMapping/>
+  </p:clrMapOvr>
+</p:sld>
+</file>
+
+<file path=ppt/slides/slide11.xml><?xml version="1.0" encoding="utf-8"?>
+<p:sld xmlns:a="http://schemas.openxmlformats.org/drawingml/2006/main" xmlns:r="http://schemas.openxmlformats.org/officeDocument/2006/relationships" xmlns:p="http://schemas.openxmlformats.org/presentationml/2006/main">
+  <p:cSld>
+    <p:spTree>
+      <p:nvGrpSpPr>
+        <p:cNvPr id="1" name="">
+          <a:extLst>
+            <a:ext uri="{FF2B5EF4-FFF2-40B4-BE49-F238E27FC236}">
+              <a16:creationId xmlns:a16="http://schemas.microsoft.com/office/drawing/2014/main" id="{94B97CFD-C5C6-1271-F679-32510BB95907}"/>
+            </a:ext>
+          </a:extLst>
+        </p:cNvPr>
+        <p:cNvGrpSpPr/>
+        <p:nvPr/>
+      </p:nvGrpSpPr>
+      <p:grpSpPr>
+        <a:xfrm>
+          <a:off x="0" y="0"/>
+          <a:ext cx="0" cy="0"/>
+          <a:chOff x="0" y="0"/>
+          <a:chExt cx="0" cy="0"/>
+        </a:xfrm>
+      </p:grpSpPr>
+      <p:sp>
+        <p:nvSpPr>
+          <p:cNvPr id="3" name="Slide Number Placeholder 2">
+            <a:extLst>
+              <a:ext uri="{FF2B5EF4-FFF2-40B4-BE49-F238E27FC236}">
+                <a16:creationId xmlns:a16="http://schemas.microsoft.com/office/drawing/2014/main" id="{49CE5945-E73B-EA98-079F-91C3A159C393}"/>
+              </a:ext>
+            </a:extLst>
+          </p:cNvPr>
+          <p:cNvSpPr>
+            <a:spLocks noGrp="1"/>
+          </p:cNvSpPr>
+          <p:nvPr>
+            <p:ph type="sldNum" sz="quarter" idx="11"/>
+          </p:nvPr>
+        </p:nvSpPr>
+        <p:spPr/>
+        <p:txBody>
+          <a:bodyPr/>
+          <a:lstStyle/>
+          <a:p>
+            <a:pPr>
+              <a:defRPr/>
+            </a:pPr>
+            <a:fld id="{231CC523-8BC6-4921-807A-66BD262F34AB}" type="slidenum">
+              <a:rPr lang="en-US" smtClean="0"/>
+              <a:pPr>
+                <a:defRPr/>
+              </a:pPr>
+              <a:t>11</a:t>
+            </a:fld>
+            <a:endParaRPr lang="en-US"/>
+          </a:p>
+        </p:txBody>
+      </p:sp>
+      <p:sp>
+        <p:nvSpPr>
+          <p:cNvPr id="9" name="Title 8">
+            <a:extLst>
+              <a:ext uri="{FF2B5EF4-FFF2-40B4-BE49-F238E27FC236}">
+                <a16:creationId xmlns:a16="http://schemas.microsoft.com/office/drawing/2014/main" id="{D1CF4163-1892-01D1-B5F8-6E9E107C8DD6}"/>
+              </a:ext>
+            </a:extLst>
+          </p:cNvPr>
+          <p:cNvSpPr>
+            <a:spLocks noGrp="1"/>
+          </p:cNvSpPr>
+          <p:nvPr>
+            <p:ph type="ctrTitle"/>
+          </p:nvPr>
+        </p:nvSpPr>
+        <p:spPr>
+          <a:xfrm>
+            <a:off x="381000" y="126366"/>
+            <a:ext cx="11302999" cy="612648"/>
+          </a:xfrm>
+        </p:spPr>
+        <p:txBody>
+          <a:bodyPr>
+            <a:normAutofit/>
+          </a:bodyPr>
+          <a:lstStyle/>
+          <a:p>
+            <a:r>
+              <a:rPr lang="en-US" dirty="0"/>
+              <a:t>Example 5</a:t>
+            </a:r>
+          </a:p>
+        </p:txBody>
+      </p:sp>
+      <p:sp>
+        <p:nvSpPr>
+          <p:cNvPr id="5" name="TextBox 4">
+            <a:extLst>
+              <a:ext uri="{FF2B5EF4-FFF2-40B4-BE49-F238E27FC236}">
+                <a16:creationId xmlns:a16="http://schemas.microsoft.com/office/drawing/2014/main" id="{9A59264C-C039-C674-F32B-A0BFFAF6CB08}"/>
+              </a:ext>
+            </a:extLst>
+          </p:cNvPr>
+          <p:cNvSpPr txBox="1"/>
+          <p:nvPr/>
+        </p:nvSpPr>
+        <p:spPr>
+          <a:xfrm>
+            <a:off x="206712" y="1262467"/>
+            <a:ext cx="6094378" cy="286360"/>
+          </a:xfrm>
+          <a:prstGeom prst="rect">
+            <a:avLst/>
+          </a:prstGeom>
+          <a:noFill/>
+        </p:spPr>
+        <p:txBody>
+          <a:bodyPr wrap="square">
+            <a:spAutoFit/>
+          </a:bodyPr>
+          <a:lstStyle/>
+          <a:p>
+            <a:pPr>
+              <a:lnSpc>
+                <a:spcPts val="1425"/>
+              </a:lnSpc>
+              <a:buNone/>
+            </a:pPr>
+            <a:r>
+              <a:rPr lang="en-US" b="0" dirty="0" err="1">
+                <a:solidFill>
+                  <a:srgbClr val="4EC9B0"/>
+                </a:solidFill>
+                <a:effectLst/>
+                <a:latin typeface="Consolas" panose="020B0609020204030204" pitchFamily="49" charset="0"/>
+              </a:rPr>
+              <a:t>MMTOExamples</a:t>
+            </a:r>
+            <a:r>
+              <a:rPr lang="en-US" b="0" dirty="0" err="1">
+                <a:solidFill>
+                  <a:srgbClr val="CCCCCC"/>
+                </a:solidFill>
+                <a:effectLst/>
+                <a:latin typeface="Consolas" panose="020B0609020204030204" pitchFamily="49" charset="0"/>
+              </a:rPr>
+              <a:t>.</a:t>
+            </a:r>
+            <a:r>
+              <a:rPr lang="en-US" b="0" dirty="0" err="1">
+                <a:solidFill>
+                  <a:srgbClr val="4FC1FF"/>
+                </a:solidFill>
+                <a:effectLst/>
+                <a:latin typeface="Consolas" panose="020B0609020204030204" pitchFamily="49" charset="0"/>
+              </a:rPr>
+              <a:t>LBracketTopLoad_Stress_Compliance</a:t>
+            </a:r>
+            <a:endParaRPr lang="en-US" b="0" dirty="0">
+              <a:solidFill>
+                <a:srgbClr val="CCCCCC"/>
+              </a:solidFill>
+              <a:effectLst/>
+              <a:latin typeface="Consolas" panose="020B0609020204030204" pitchFamily="49" charset="0"/>
+            </a:endParaRPr>
+          </a:p>
+        </p:txBody>
+      </p:sp>
+      <p:pic>
+        <p:nvPicPr>
+          <p:cNvPr id="4" name="Picture 3">
+            <a:extLst>
+              <a:ext uri="{FF2B5EF4-FFF2-40B4-BE49-F238E27FC236}">
+                <a16:creationId xmlns:a16="http://schemas.microsoft.com/office/drawing/2014/main" id="{662F36F5-8DA5-AD25-4C0A-50562B827858}"/>
+              </a:ext>
+            </a:extLst>
+          </p:cNvPr>
+          <p:cNvPicPr>
+            <a:picLocks noChangeAspect="1"/>
+          </p:cNvPicPr>
+          <p:nvPr/>
+        </p:nvPicPr>
+        <p:blipFill>
+          <a:blip r:embed="rId2"/>
+          <a:stretch>
+            <a:fillRect/>
+          </a:stretch>
+        </p:blipFill>
+        <p:spPr>
+          <a:xfrm>
+            <a:off x="967376" y="1789050"/>
+            <a:ext cx="4168966" cy="2741753"/>
+          </a:xfrm>
+          <a:prstGeom prst="rect">
+            <a:avLst/>
+          </a:prstGeom>
+        </p:spPr>
+      </p:pic>
+      <p:pic>
+        <p:nvPicPr>
+          <p:cNvPr id="7" name="Picture 6">
+            <a:extLst>
+              <a:ext uri="{FF2B5EF4-FFF2-40B4-BE49-F238E27FC236}">
+                <a16:creationId xmlns:a16="http://schemas.microsoft.com/office/drawing/2014/main" id="{70325408-D924-2902-FD3D-ABCAA2213D93}"/>
+              </a:ext>
+            </a:extLst>
+          </p:cNvPr>
+          <p:cNvPicPr>
+            <a:picLocks noChangeAspect="1"/>
+          </p:cNvPicPr>
+          <p:nvPr/>
+        </p:nvPicPr>
+        <p:blipFill>
+          <a:blip r:embed="rId3"/>
+          <a:stretch>
+            <a:fillRect/>
+          </a:stretch>
+        </p:blipFill>
+        <p:spPr>
+          <a:xfrm>
+            <a:off x="6301090" y="916055"/>
+            <a:ext cx="5593565" cy="4099915"/>
+          </a:xfrm>
+          <a:prstGeom prst="rect">
+            <a:avLst/>
+          </a:prstGeom>
+        </p:spPr>
+      </p:pic>
+      <p:pic>
+        <p:nvPicPr>
+          <p:cNvPr id="10" name="Picture 9">
+            <a:extLst>
+              <a:ext uri="{FF2B5EF4-FFF2-40B4-BE49-F238E27FC236}">
+                <a16:creationId xmlns:a16="http://schemas.microsoft.com/office/drawing/2014/main" id="{C5EED1B8-7B1E-16E6-B557-3E153A0E7E34}"/>
+              </a:ext>
+            </a:extLst>
+          </p:cNvPr>
+          <p:cNvPicPr>
+            <a:picLocks noChangeAspect="1"/>
+          </p:cNvPicPr>
+          <p:nvPr/>
+        </p:nvPicPr>
+        <p:blipFill>
+          <a:blip r:embed="rId4"/>
+          <a:stretch>
+            <a:fillRect/>
+          </a:stretch>
+        </p:blipFill>
+        <p:spPr>
+          <a:xfrm>
+            <a:off x="823048" y="4694690"/>
+            <a:ext cx="4313294" cy="899238"/>
+          </a:xfrm>
+          <a:prstGeom prst="rect">
+            <a:avLst/>
+          </a:prstGeom>
+        </p:spPr>
+      </p:pic>
+      <p:sp>
+        <p:nvSpPr>
+          <p:cNvPr id="2" name="TextBox 1">
+            <a:extLst>
+              <a:ext uri="{FF2B5EF4-FFF2-40B4-BE49-F238E27FC236}">
+                <a16:creationId xmlns:a16="http://schemas.microsoft.com/office/drawing/2014/main" id="{1B7FB38D-8E08-3C10-2B9F-49A6F9EAD50C}"/>
+              </a:ext>
+            </a:extLst>
+          </p:cNvPr>
+          <p:cNvSpPr txBox="1"/>
+          <p:nvPr/>
+        </p:nvSpPr>
+        <p:spPr>
+          <a:xfrm>
+            <a:off x="206712" y="5894685"/>
+            <a:ext cx="7417494" cy="461665"/>
+          </a:xfrm>
+          <a:prstGeom prst="rect">
+            <a:avLst/>
+          </a:prstGeom>
+          <a:noFill/>
+        </p:spPr>
+        <p:txBody>
+          <a:bodyPr wrap="square" rtlCol="0">
+            <a:spAutoFit/>
+          </a:bodyPr>
+          <a:lstStyle/>
+          <a:p>
+            <a:r>
+              <a:rPr lang="en-US" sz="2400" dirty="0">
+                <a:highlight>
+                  <a:srgbClr val="FFFF00"/>
+                </a:highlight>
+              </a:rPr>
+              <a:t>Optimizer seems to prefer a single material (?!)</a:t>
+            </a:r>
+          </a:p>
+        </p:txBody>
+      </p:sp>
+    </p:spTree>
+    <p:extLst>
+      <p:ext uri="{BB962C8B-B14F-4D97-AF65-F5344CB8AC3E}">
+        <p14:creationId xmlns:p14="http://schemas.microsoft.com/office/powerpoint/2010/main" val="3267386641"/>
+      </p:ext>
+    </p:extLst>
+  </p:cSld>
+  <p:clrMapOvr>
+    <a:masterClrMapping/>
+  </p:clrMapOvr>
+</p:sld>
+</file>
+
+<file path=ppt/slides/slide12.xml><?xml version="1.0" encoding="utf-8"?>
+<p:sld xmlns:a="http://schemas.openxmlformats.org/drawingml/2006/main" xmlns:r="http://schemas.openxmlformats.org/officeDocument/2006/relationships" xmlns:p="http://schemas.openxmlformats.org/presentationml/2006/main">
+  <p:cSld>
+    <p:spTree>
+      <p:nvGrpSpPr>
+        <p:cNvPr id="1" name="">
+          <a:extLst>
+            <a:ext uri="{FF2B5EF4-FFF2-40B4-BE49-F238E27FC236}">
+              <a16:creationId xmlns:a16="http://schemas.microsoft.com/office/drawing/2014/main" id="{AE17A109-E093-0AF2-12EA-4695D7A94D24}"/>
+            </a:ext>
+          </a:extLst>
+        </p:cNvPr>
+        <p:cNvGrpSpPr/>
+        <p:nvPr/>
+      </p:nvGrpSpPr>
+      <p:grpSpPr>
+        <a:xfrm>
+          <a:off x="0" y="0"/>
+          <a:ext cx="0" cy="0"/>
+          <a:chOff x="0" y="0"/>
+          <a:chExt cx="0" cy="0"/>
+        </a:xfrm>
+      </p:grpSpPr>
+      <p:sp>
+        <p:nvSpPr>
+          <p:cNvPr id="3" name="Slide Number Placeholder 2">
+            <a:extLst>
+              <a:ext uri="{FF2B5EF4-FFF2-40B4-BE49-F238E27FC236}">
+                <a16:creationId xmlns:a16="http://schemas.microsoft.com/office/drawing/2014/main" id="{1916437F-2CB2-5145-AB09-09B653E29210}"/>
+              </a:ext>
+            </a:extLst>
+          </p:cNvPr>
+          <p:cNvSpPr>
+            <a:spLocks noGrp="1"/>
+          </p:cNvSpPr>
+          <p:nvPr>
+            <p:ph type="sldNum" sz="quarter" idx="11"/>
+          </p:nvPr>
+        </p:nvSpPr>
+        <p:spPr/>
+        <p:txBody>
+          <a:bodyPr/>
+          <a:lstStyle/>
+          <a:p>
+            <a:pPr>
+              <a:defRPr/>
+            </a:pPr>
+            <a:fld id="{231CC523-8BC6-4921-807A-66BD262F34AB}" type="slidenum">
+              <a:rPr lang="en-US" smtClean="0"/>
+              <a:pPr>
+                <a:defRPr/>
+              </a:pPr>
+              <a:t>12</a:t>
+            </a:fld>
+            <a:endParaRPr lang="en-US"/>
+          </a:p>
+        </p:txBody>
+      </p:sp>
+      <p:sp>
+        <p:nvSpPr>
+          <p:cNvPr id="9" name="Title 8">
+            <a:extLst>
+              <a:ext uri="{FF2B5EF4-FFF2-40B4-BE49-F238E27FC236}">
+                <a16:creationId xmlns:a16="http://schemas.microsoft.com/office/drawing/2014/main" id="{DB58D403-6C55-0AF2-9DD1-87B2879C3DB8}"/>
+              </a:ext>
+            </a:extLst>
+          </p:cNvPr>
+          <p:cNvSpPr>
+            <a:spLocks noGrp="1"/>
+          </p:cNvSpPr>
+          <p:nvPr>
+            <p:ph type="ctrTitle"/>
+          </p:nvPr>
+        </p:nvSpPr>
+        <p:spPr>
+          <a:xfrm>
+            <a:off x="381000" y="126366"/>
+            <a:ext cx="11302999" cy="612648"/>
+          </a:xfrm>
+        </p:spPr>
+        <p:txBody>
+          <a:bodyPr>
+            <a:normAutofit/>
+          </a:bodyPr>
+          <a:lstStyle/>
+          <a:p>
+            <a:r>
+              <a:rPr lang="en-US" dirty="0"/>
+              <a:t>Materials: </a:t>
+            </a:r>
+            <a:r>
+              <a:rPr lang="en-US" dirty="0" err="1"/>
+              <a:t>DataConstantTemperature</a:t>
+            </a:r>
+            <a:r>
+              <a:rPr lang="en-US" dirty="0"/>
+              <a:t>/20MaterialsTeledyne.xlsx </a:t>
+            </a:r>
+          </a:p>
+        </p:txBody>
+      </p:sp>
+      <p:pic>
+        <p:nvPicPr>
+          <p:cNvPr id="6" name="Picture 5">
+            <a:extLst>
+              <a:ext uri="{FF2B5EF4-FFF2-40B4-BE49-F238E27FC236}">
+                <a16:creationId xmlns:a16="http://schemas.microsoft.com/office/drawing/2014/main" id="{2EB83ABB-B0F8-D140-C16F-FFD869F1D55D}"/>
+              </a:ext>
+            </a:extLst>
+          </p:cNvPr>
+          <p:cNvPicPr>
+            <a:picLocks noChangeAspect="1"/>
+          </p:cNvPicPr>
+          <p:nvPr/>
+        </p:nvPicPr>
+        <p:blipFill>
+          <a:blip r:embed="rId2"/>
+          <a:stretch>
+            <a:fillRect/>
+          </a:stretch>
+        </p:blipFill>
+        <p:spPr>
+          <a:xfrm>
+            <a:off x="142672" y="1632515"/>
+            <a:ext cx="7501582" cy="3592969"/>
+          </a:xfrm>
+          <a:prstGeom prst="rect">
+            <a:avLst/>
+          </a:prstGeom>
+        </p:spPr>
+      </p:pic>
+      <p:pic>
+        <p:nvPicPr>
+          <p:cNvPr id="5" name="Picture 4">
+            <a:extLst>
+              <a:ext uri="{FF2B5EF4-FFF2-40B4-BE49-F238E27FC236}">
+                <a16:creationId xmlns:a16="http://schemas.microsoft.com/office/drawing/2014/main" id="{C02288BC-C7E6-57E9-657A-2E93CF50F807}"/>
+              </a:ext>
+            </a:extLst>
+          </p:cNvPr>
+          <p:cNvPicPr>
+            <a:picLocks noChangeAspect="1"/>
+          </p:cNvPicPr>
+          <p:nvPr/>
+        </p:nvPicPr>
+        <p:blipFill>
+          <a:blip r:embed="rId3"/>
+          <a:stretch>
+            <a:fillRect/>
+          </a:stretch>
+        </p:blipFill>
+        <p:spPr>
+          <a:xfrm>
+            <a:off x="221773" y="5507874"/>
+            <a:ext cx="5874227" cy="601299"/>
+          </a:xfrm>
+          <a:prstGeom prst="rect">
+            <a:avLst/>
+          </a:prstGeom>
+        </p:spPr>
+      </p:pic>
+      <p:sp>
+        <p:nvSpPr>
+          <p:cNvPr id="2" name="TextBox 1">
+            <a:extLst>
+              <a:ext uri="{FF2B5EF4-FFF2-40B4-BE49-F238E27FC236}">
+                <a16:creationId xmlns:a16="http://schemas.microsoft.com/office/drawing/2014/main" id="{80E8DCE0-2D6A-5621-C0DB-49174BDF0C96}"/>
+              </a:ext>
+            </a:extLst>
+          </p:cNvPr>
+          <p:cNvSpPr txBox="1"/>
+          <p:nvPr/>
+        </p:nvSpPr>
+        <p:spPr>
+          <a:xfrm>
+            <a:off x="381000" y="6213318"/>
+            <a:ext cx="4036268" cy="461665"/>
+          </a:xfrm>
+          <a:prstGeom prst="rect">
+            <a:avLst/>
+          </a:prstGeom>
+          <a:noFill/>
+        </p:spPr>
+        <p:txBody>
+          <a:bodyPr wrap="square" rtlCol="0">
+            <a:spAutoFit/>
+          </a:bodyPr>
+          <a:lstStyle/>
+          <a:p>
+            <a:r>
+              <a:rPr lang="en-US" sz="2400" dirty="0">
+                <a:highlight>
+                  <a:srgbClr val="FFFF00"/>
+                </a:highlight>
+              </a:rPr>
+              <a:t>Training takes about 6 mins. </a:t>
+            </a:r>
+          </a:p>
+        </p:txBody>
+      </p:sp>
+      <p:pic>
+        <p:nvPicPr>
+          <p:cNvPr id="7" name="Picture 6">
+            <a:extLst>
+              <a:ext uri="{FF2B5EF4-FFF2-40B4-BE49-F238E27FC236}">
+                <a16:creationId xmlns:a16="http://schemas.microsoft.com/office/drawing/2014/main" id="{A8E6B6CA-2A97-1739-22E3-E0B52E8E5B51}"/>
+              </a:ext>
+            </a:extLst>
+          </p:cNvPr>
+          <p:cNvPicPr>
+            <a:picLocks noChangeAspect="1"/>
+          </p:cNvPicPr>
+          <p:nvPr/>
+        </p:nvPicPr>
+        <p:blipFill>
+          <a:blip r:embed="rId4"/>
+          <a:stretch>
+            <a:fillRect/>
+          </a:stretch>
+        </p:blipFill>
+        <p:spPr>
+          <a:xfrm>
+            <a:off x="8038298" y="4238485"/>
+            <a:ext cx="4036268" cy="1731900"/>
+          </a:xfrm>
+          <a:prstGeom prst="rect">
+            <a:avLst/>
+          </a:prstGeom>
+        </p:spPr>
+      </p:pic>
+      <p:sp>
+        <p:nvSpPr>
+          <p:cNvPr id="8" name="TextBox 7">
+            <a:extLst>
+              <a:ext uri="{FF2B5EF4-FFF2-40B4-BE49-F238E27FC236}">
+                <a16:creationId xmlns:a16="http://schemas.microsoft.com/office/drawing/2014/main" id="{BD69D610-66A2-6E24-218C-BBD31E406755}"/>
+              </a:ext>
+            </a:extLst>
+          </p:cNvPr>
+          <p:cNvSpPr txBox="1"/>
+          <p:nvPr/>
+        </p:nvSpPr>
+        <p:spPr>
+          <a:xfrm>
+            <a:off x="8038298" y="6030302"/>
+            <a:ext cx="4036268" cy="827698"/>
+          </a:xfrm>
+          <a:prstGeom prst="rect">
+            <a:avLst/>
+          </a:prstGeom>
+          <a:noFill/>
+        </p:spPr>
+        <p:txBody>
+          <a:bodyPr wrap="square" rtlCol="0">
+            <a:spAutoFit/>
+          </a:bodyPr>
+          <a:lstStyle/>
+          <a:p>
+            <a:r>
+              <a:rPr lang="en-US" sz="2400" dirty="0">
+                <a:highlight>
+                  <a:srgbClr val="FFFF00"/>
+                </a:highlight>
+              </a:rPr>
+              <a:t>All attributes reconstruction errors are within 1% </a:t>
+            </a:r>
+          </a:p>
+        </p:txBody>
+      </p:sp>
+      <p:sp>
+        <p:nvSpPr>
+          <p:cNvPr id="10" name="TextBox 9">
+            <a:extLst>
+              <a:ext uri="{FF2B5EF4-FFF2-40B4-BE49-F238E27FC236}">
+                <a16:creationId xmlns:a16="http://schemas.microsoft.com/office/drawing/2014/main" id="{17D85E17-6A45-0399-D07E-8600B9408569}"/>
+              </a:ext>
+            </a:extLst>
+          </p:cNvPr>
+          <p:cNvSpPr txBox="1"/>
+          <p:nvPr/>
+        </p:nvSpPr>
+        <p:spPr>
+          <a:xfrm>
+            <a:off x="0" y="865134"/>
+            <a:ext cx="1799467" cy="646331"/>
+          </a:xfrm>
+          <a:prstGeom prst="rect">
+            <a:avLst/>
+          </a:prstGeom>
+          <a:noFill/>
+        </p:spPr>
+        <p:txBody>
+          <a:bodyPr wrap="none" rtlCol="0">
+            <a:spAutoFit/>
+          </a:bodyPr>
+          <a:lstStyle/>
+          <a:p>
+            <a:pPr marL="285750" indent="-285750">
+              <a:buFont typeface="Arial" panose="020B0604020202020204" pitchFamily="34" charset="0"/>
+              <a:buChar char="•"/>
+            </a:pPr>
+            <a:r>
+              <a:rPr lang="en-US" b="1" dirty="0"/>
+              <a:t>20 materials</a:t>
+            </a:r>
+          </a:p>
+          <a:p>
+            <a:pPr marL="285750" indent="-285750">
+              <a:buFont typeface="Arial" panose="020B0604020202020204" pitchFamily="34" charset="0"/>
+              <a:buChar char="•"/>
+            </a:pPr>
+            <a:r>
+              <a:rPr lang="en-US" b="1" dirty="0"/>
+              <a:t>5 attributes</a:t>
+            </a:r>
+          </a:p>
+        </p:txBody>
+      </p:sp>
+    </p:spTree>
+    <p:extLst>
+      <p:ext uri="{BB962C8B-B14F-4D97-AF65-F5344CB8AC3E}">
+        <p14:creationId xmlns:p14="http://schemas.microsoft.com/office/powerpoint/2010/main" val="1561751920"/>
+      </p:ext>
+    </p:extLst>
+  </p:cSld>
+  <p:clrMapOvr>
+    <a:masterClrMapping/>
+  </p:clrMapOvr>
+</p:sld>
+</file>
+
+<file path=ppt/slides/slide13.xml><?xml version="1.0" encoding="utf-8"?>
+<p:sld xmlns:a="http://schemas.openxmlformats.org/drawingml/2006/main" xmlns:r="http://schemas.openxmlformats.org/officeDocument/2006/relationships" xmlns:p="http://schemas.openxmlformats.org/presentationml/2006/main">
+  <p:cSld>
+    <p:spTree>
+      <p:nvGrpSpPr>
+        <p:cNvPr id="1" name="">
+          <a:extLst>
+            <a:ext uri="{FF2B5EF4-FFF2-40B4-BE49-F238E27FC236}">
+              <a16:creationId xmlns:a16="http://schemas.microsoft.com/office/drawing/2014/main" id="{BDC3144F-F0E0-FD4E-DDF4-2620F9114E04}"/>
+            </a:ext>
+          </a:extLst>
+        </p:cNvPr>
+        <p:cNvGrpSpPr/>
+        <p:nvPr/>
+      </p:nvGrpSpPr>
+      <p:grpSpPr>
+        <a:xfrm>
+          <a:off x="0" y="0"/>
+          <a:ext cx="0" cy="0"/>
+          <a:chOff x="0" y="0"/>
+          <a:chExt cx="0" cy="0"/>
+        </a:xfrm>
+      </p:grpSpPr>
+      <p:sp>
+        <p:nvSpPr>
+          <p:cNvPr id="3" name="Slide Number Placeholder 2">
+            <a:extLst>
+              <a:ext uri="{FF2B5EF4-FFF2-40B4-BE49-F238E27FC236}">
+                <a16:creationId xmlns:a16="http://schemas.microsoft.com/office/drawing/2014/main" id="{AB4044A5-0777-FF7E-D1EE-4AD92952E3FB}"/>
+              </a:ext>
+            </a:extLst>
+          </p:cNvPr>
+          <p:cNvSpPr>
+            <a:spLocks noGrp="1"/>
+          </p:cNvSpPr>
+          <p:nvPr>
+            <p:ph type="sldNum" sz="quarter" idx="11"/>
+          </p:nvPr>
+        </p:nvSpPr>
+        <p:spPr/>
+        <p:txBody>
+          <a:bodyPr/>
+          <a:lstStyle/>
+          <a:p>
+            <a:pPr>
+              <a:defRPr/>
+            </a:pPr>
+            <a:fld id="{231CC523-8BC6-4921-807A-66BD262F34AB}" type="slidenum">
+              <a:rPr lang="en-US" smtClean="0"/>
+              <a:pPr>
+                <a:defRPr/>
+              </a:pPr>
+              <a:t>13</a:t>
+            </a:fld>
+            <a:endParaRPr lang="en-US"/>
+          </a:p>
+        </p:txBody>
+      </p:sp>
+      <p:sp>
+        <p:nvSpPr>
+          <p:cNvPr id="9" name="Title 8">
+            <a:extLst>
+              <a:ext uri="{FF2B5EF4-FFF2-40B4-BE49-F238E27FC236}">
+                <a16:creationId xmlns:a16="http://schemas.microsoft.com/office/drawing/2014/main" id="{E0F44803-E0B7-576B-7742-1775E15ECB70}"/>
+              </a:ext>
+            </a:extLst>
+          </p:cNvPr>
+          <p:cNvSpPr>
+            <a:spLocks noGrp="1"/>
+          </p:cNvSpPr>
+          <p:nvPr>
+            <p:ph type="ctrTitle"/>
+          </p:nvPr>
+        </p:nvSpPr>
+        <p:spPr>
+          <a:xfrm>
+            <a:off x="381000" y="126366"/>
+            <a:ext cx="11302999" cy="612648"/>
+          </a:xfrm>
+        </p:spPr>
+        <p:txBody>
+          <a:bodyPr>
+            <a:normAutofit/>
+          </a:bodyPr>
+          <a:lstStyle/>
+          <a:p>
+            <a:r>
+              <a:rPr lang="en-US" dirty="0"/>
+              <a:t>Materials: Sample Latent Space</a:t>
+            </a:r>
+          </a:p>
+        </p:txBody>
+      </p:sp>
+      <p:pic>
+        <p:nvPicPr>
+          <p:cNvPr id="4" name="Picture 3">
+            <a:extLst>
+              <a:ext uri="{FF2B5EF4-FFF2-40B4-BE49-F238E27FC236}">
+                <a16:creationId xmlns:a16="http://schemas.microsoft.com/office/drawing/2014/main" id="{D4556B28-6350-089F-6CFE-16C518FAC3D0}"/>
+              </a:ext>
+            </a:extLst>
+          </p:cNvPr>
+          <p:cNvPicPr>
+            <a:picLocks noChangeAspect="1"/>
+          </p:cNvPicPr>
+          <p:nvPr/>
+        </p:nvPicPr>
+        <p:blipFill>
+          <a:blip r:embed="rId2"/>
+          <a:stretch>
+            <a:fillRect/>
+          </a:stretch>
+        </p:blipFill>
+        <p:spPr>
+          <a:xfrm>
+            <a:off x="304853" y="1523398"/>
+            <a:ext cx="5459438" cy="4358537"/>
+          </a:xfrm>
+          <a:prstGeom prst="rect">
+            <a:avLst/>
+          </a:prstGeom>
+        </p:spPr>
+      </p:pic>
+      <p:sp>
+        <p:nvSpPr>
+          <p:cNvPr id="8" name="TextBox 7">
+            <a:extLst>
+              <a:ext uri="{FF2B5EF4-FFF2-40B4-BE49-F238E27FC236}">
+                <a16:creationId xmlns:a16="http://schemas.microsoft.com/office/drawing/2014/main" id="{FE534949-93FF-9C6C-5F70-8D9A2FA8A8FB}"/>
+              </a:ext>
+            </a:extLst>
+          </p:cNvPr>
+          <p:cNvSpPr txBox="1"/>
+          <p:nvPr/>
+        </p:nvSpPr>
+        <p:spPr>
+          <a:xfrm>
+            <a:off x="1563304" y="1092822"/>
+            <a:ext cx="2942537" cy="523220"/>
+          </a:xfrm>
+          <a:prstGeom prst="rect">
+            <a:avLst/>
+          </a:prstGeom>
+          <a:noFill/>
+        </p:spPr>
+        <p:txBody>
+          <a:bodyPr wrap="none" rtlCol="0">
+            <a:spAutoFit/>
+          </a:bodyPr>
+          <a:lstStyle/>
+          <a:p>
+            <a:r>
+              <a:rPr lang="en-US" sz="2800" b="1" dirty="0"/>
+              <a:t>Young’s Modulus</a:t>
+            </a:r>
+          </a:p>
+        </p:txBody>
+      </p:sp>
+      <p:sp>
+        <p:nvSpPr>
+          <p:cNvPr id="10" name="TextBox 9">
+            <a:extLst>
+              <a:ext uri="{FF2B5EF4-FFF2-40B4-BE49-F238E27FC236}">
+                <a16:creationId xmlns:a16="http://schemas.microsoft.com/office/drawing/2014/main" id="{894101D8-47E8-4E1C-311B-81F6BC466A1B}"/>
+              </a:ext>
+            </a:extLst>
+          </p:cNvPr>
+          <p:cNvSpPr txBox="1"/>
+          <p:nvPr/>
+        </p:nvSpPr>
+        <p:spPr>
+          <a:xfrm>
+            <a:off x="7973069" y="1040667"/>
+            <a:ext cx="1761810" cy="523220"/>
+          </a:xfrm>
+          <a:prstGeom prst="rect">
+            <a:avLst/>
+          </a:prstGeom>
+          <a:noFill/>
+        </p:spPr>
+        <p:txBody>
+          <a:bodyPr wrap="square" rtlCol="0">
+            <a:spAutoFit/>
+          </a:bodyPr>
+          <a:lstStyle/>
+          <a:p>
+            <a:r>
+              <a:rPr lang="en-US" sz="2800" b="1" dirty="0"/>
+              <a:t>Cost</a:t>
+            </a:r>
+          </a:p>
+        </p:txBody>
+      </p:sp>
+      <p:pic>
+        <p:nvPicPr>
+          <p:cNvPr id="12" name="Picture 11">
+            <a:extLst>
+              <a:ext uri="{FF2B5EF4-FFF2-40B4-BE49-F238E27FC236}">
+                <a16:creationId xmlns:a16="http://schemas.microsoft.com/office/drawing/2014/main" id="{3D711D73-4BD7-3297-3A7C-7ECD931A557E}"/>
+              </a:ext>
+            </a:extLst>
+          </p:cNvPr>
+          <p:cNvPicPr>
+            <a:picLocks noChangeAspect="1"/>
+          </p:cNvPicPr>
+          <p:nvPr/>
+        </p:nvPicPr>
+        <p:blipFill>
+          <a:blip r:embed="rId3"/>
+          <a:stretch>
+            <a:fillRect/>
+          </a:stretch>
+        </p:blipFill>
+        <p:spPr>
+          <a:xfrm>
+            <a:off x="6096000" y="1510167"/>
+            <a:ext cx="5304245" cy="4235986"/>
+          </a:xfrm>
+          <a:prstGeom prst="rect">
+            <a:avLst/>
+          </a:prstGeom>
+        </p:spPr>
+      </p:pic>
+      <p:sp>
+        <p:nvSpPr>
+          <p:cNvPr id="2" name="TextBox 1">
+            <a:extLst>
+              <a:ext uri="{FF2B5EF4-FFF2-40B4-BE49-F238E27FC236}">
+                <a16:creationId xmlns:a16="http://schemas.microsoft.com/office/drawing/2014/main" id="{01EA7BCB-0F42-ADF5-99CC-C1EEF799C3CA}"/>
+              </a:ext>
+            </a:extLst>
+          </p:cNvPr>
+          <p:cNvSpPr txBox="1"/>
+          <p:nvPr/>
+        </p:nvSpPr>
+        <p:spPr>
+          <a:xfrm>
+            <a:off x="1563304" y="6269969"/>
+            <a:ext cx="7417494" cy="461665"/>
+          </a:xfrm>
+          <a:prstGeom prst="rect">
+            <a:avLst/>
+          </a:prstGeom>
+          <a:noFill/>
+        </p:spPr>
+        <p:txBody>
+          <a:bodyPr wrap="square" rtlCol="0">
+            <a:spAutoFit/>
+          </a:bodyPr>
+          <a:lstStyle/>
+          <a:p>
+            <a:r>
+              <a:rPr lang="en-US" sz="2400" dirty="0">
+                <a:highlight>
+                  <a:srgbClr val="FFFF00"/>
+                </a:highlight>
+              </a:rPr>
+              <a:t>Highly non-linear latent space</a:t>
+            </a:r>
+          </a:p>
+        </p:txBody>
+      </p:sp>
+    </p:spTree>
+    <p:extLst>
+      <p:ext uri="{BB962C8B-B14F-4D97-AF65-F5344CB8AC3E}">
+        <p14:creationId xmlns:p14="http://schemas.microsoft.com/office/powerpoint/2010/main" val="2806340950"/>
+      </p:ext>
+    </p:extLst>
+  </p:cSld>
+  <p:clrMapOvr>
+    <a:masterClrMapping/>
+  </p:clrMapOvr>
+</p:sld>
+</file>
+
+<file path=ppt/slides/slide14.xml><?xml version="1.0" encoding="utf-8"?>
+<p:sld xmlns:a="http://schemas.openxmlformats.org/drawingml/2006/main" xmlns:r="http://schemas.openxmlformats.org/officeDocument/2006/relationships" xmlns:p="http://schemas.openxmlformats.org/presentationml/2006/main">
+  <p:cSld>
+    <p:spTree>
+      <p:nvGrpSpPr>
+        <p:cNvPr id="1" name="">
+          <a:extLst>
+            <a:ext uri="{FF2B5EF4-FFF2-40B4-BE49-F238E27FC236}">
+              <a16:creationId xmlns:a16="http://schemas.microsoft.com/office/drawing/2014/main" id="{8CA9616D-FB0C-7757-E05B-DDA8A2FA76CE}"/>
+            </a:ext>
+          </a:extLst>
+        </p:cNvPr>
+        <p:cNvGrpSpPr/>
+        <p:nvPr/>
+      </p:nvGrpSpPr>
+      <p:grpSpPr>
+        <a:xfrm>
+          <a:off x="0" y="0"/>
+          <a:ext cx="0" cy="0"/>
+          <a:chOff x="0" y="0"/>
+          <a:chExt cx="0" cy="0"/>
+        </a:xfrm>
+      </p:grpSpPr>
+      <p:sp>
+        <p:nvSpPr>
+          <p:cNvPr id="3" name="Slide Number Placeholder 2">
+            <a:extLst>
+              <a:ext uri="{FF2B5EF4-FFF2-40B4-BE49-F238E27FC236}">
+                <a16:creationId xmlns:a16="http://schemas.microsoft.com/office/drawing/2014/main" id="{4F2D889A-5827-F49F-A506-1FBE086D828E}"/>
+              </a:ext>
+            </a:extLst>
+          </p:cNvPr>
+          <p:cNvSpPr>
+            <a:spLocks noGrp="1"/>
+          </p:cNvSpPr>
+          <p:nvPr>
+            <p:ph type="sldNum" sz="quarter" idx="11"/>
+          </p:nvPr>
+        </p:nvSpPr>
+        <p:spPr/>
+        <p:txBody>
+          <a:bodyPr/>
+          <a:lstStyle/>
+          <a:p>
+            <a:pPr>
+              <a:defRPr/>
+            </a:pPr>
+            <a:fld id="{231CC523-8BC6-4921-807A-66BD262F34AB}" type="slidenum">
+              <a:rPr lang="en-US" smtClean="0"/>
+              <a:pPr>
+                <a:defRPr/>
+              </a:pPr>
+              <a:t>14</a:t>
+            </a:fld>
+            <a:endParaRPr lang="en-US"/>
+          </a:p>
+        </p:txBody>
+      </p:sp>
+      <p:sp>
+        <p:nvSpPr>
+          <p:cNvPr id="9" name="Title 8">
+            <a:extLst>
+              <a:ext uri="{FF2B5EF4-FFF2-40B4-BE49-F238E27FC236}">
+                <a16:creationId xmlns:a16="http://schemas.microsoft.com/office/drawing/2014/main" id="{DA164B79-3C92-2B55-8050-A9B3707C5FF2}"/>
+              </a:ext>
+            </a:extLst>
+          </p:cNvPr>
+          <p:cNvSpPr>
+            <a:spLocks noGrp="1"/>
+          </p:cNvSpPr>
+          <p:nvPr>
+            <p:ph type="ctrTitle"/>
+          </p:nvPr>
+        </p:nvSpPr>
+        <p:spPr>
+          <a:xfrm>
+            <a:off x="381000" y="126366"/>
+            <a:ext cx="11302999" cy="612648"/>
+          </a:xfrm>
+        </p:spPr>
+        <p:txBody>
+          <a:bodyPr>
+            <a:normAutofit/>
+          </a:bodyPr>
+          <a:lstStyle/>
+          <a:p>
+            <a:r>
+              <a:rPr lang="en-US" dirty="0"/>
+              <a:t>Example 6</a:t>
+            </a:r>
+          </a:p>
+        </p:txBody>
+      </p:sp>
+      <p:sp>
+        <p:nvSpPr>
+          <p:cNvPr id="4" name="TextBox 3">
+            <a:extLst>
+              <a:ext uri="{FF2B5EF4-FFF2-40B4-BE49-F238E27FC236}">
+                <a16:creationId xmlns:a16="http://schemas.microsoft.com/office/drawing/2014/main" id="{05E4EF69-5BB0-A660-FE04-AEB90328996E}"/>
+              </a:ext>
+            </a:extLst>
+          </p:cNvPr>
+          <p:cNvSpPr txBox="1"/>
+          <p:nvPr/>
+        </p:nvSpPr>
+        <p:spPr>
+          <a:xfrm>
+            <a:off x="87764" y="1107933"/>
+            <a:ext cx="6094378" cy="286360"/>
+          </a:xfrm>
+          <a:prstGeom prst="rect">
+            <a:avLst/>
+          </a:prstGeom>
+          <a:noFill/>
+        </p:spPr>
+        <p:txBody>
+          <a:bodyPr wrap="square">
+            <a:spAutoFit/>
+          </a:bodyPr>
+          <a:lstStyle/>
+          <a:p>
+            <a:pPr>
+              <a:lnSpc>
+                <a:spcPts val="1425"/>
+              </a:lnSpc>
+              <a:buNone/>
+            </a:pPr>
+            <a:r>
+              <a:rPr lang="en-US" b="0" dirty="0" err="1">
+                <a:solidFill>
+                  <a:srgbClr val="4EC9B0"/>
+                </a:solidFill>
+                <a:effectLst/>
+                <a:latin typeface="Consolas" panose="020B0609020204030204" pitchFamily="49" charset="0"/>
+              </a:rPr>
+              <a:t>MMTOExamples</a:t>
+            </a:r>
+            <a:r>
+              <a:rPr lang="en-US" b="0" dirty="0" err="1">
+                <a:solidFill>
+                  <a:srgbClr val="CCCCCC"/>
+                </a:solidFill>
+                <a:effectLst/>
+                <a:latin typeface="Consolas" panose="020B0609020204030204" pitchFamily="49" charset="0"/>
+              </a:rPr>
+              <a:t>.</a:t>
+            </a:r>
+            <a:r>
+              <a:rPr lang="en-US" b="0" dirty="0" err="1">
+                <a:solidFill>
+                  <a:srgbClr val="4FC1FF"/>
+                </a:solidFill>
+                <a:effectLst/>
+                <a:latin typeface="Consolas" panose="020B0609020204030204" pitchFamily="49" charset="0"/>
+              </a:rPr>
+              <a:t>BliskSection_Compliance_MassCost</a:t>
+            </a:r>
+            <a:endParaRPr lang="en-US" b="0" dirty="0">
+              <a:solidFill>
+                <a:srgbClr val="CCCCCC"/>
+              </a:solidFill>
+              <a:effectLst/>
+              <a:latin typeface="Consolas" panose="020B0609020204030204" pitchFamily="49" charset="0"/>
+            </a:endParaRPr>
+          </a:p>
+        </p:txBody>
+      </p:sp>
+      <p:pic>
+        <p:nvPicPr>
+          <p:cNvPr id="8" name="Picture 7">
+            <a:extLst>
+              <a:ext uri="{FF2B5EF4-FFF2-40B4-BE49-F238E27FC236}">
+                <a16:creationId xmlns:a16="http://schemas.microsoft.com/office/drawing/2014/main" id="{781D96A8-2486-4A62-4667-CA433D52955A}"/>
+              </a:ext>
+            </a:extLst>
+          </p:cNvPr>
+          <p:cNvPicPr>
+            <a:picLocks noChangeAspect="1"/>
+          </p:cNvPicPr>
+          <p:nvPr/>
+        </p:nvPicPr>
+        <p:blipFill>
+          <a:blip r:embed="rId2"/>
+          <a:stretch>
+            <a:fillRect/>
+          </a:stretch>
+        </p:blipFill>
+        <p:spPr>
+          <a:xfrm>
+            <a:off x="6182142" y="1394293"/>
+            <a:ext cx="5753599" cy="4183743"/>
+          </a:xfrm>
+          <a:prstGeom prst="rect">
+            <a:avLst/>
+          </a:prstGeom>
+        </p:spPr>
+      </p:pic>
+      <p:sp>
+        <p:nvSpPr>
+          <p:cNvPr id="2" name="TextBox 1">
+            <a:extLst>
+              <a:ext uri="{FF2B5EF4-FFF2-40B4-BE49-F238E27FC236}">
+                <a16:creationId xmlns:a16="http://schemas.microsoft.com/office/drawing/2014/main" id="{9EACB9C5-6E3D-C856-44B9-CD63BEC92D59}"/>
+              </a:ext>
+            </a:extLst>
+          </p:cNvPr>
+          <p:cNvSpPr txBox="1"/>
+          <p:nvPr/>
+        </p:nvSpPr>
+        <p:spPr>
+          <a:xfrm>
+            <a:off x="206711" y="5894685"/>
+            <a:ext cx="8786817" cy="830997"/>
+          </a:xfrm>
+          <a:prstGeom prst="rect">
+            <a:avLst/>
+          </a:prstGeom>
+          <a:noFill/>
+        </p:spPr>
+        <p:txBody>
+          <a:bodyPr wrap="square" rtlCol="0">
+            <a:spAutoFit/>
+          </a:bodyPr>
+          <a:lstStyle/>
+          <a:p>
+            <a:r>
+              <a:rPr lang="en-US" sz="2400" dirty="0">
+                <a:highlight>
+                  <a:srgbClr val="FFFF00"/>
+                </a:highlight>
+              </a:rPr>
+              <a:t>Additional iterations needed for convergence. </a:t>
+            </a:r>
+            <a:br>
+              <a:rPr lang="en-US" sz="2400" dirty="0">
+                <a:highlight>
+                  <a:srgbClr val="FFFF00"/>
+                </a:highlight>
+              </a:rPr>
+            </a:br>
+            <a:r>
+              <a:rPr lang="en-US" sz="2400" dirty="0">
+                <a:highlight>
+                  <a:srgbClr val="FFFF00"/>
+                </a:highlight>
+              </a:rPr>
+              <a:t>Stopped at 100 iterations for all examples.</a:t>
+            </a:r>
+          </a:p>
+        </p:txBody>
+      </p:sp>
+      <p:pic>
+        <p:nvPicPr>
+          <p:cNvPr id="7" name="Picture 6">
+            <a:extLst>
+              <a:ext uri="{FF2B5EF4-FFF2-40B4-BE49-F238E27FC236}">
+                <a16:creationId xmlns:a16="http://schemas.microsoft.com/office/drawing/2014/main" id="{5B98A39A-17CB-694C-2D32-2D723229EA73}"/>
+              </a:ext>
+            </a:extLst>
+          </p:cNvPr>
+          <p:cNvPicPr>
+            <a:picLocks noChangeAspect="1"/>
+          </p:cNvPicPr>
+          <p:nvPr/>
+        </p:nvPicPr>
+        <p:blipFill>
+          <a:blip r:embed="rId3"/>
+          <a:stretch>
+            <a:fillRect/>
+          </a:stretch>
+        </p:blipFill>
+        <p:spPr>
+          <a:xfrm>
+            <a:off x="721665" y="1576529"/>
+            <a:ext cx="3711262" cy="2682472"/>
+          </a:xfrm>
+          <a:prstGeom prst="rect">
+            <a:avLst/>
+          </a:prstGeom>
+        </p:spPr>
+      </p:pic>
+      <p:pic>
+        <p:nvPicPr>
+          <p:cNvPr id="12" name="Picture 11">
+            <a:extLst>
+              <a:ext uri="{FF2B5EF4-FFF2-40B4-BE49-F238E27FC236}">
+                <a16:creationId xmlns:a16="http://schemas.microsoft.com/office/drawing/2014/main" id="{4176E00D-3202-674D-F96B-59E40ABCBC75}"/>
+              </a:ext>
+            </a:extLst>
+          </p:cNvPr>
+          <p:cNvPicPr>
+            <a:picLocks noChangeAspect="1"/>
+          </p:cNvPicPr>
+          <p:nvPr/>
+        </p:nvPicPr>
+        <p:blipFill>
+          <a:blip r:embed="rId4"/>
+          <a:stretch>
+            <a:fillRect/>
+          </a:stretch>
+        </p:blipFill>
+        <p:spPr>
+          <a:xfrm>
+            <a:off x="264425" y="4549247"/>
+            <a:ext cx="5913301" cy="1315149"/>
+          </a:xfrm>
+          <a:prstGeom prst="rect">
+            <a:avLst/>
+          </a:prstGeom>
+        </p:spPr>
+      </p:pic>
+    </p:spTree>
+    <p:extLst>
+      <p:ext uri="{BB962C8B-B14F-4D97-AF65-F5344CB8AC3E}">
+        <p14:creationId xmlns:p14="http://schemas.microsoft.com/office/powerpoint/2010/main" val="1806613402"/>
+      </p:ext>
+    </p:extLst>
+  </p:cSld>
+  <p:clrMapOvr>
+    <a:masterClrMapping/>
+  </p:clrMapOvr>
+</p:sld>
+</file>
+
+<file path=ppt/slides/slide15.xml><?xml version="1.0" encoding="utf-8"?>
+<p:sld xmlns:a="http://schemas.openxmlformats.org/drawingml/2006/main" xmlns:r="http://schemas.openxmlformats.org/officeDocument/2006/relationships" xmlns:p="http://schemas.openxmlformats.org/presentationml/2006/main">
+  <p:cSld>
+    <p:spTree>
+      <p:nvGrpSpPr>
+        <p:cNvPr id="1" name="">
+          <a:extLst>
+            <a:ext uri="{FF2B5EF4-FFF2-40B4-BE49-F238E27FC236}">
+              <a16:creationId xmlns:a16="http://schemas.microsoft.com/office/drawing/2014/main" id="{FAA96C86-7201-800C-271C-8A189437DE57}"/>
+            </a:ext>
+          </a:extLst>
+        </p:cNvPr>
+        <p:cNvGrpSpPr/>
+        <p:nvPr/>
+      </p:nvGrpSpPr>
+      <p:grpSpPr>
+        <a:xfrm>
+          <a:off x="0" y="0"/>
+          <a:ext cx="0" cy="0"/>
+          <a:chOff x="0" y="0"/>
+          <a:chExt cx="0" cy="0"/>
+        </a:xfrm>
+      </p:grpSpPr>
+      <p:sp>
+        <p:nvSpPr>
+          <p:cNvPr id="3" name="Slide Number Placeholder 2">
+            <a:extLst>
+              <a:ext uri="{FF2B5EF4-FFF2-40B4-BE49-F238E27FC236}">
+                <a16:creationId xmlns:a16="http://schemas.microsoft.com/office/drawing/2014/main" id="{D24706F3-601E-C0E4-6226-2CED79E6DA50}"/>
+              </a:ext>
+            </a:extLst>
+          </p:cNvPr>
+          <p:cNvSpPr>
+            <a:spLocks noGrp="1"/>
+          </p:cNvSpPr>
+          <p:nvPr>
+            <p:ph type="sldNum" sz="quarter" idx="11"/>
+          </p:nvPr>
+        </p:nvSpPr>
+        <p:spPr/>
+        <p:txBody>
+          <a:bodyPr/>
+          <a:lstStyle/>
+          <a:p>
+            <a:pPr>
+              <a:defRPr/>
+            </a:pPr>
+            <a:fld id="{231CC523-8BC6-4921-807A-66BD262F34AB}" type="slidenum">
+              <a:rPr lang="en-US" smtClean="0"/>
+              <a:pPr>
+                <a:defRPr/>
+              </a:pPr>
+              <a:t>15</a:t>
+            </a:fld>
+            <a:endParaRPr lang="en-US"/>
+          </a:p>
+        </p:txBody>
+      </p:sp>
+      <p:sp>
+        <p:nvSpPr>
+          <p:cNvPr id="9" name="Title 8">
+            <a:extLst>
+              <a:ext uri="{FF2B5EF4-FFF2-40B4-BE49-F238E27FC236}">
+                <a16:creationId xmlns:a16="http://schemas.microsoft.com/office/drawing/2014/main" id="{238CB866-BFB6-66DD-2803-70AD17CBF5E5}"/>
+              </a:ext>
+            </a:extLst>
+          </p:cNvPr>
+          <p:cNvSpPr>
+            <a:spLocks noGrp="1"/>
+          </p:cNvSpPr>
+          <p:nvPr>
+            <p:ph type="ctrTitle"/>
+          </p:nvPr>
+        </p:nvSpPr>
+        <p:spPr>
+          <a:xfrm>
+            <a:off x="381000" y="126366"/>
+            <a:ext cx="11302999" cy="612648"/>
+          </a:xfrm>
+        </p:spPr>
+        <p:txBody>
+          <a:bodyPr>
+            <a:normAutofit/>
+          </a:bodyPr>
+          <a:lstStyle/>
+          <a:p>
+            <a:r>
+              <a:rPr lang="en-US" dirty="0"/>
+              <a:t>Example 7</a:t>
+            </a:r>
+          </a:p>
+        </p:txBody>
+      </p:sp>
+      <p:pic>
+        <p:nvPicPr>
+          <p:cNvPr id="10" name="Picture 9">
+            <a:extLst>
+              <a:ext uri="{FF2B5EF4-FFF2-40B4-BE49-F238E27FC236}">
+                <a16:creationId xmlns:a16="http://schemas.microsoft.com/office/drawing/2014/main" id="{7436DF42-A97A-929F-8C65-387CE8D9D82F}"/>
+              </a:ext>
+            </a:extLst>
+          </p:cNvPr>
+          <p:cNvPicPr>
+            <a:picLocks noChangeAspect="1"/>
+          </p:cNvPicPr>
+          <p:nvPr/>
+        </p:nvPicPr>
+        <p:blipFill>
+          <a:blip r:embed="rId2"/>
+          <a:stretch>
+            <a:fillRect/>
+          </a:stretch>
+        </p:blipFill>
+        <p:spPr>
+          <a:xfrm>
+            <a:off x="5930400" y="1371421"/>
+            <a:ext cx="5753599" cy="4115157"/>
+          </a:xfrm>
+          <a:prstGeom prst="rect">
+            <a:avLst/>
+          </a:prstGeom>
+        </p:spPr>
+      </p:pic>
+      <p:sp>
+        <p:nvSpPr>
+          <p:cNvPr id="6" name="TextBox 5">
+            <a:extLst>
+              <a:ext uri="{FF2B5EF4-FFF2-40B4-BE49-F238E27FC236}">
+                <a16:creationId xmlns:a16="http://schemas.microsoft.com/office/drawing/2014/main" id="{A2D0B6FA-25B9-761F-32B1-9C0DF31E0509}"/>
+              </a:ext>
+            </a:extLst>
+          </p:cNvPr>
+          <p:cNvSpPr txBox="1"/>
+          <p:nvPr/>
+        </p:nvSpPr>
+        <p:spPr>
+          <a:xfrm>
+            <a:off x="380999" y="1075848"/>
+            <a:ext cx="7837025" cy="267124"/>
+          </a:xfrm>
+          <a:prstGeom prst="rect">
+            <a:avLst/>
+          </a:prstGeom>
+          <a:noFill/>
+        </p:spPr>
+        <p:txBody>
+          <a:bodyPr wrap="square">
+            <a:spAutoFit/>
+          </a:bodyPr>
+          <a:lstStyle/>
+          <a:p>
+            <a:pPr>
+              <a:lnSpc>
+                <a:spcPts val="1200"/>
+              </a:lnSpc>
+              <a:buNone/>
+            </a:pPr>
+            <a:r>
+              <a:rPr lang="en-US" b="0" dirty="0" err="1">
+                <a:solidFill>
+                  <a:srgbClr val="4EC9B0"/>
+                </a:solidFill>
+                <a:effectLst/>
+                <a:latin typeface="Consolas" panose="020B0609020204030204" pitchFamily="49" charset="0"/>
+              </a:rPr>
+              <a:t>MMTOExamples</a:t>
+            </a:r>
+            <a:r>
+              <a:rPr lang="en-US" b="0" dirty="0" err="1">
+                <a:solidFill>
+                  <a:srgbClr val="CCCCCC"/>
+                </a:solidFill>
+                <a:effectLst/>
+                <a:latin typeface="Consolas" panose="020B0609020204030204" pitchFamily="49" charset="0"/>
+              </a:rPr>
+              <a:t>.</a:t>
+            </a:r>
+            <a:r>
+              <a:rPr lang="en-US" b="0" dirty="0" err="1">
+                <a:solidFill>
+                  <a:srgbClr val="4FC1FF"/>
+                </a:solidFill>
+                <a:effectLst/>
+                <a:latin typeface="Consolas" panose="020B0609020204030204" pitchFamily="49" charset="0"/>
+              </a:rPr>
+              <a:t>BliskSection_Compliance_MassCriticality</a:t>
+            </a:r>
+            <a:endParaRPr lang="en-US" b="0" dirty="0">
+              <a:solidFill>
+                <a:srgbClr val="CCCCCC"/>
+              </a:solidFill>
+              <a:effectLst/>
+              <a:latin typeface="Consolas" panose="020B0609020204030204" pitchFamily="49" charset="0"/>
+            </a:endParaRPr>
+          </a:p>
+        </p:txBody>
+      </p:sp>
+      <p:pic>
+        <p:nvPicPr>
+          <p:cNvPr id="5" name="Picture 4">
+            <a:extLst>
+              <a:ext uri="{FF2B5EF4-FFF2-40B4-BE49-F238E27FC236}">
+                <a16:creationId xmlns:a16="http://schemas.microsoft.com/office/drawing/2014/main" id="{7F51070B-4149-771D-3566-7A57DCD76635}"/>
+              </a:ext>
+            </a:extLst>
+          </p:cNvPr>
+          <p:cNvPicPr>
+            <a:picLocks noChangeAspect="1"/>
+          </p:cNvPicPr>
+          <p:nvPr/>
+        </p:nvPicPr>
+        <p:blipFill>
+          <a:blip r:embed="rId3"/>
+          <a:stretch>
+            <a:fillRect/>
+          </a:stretch>
+        </p:blipFill>
+        <p:spPr>
+          <a:xfrm>
+            <a:off x="380999" y="1535285"/>
+            <a:ext cx="4339256" cy="2880981"/>
+          </a:xfrm>
+          <a:prstGeom prst="rect">
+            <a:avLst/>
+          </a:prstGeom>
+        </p:spPr>
+      </p:pic>
+      <p:pic>
+        <p:nvPicPr>
+          <p:cNvPr id="11" name="Picture 10">
+            <a:extLst>
+              <a:ext uri="{FF2B5EF4-FFF2-40B4-BE49-F238E27FC236}">
+                <a16:creationId xmlns:a16="http://schemas.microsoft.com/office/drawing/2014/main" id="{DC20A264-1C29-6A58-93BF-1CD281A560E8}"/>
+              </a:ext>
+            </a:extLst>
+          </p:cNvPr>
+          <p:cNvPicPr>
+            <a:picLocks noChangeAspect="1"/>
+          </p:cNvPicPr>
+          <p:nvPr/>
+        </p:nvPicPr>
+        <p:blipFill>
+          <a:blip r:embed="rId4"/>
+          <a:stretch>
+            <a:fillRect/>
+          </a:stretch>
+        </p:blipFill>
+        <p:spPr>
+          <a:xfrm>
+            <a:off x="256561" y="4840964"/>
+            <a:ext cx="5435802" cy="1291228"/>
+          </a:xfrm>
+          <a:prstGeom prst="rect">
+            <a:avLst/>
+          </a:prstGeom>
+        </p:spPr>
+      </p:pic>
+      <p:sp>
+        <p:nvSpPr>
+          <p:cNvPr id="2" name="TextBox 1">
+            <a:extLst>
+              <a:ext uri="{FF2B5EF4-FFF2-40B4-BE49-F238E27FC236}">
+                <a16:creationId xmlns:a16="http://schemas.microsoft.com/office/drawing/2014/main" id="{2C857D9B-DBD4-876C-B33C-F37260AE3B48}"/>
+              </a:ext>
+            </a:extLst>
+          </p:cNvPr>
+          <p:cNvSpPr txBox="1"/>
+          <p:nvPr/>
+        </p:nvSpPr>
+        <p:spPr>
+          <a:xfrm>
+            <a:off x="160413" y="6226935"/>
+            <a:ext cx="9921136" cy="461665"/>
+          </a:xfrm>
+          <a:prstGeom prst="rect">
+            <a:avLst/>
+          </a:prstGeom>
+          <a:noFill/>
+        </p:spPr>
+        <p:txBody>
+          <a:bodyPr wrap="square" rtlCol="0">
+            <a:spAutoFit/>
+          </a:bodyPr>
+          <a:lstStyle/>
+          <a:p>
+            <a:r>
+              <a:rPr lang="en-US" sz="2400" dirty="0">
+                <a:highlight>
+                  <a:srgbClr val="FFFF00"/>
+                </a:highlight>
+              </a:rPr>
+              <a:t>We can enforce mean criticality (as opposed to max criticality)</a:t>
+            </a:r>
+          </a:p>
+        </p:txBody>
+      </p:sp>
+    </p:spTree>
+    <p:extLst>
+      <p:ext uri="{BB962C8B-B14F-4D97-AF65-F5344CB8AC3E}">
+        <p14:creationId xmlns:p14="http://schemas.microsoft.com/office/powerpoint/2010/main" val="2687041123"/>
+      </p:ext>
+    </p:extLst>
+  </p:cSld>
+  <p:clrMapOvr>
+    <a:masterClrMapping/>
+  </p:clrMapOvr>
+</p:sld>
+</file>
+
+<file path=ppt/slides/slide16.xml><?xml version="1.0" encoding="utf-8"?>
+<p:sld xmlns:a="http://schemas.openxmlformats.org/drawingml/2006/main" xmlns:r="http://schemas.openxmlformats.org/officeDocument/2006/relationships" xmlns:p="http://schemas.openxmlformats.org/presentationml/2006/main">
+  <p:cSld>
+    <p:spTree>
+      <p:nvGrpSpPr>
+        <p:cNvPr id="1" name="">
+          <a:extLst>
+            <a:ext uri="{FF2B5EF4-FFF2-40B4-BE49-F238E27FC236}">
+              <a16:creationId xmlns:a16="http://schemas.microsoft.com/office/drawing/2014/main" id="{7E6F1A8C-814F-7C47-61A6-3EA5E2054511}"/>
+            </a:ext>
+          </a:extLst>
+        </p:cNvPr>
+        <p:cNvGrpSpPr/>
+        <p:nvPr/>
+      </p:nvGrpSpPr>
+      <p:grpSpPr>
+        <a:xfrm>
+          <a:off x="0" y="0"/>
+          <a:ext cx="0" cy="0"/>
+          <a:chOff x="0" y="0"/>
+          <a:chExt cx="0" cy="0"/>
+        </a:xfrm>
+      </p:grpSpPr>
+      <p:sp>
+        <p:nvSpPr>
+          <p:cNvPr id="3" name="Slide Number Placeholder 2">
+            <a:extLst>
+              <a:ext uri="{FF2B5EF4-FFF2-40B4-BE49-F238E27FC236}">
+                <a16:creationId xmlns:a16="http://schemas.microsoft.com/office/drawing/2014/main" id="{45F96852-22AA-5E5B-2629-375771764254}"/>
+              </a:ext>
+            </a:extLst>
+          </p:cNvPr>
+          <p:cNvSpPr>
+            <a:spLocks noGrp="1"/>
+          </p:cNvSpPr>
+          <p:nvPr>
+            <p:ph type="sldNum" sz="quarter" idx="11"/>
+          </p:nvPr>
+        </p:nvSpPr>
+        <p:spPr/>
+        <p:txBody>
+          <a:bodyPr/>
+          <a:lstStyle/>
+          <a:p>
+            <a:pPr>
+              <a:defRPr/>
+            </a:pPr>
+            <a:fld id="{231CC523-8BC6-4921-807A-66BD262F34AB}" type="slidenum">
+              <a:rPr lang="en-US" smtClean="0"/>
+              <a:pPr>
+                <a:defRPr/>
+              </a:pPr>
+              <a:t>16</a:t>
+            </a:fld>
+            <a:endParaRPr lang="en-US"/>
+          </a:p>
+        </p:txBody>
+      </p:sp>
+      <p:sp>
+        <p:nvSpPr>
+          <p:cNvPr id="9" name="Title 8">
+            <a:extLst>
+              <a:ext uri="{FF2B5EF4-FFF2-40B4-BE49-F238E27FC236}">
+                <a16:creationId xmlns:a16="http://schemas.microsoft.com/office/drawing/2014/main" id="{201E4D27-C554-A0B0-BD84-A666D5EDB116}"/>
+              </a:ext>
+            </a:extLst>
+          </p:cNvPr>
+          <p:cNvSpPr>
+            <a:spLocks noGrp="1"/>
+          </p:cNvSpPr>
+          <p:nvPr>
+            <p:ph type="ctrTitle"/>
+          </p:nvPr>
+        </p:nvSpPr>
+        <p:spPr>
+          <a:xfrm>
+            <a:off x="381000" y="126366"/>
+            <a:ext cx="11302999" cy="612648"/>
+          </a:xfrm>
+        </p:spPr>
+        <p:txBody>
+          <a:bodyPr>
+            <a:normAutofit/>
+          </a:bodyPr>
+          <a:lstStyle/>
+          <a:p>
+            <a:r>
+              <a:rPr lang="en-US" dirty="0"/>
+              <a:t>Example 10</a:t>
+            </a:r>
+          </a:p>
+        </p:txBody>
+      </p:sp>
+      <p:sp>
+        <p:nvSpPr>
+          <p:cNvPr id="4" name="TextBox 3">
+            <a:extLst>
+              <a:ext uri="{FF2B5EF4-FFF2-40B4-BE49-F238E27FC236}">
+                <a16:creationId xmlns:a16="http://schemas.microsoft.com/office/drawing/2014/main" id="{0ADBB785-9D49-BB5C-4674-D08A39F545B2}"/>
+              </a:ext>
+            </a:extLst>
+          </p:cNvPr>
+          <p:cNvSpPr txBox="1"/>
+          <p:nvPr/>
+        </p:nvSpPr>
+        <p:spPr>
+          <a:xfrm>
+            <a:off x="381000" y="1288415"/>
+            <a:ext cx="6629399" cy="267124"/>
+          </a:xfrm>
+          <a:prstGeom prst="rect">
+            <a:avLst/>
+          </a:prstGeom>
+          <a:noFill/>
+        </p:spPr>
+        <p:txBody>
+          <a:bodyPr wrap="square">
+            <a:spAutoFit/>
+          </a:bodyPr>
+          <a:lstStyle/>
+          <a:p>
+            <a:pPr>
+              <a:lnSpc>
+                <a:spcPts val="1200"/>
+              </a:lnSpc>
+              <a:buNone/>
+            </a:pPr>
+            <a:r>
+              <a:rPr lang="en-US" b="0" dirty="0" err="1">
+                <a:solidFill>
+                  <a:srgbClr val="4EC9B0"/>
+                </a:solidFill>
+                <a:effectLst/>
+                <a:latin typeface="Consolas" panose="020B0609020204030204" pitchFamily="49" charset="0"/>
+              </a:rPr>
+              <a:t>MMTOExamples</a:t>
+            </a:r>
+            <a:r>
+              <a:rPr lang="en-US" b="0" dirty="0" err="1">
+                <a:solidFill>
+                  <a:srgbClr val="CCCCCC"/>
+                </a:solidFill>
+                <a:effectLst/>
+                <a:latin typeface="Consolas" panose="020B0609020204030204" pitchFamily="49" charset="0"/>
+              </a:rPr>
+              <a:t>.</a:t>
+            </a:r>
+            <a:r>
+              <a:rPr lang="en-US" b="0" dirty="0" err="1">
+                <a:solidFill>
+                  <a:srgbClr val="4FC1FF"/>
+                </a:solidFill>
+                <a:effectLst/>
+                <a:latin typeface="Consolas" panose="020B0609020204030204" pitchFamily="49" charset="0"/>
+              </a:rPr>
+              <a:t>BliskSection_Stress_Mass</a:t>
+            </a:r>
+            <a:endParaRPr lang="en-US" b="0" dirty="0">
+              <a:solidFill>
+                <a:srgbClr val="CCCCCC"/>
+              </a:solidFill>
+              <a:effectLst/>
+              <a:latin typeface="Consolas" panose="020B0609020204030204" pitchFamily="49" charset="0"/>
+            </a:endParaRPr>
+          </a:p>
+        </p:txBody>
+      </p:sp>
+      <p:pic>
+        <p:nvPicPr>
+          <p:cNvPr id="5" name="Picture 4">
+            <a:extLst>
+              <a:ext uri="{FF2B5EF4-FFF2-40B4-BE49-F238E27FC236}">
+                <a16:creationId xmlns:a16="http://schemas.microsoft.com/office/drawing/2014/main" id="{04CA5F29-0388-C8D4-C661-7033D6FAE522}"/>
+              </a:ext>
+            </a:extLst>
+          </p:cNvPr>
+          <p:cNvPicPr>
+            <a:picLocks noChangeAspect="1"/>
+          </p:cNvPicPr>
+          <p:nvPr/>
+        </p:nvPicPr>
+        <p:blipFill>
+          <a:blip r:embed="rId2"/>
+          <a:stretch>
+            <a:fillRect/>
+          </a:stretch>
+        </p:blipFill>
+        <p:spPr>
+          <a:xfrm>
+            <a:off x="381000" y="1559037"/>
+            <a:ext cx="5176666" cy="3843803"/>
+          </a:xfrm>
+          <a:prstGeom prst="rect">
+            <a:avLst/>
+          </a:prstGeom>
+        </p:spPr>
+      </p:pic>
+      <p:sp>
+        <p:nvSpPr>
+          <p:cNvPr id="6" name="TextBox 5">
+            <a:extLst>
+              <a:ext uri="{FF2B5EF4-FFF2-40B4-BE49-F238E27FC236}">
+                <a16:creationId xmlns:a16="http://schemas.microsoft.com/office/drawing/2014/main" id="{77B4FF23-B8A4-BB85-098E-76335845F72B}"/>
+              </a:ext>
+            </a:extLst>
+          </p:cNvPr>
+          <p:cNvSpPr txBox="1"/>
+          <p:nvPr/>
+        </p:nvSpPr>
+        <p:spPr>
+          <a:xfrm>
+            <a:off x="5230310" y="5590197"/>
+            <a:ext cx="6760580" cy="461665"/>
+          </a:xfrm>
+          <a:prstGeom prst="rect">
+            <a:avLst/>
+          </a:prstGeom>
+          <a:noFill/>
+        </p:spPr>
+        <p:txBody>
+          <a:bodyPr wrap="square" rtlCol="0">
+            <a:spAutoFit/>
+          </a:bodyPr>
+          <a:lstStyle/>
+          <a:p>
+            <a:r>
+              <a:rPr lang="en-US" sz="2400" dirty="0">
+                <a:highlight>
+                  <a:srgbClr val="FFFF00"/>
+                </a:highlight>
+              </a:rPr>
+              <a:t>Additional iterations are needed for convergence. </a:t>
+            </a:r>
+          </a:p>
+        </p:txBody>
+      </p:sp>
+      <p:pic>
+        <p:nvPicPr>
+          <p:cNvPr id="8" name="Picture 7">
+            <a:extLst>
+              <a:ext uri="{FF2B5EF4-FFF2-40B4-BE49-F238E27FC236}">
+                <a16:creationId xmlns:a16="http://schemas.microsoft.com/office/drawing/2014/main" id="{5AB5E78A-C69F-EB1F-601A-DA6F1FA138E5}"/>
+              </a:ext>
+            </a:extLst>
+          </p:cNvPr>
+          <p:cNvPicPr>
+            <a:picLocks noChangeAspect="1"/>
+          </p:cNvPicPr>
+          <p:nvPr/>
+        </p:nvPicPr>
+        <p:blipFill>
+          <a:blip r:embed="rId3"/>
+          <a:stretch>
+            <a:fillRect/>
+          </a:stretch>
+        </p:blipFill>
+        <p:spPr>
+          <a:xfrm>
+            <a:off x="381000" y="5723501"/>
+            <a:ext cx="4336156" cy="815411"/>
+          </a:xfrm>
+          <a:prstGeom prst="rect">
+            <a:avLst/>
+          </a:prstGeom>
+        </p:spPr>
+      </p:pic>
+    </p:spTree>
+    <p:extLst>
+      <p:ext uri="{BB962C8B-B14F-4D97-AF65-F5344CB8AC3E}">
+        <p14:creationId xmlns:p14="http://schemas.microsoft.com/office/powerpoint/2010/main" val="1956195768"/>
+      </p:ext>
+    </p:extLst>
+  </p:cSld>
+  <p:clrMapOvr>
+    <a:masterClrMapping/>
+  </p:clrMapOvr>
+</p:sld>
+</file>
+
+<file path=ppt/slides/slide2.xml><?xml version="1.0" encoding="utf-8"?>
+<p:sld xmlns:a="http://schemas.openxmlformats.org/drawingml/2006/main" xmlns:r="http://schemas.openxmlformats.org/officeDocument/2006/relationships" xmlns:p="http://schemas.openxmlformats.org/presentationml/2006/main">
+  <p:cSld>
+    <p:spTree>
+      <p:nvGrpSpPr>
+        <p:cNvPr id="1" name="">
+          <a:extLst>
+            <a:ext uri="{FF2B5EF4-FFF2-40B4-BE49-F238E27FC236}">
+              <a16:creationId xmlns:a16="http://schemas.microsoft.com/office/drawing/2014/main" id="{202E2807-C806-ECBE-4D19-A0809673F1F0}"/>
+            </a:ext>
+          </a:extLst>
+        </p:cNvPr>
+        <p:cNvGrpSpPr/>
+        <p:nvPr/>
+      </p:nvGrpSpPr>
+      <p:grpSpPr>
+        <a:xfrm>
+          <a:off x="0" y="0"/>
+          <a:ext cx="0" cy="0"/>
+          <a:chOff x="0" y="0"/>
+          <a:chExt cx="0" cy="0"/>
+        </a:xfrm>
+      </p:grpSpPr>
+      <p:grpSp>
+        <p:nvGrpSpPr>
+          <p:cNvPr id="6" name="Group 5">
+            <a:extLst>
+              <a:ext uri="{FF2B5EF4-FFF2-40B4-BE49-F238E27FC236}">
+                <a16:creationId xmlns:a16="http://schemas.microsoft.com/office/drawing/2014/main" id="{2BEC2196-6572-1F93-2F8A-89FD5830A830}"/>
+              </a:ext>
+            </a:extLst>
+          </p:cNvPr>
+          <p:cNvGrpSpPr/>
+          <p:nvPr/>
+        </p:nvGrpSpPr>
+        <p:grpSpPr>
+          <a:xfrm>
+            <a:off x="4051697" y="1006934"/>
+            <a:ext cx="4757684" cy="1906124"/>
+            <a:chOff x="6112397" y="2885580"/>
+            <a:chExt cx="4757684" cy="1906124"/>
+          </a:xfrm>
+        </p:grpSpPr>
+        <p:pic>
+          <p:nvPicPr>
+            <p:cNvPr id="7" name="Picture 6">
+              <a:extLst>
+                <a:ext uri="{FF2B5EF4-FFF2-40B4-BE49-F238E27FC236}">
+                  <a16:creationId xmlns:a16="http://schemas.microsoft.com/office/drawing/2014/main" id="{3AB36607-B077-4CA4-5864-968BEDFE5832}"/>
+                </a:ext>
+              </a:extLst>
+            </p:cNvPr>
+            <p:cNvPicPr>
+              <a:picLocks noChangeAspect="1"/>
+            </p:cNvPicPr>
+            <p:nvPr/>
+          </p:nvPicPr>
+          <p:blipFill>
+            <a:blip r:embed="rId2"/>
+            <a:stretch>
+              <a:fillRect/>
+            </a:stretch>
+          </p:blipFill>
+          <p:spPr>
+            <a:xfrm>
+              <a:off x="6112397" y="2885580"/>
+              <a:ext cx="4757684" cy="1906124"/>
+            </a:xfrm>
+            <a:prstGeom prst="rect">
+              <a:avLst/>
+            </a:prstGeom>
+          </p:spPr>
+        </p:pic>
+        <p:sp>
+          <p:nvSpPr>
+            <p:cNvPr id="8" name="Freeform: Shape 7">
+              <a:extLst>
+                <a:ext uri="{FF2B5EF4-FFF2-40B4-BE49-F238E27FC236}">
+                  <a16:creationId xmlns:a16="http://schemas.microsoft.com/office/drawing/2014/main" id="{FC32E6F7-D940-D522-2CF3-E13450EE1AC9}"/>
+                </a:ext>
+              </a:extLst>
+            </p:cNvPr>
+            <p:cNvSpPr/>
+            <p:nvPr/>
+          </p:nvSpPr>
+          <p:spPr>
+            <a:xfrm>
+              <a:off x="6543419" y="2963119"/>
+              <a:ext cx="1131864" cy="995423"/>
+            </a:xfrm>
+            <a:custGeom>
+              <a:avLst/>
+              <a:gdLst>
+                <a:gd name="connsiteX0" fmla="*/ 204622 w 1131864"/>
+                <a:gd name="connsiteY0" fmla="*/ 0 h 995423"/>
+                <a:gd name="connsiteX1" fmla="*/ 204622 w 1131864"/>
+                <a:gd name="connsiteY1" fmla="*/ 0 h 995423"/>
+                <a:gd name="connsiteX2" fmla="*/ 77300 w 1131864"/>
+                <a:gd name="connsiteY2" fmla="*/ 69448 h 995423"/>
+                <a:gd name="connsiteX3" fmla="*/ 7852 w 1131864"/>
+                <a:gd name="connsiteY3" fmla="*/ 520861 h 995423"/>
+                <a:gd name="connsiteX4" fmla="*/ 19427 w 1131864"/>
+                <a:gd name="connsiteY4" fmla="*/ 891251 h 995423"/>
+                <a:gd name="connsiteX5" fmla="*/ 146748 w 1131864"/>
+                <a:gd name="connsiteY5" fmla="*/ 949124 h 995423"/>
+                <a:gd name="connsiteX6" fmla="*/ 239346 w 1131864"/>
+                <a:gd name="connsiteY6" fmla="*/ 972273 h 995423"/>
+                <a:gd name="connsiteX7" fmla="*/ 366667 w 1131864"/>
+                <a:gd name="connsiteY7" fmla="*/ 995423 h 995423"/>
+                <a:gd name="connsiteX8" fmla="*/ 760206 w 1131864"/>
+                <a:gd name="connsiteY8" fmla="*/ 972273 h 995423"/>
+                <a:gd name="connsiteX9" fmla="*/ 783356 w 1131864"/>
+                <a:gd name="connsiteY9" fmla="*/ 914400 h 995423"/>
+                <a:gd name="connsiteX10" fmla="*/ 818080 w 1131864"/>
+                <a:gd name="connsiteY10" fmla="*/ 868101 h 995423"/>
+                <a:gd name="connsiteX11" fmla="*/ 852804 w 1131864"/>
+                <a:gd name="connsiteY11" fmla="*/ 775504 h 995423"/>
+                <a:gd name="connsiteX12" fmla="*/ 887528 w 1131864"/>
+                <a:gd name="connsiteY12" fmla="*/ 717630 h 995423"/>
+                <a:gd name="connsiteX13" fmla="*/ 899103 w 1131864"/>
+                <a:gd name="connsiteY13" fmla="*/ 682906 h 995423"/>
+                <a:gd name="connsiteX14" fmla="*/ 1037999 w 1131864"/>
+                <a:gd name="connsiteY14" fmla="*/ 625033 h 995423"/>
+                <a:gd name="connsiteX15" fmla="*/ 1061148 w 1131864"/>
+                <a:gd name="connsiteY15" fmla="*/ 567159 h 995423"/>
+                <a:gd name="connsiteX16" fmla="*/ 1119022 w 1131864"/>
+                <a:gd name="connsiteY16" fmla="*/ 497711 h 995423"/>
+                <a:gd name="connsiteX17" fmla="*/ 1130596 w 1131864"/>
+                <a:gd name="connsiteY17" fmla="*/ 416689 h 995423"/>
+                <a:gd name="connsiteX18" fmla="*/ 1072723 w 1131864"/>
+                <a:gd name="connsiteY18" fmla="*/ 266218 h 995423"/>
+                <a:gd name="connsiteX19" fmla="*/ 1037999 w 1131864"/>
+                <a:gd name="connsiteY19" fmla="*/ 219919 h 995423"/>
+                <a:gd name="connsiteX20" fmla="*/ 806505 w 1131864"/>
+                <a:gd name="connsiteY20" fmla="*/ 208344 h 995423"/>
+                <a:gd name="connsiteX21" fmla="*/ 528713 w 1131864"/>
+                <a:gd name="connsiteY21" fmla="*/ 150471 h 995423"/>
+                <a:gd name="connsiteX22" fmla="*/ 389816 w 1131864"/>
+                <a:gd name="connsiteY22" fmla="*/ 46299 h 995423"/>
+                <a:gd name="connsiteX23" fmla="*/ 204622 w 1131864"/>
+                <a:gd name="connsiteY23" fmla="*/ 0 h 995423"/>
+              </a:gdLst>
+              <a:ahLst/>
+              <a:cxnLst>
+                <a:cxn ang="0">
+                  <a:pos x="connsiteX0" y="connsiteY0"/>
+                </a:cxn>
+                <a:cxn ang="0">
+                  <a:pos x="connsiteX1" y="connsiteY1"/>
+                </a:cxn>
+                <a:cxn ang="0">
+                  <a:pos x="connsiteX2" y="connsiteY2"/>
+                </a:cxn>
+                <a:cxn ang="0">
+                  <a:pos x="connsiteX3" y="connsiteY3"/>
+                </a:cxn>
+                <a:cxn ang="0">
+                  <a:pos x="connsiteX4" y="connsiteY4"/>
+                </a:cxn>
+                <a:cxn ang="0">
+                  <a:pos x="connsiteX5" y="connsiteY5"/>
+                </a:cxn>
+                <a:cxn ang="0">
+                  <a:pos x="connsiteX6" y="connsiteY6"/>
+                </a:cxn>
+                <a:cxn ang="0">
+                  <a:pos x="connsiteX7" y="connsiteY7"/>
+                </a:cxn>
+                <a:cxn ang="0">
+                  <a:pos x="connsiteX8" y="connsiteY8"/>
+                </a:cxn>
+                <a:cxn ang="0">
+                  <a:pos x="connsiteX9" y="connsiteY9"/>
+                </a:cxn>
+                <a:cxn ang="0">
+                  <a:pos x="connsiteX10" y="connsiteY10"/>
+                </a:cxn>
+                <a:cxn ang="0">
+                  <a:pos x="connsiteX11" y="connsiteY11"/>
+                </a:cxn>
+                <a:cxn ang="0">
+                  <a:pos x="connsiteX12" y="connsiteY12"/>
+                </a:cxn>
+                <a:cxn ang="0">
+                  <a:pos x="connsiteX13" y="connsiteY13"/>
+                </a:cxn>
+                <a:cxn ang="0">
+                  <a:pos x="connsiteX14" y="connsiteY14"/>
+                </a:cxn>
+                <a:cxn ang="0">
+                  <a:pos x="connsiteX15" y="connsiteY15"/>
+                </a:cxn>
+                <a:cxn ang="0">
+                  <a:pos x="connsiteX16" y="connsiteY16"/>
+                </a:cxn>
+                <a:cxn ang="0">
+                  <a:pos x="connsiteX17" y="connsiteY17"/>
+                </a:cxn>
+                <a:cxn ang="0">
+                  <a:pos x="connsiteX18" y="connsiteY18"/>
+                </a:cxn>
+                <a:cxn ang="0">
+                  <a:pos x="connsiteX19" y="connsiteY19"/>
+                </a:cxn>
+                <a:cxn ang="0">
+                  <a:pos x="connsiteX20" y="connsiteY20"/>
+                </a:cxn>
+                <a:cxn ang="0">
+                  <a:pos x="connsiteX21" y="connsiteY21"/>
+                </a:cxn>
+                <a:cxn ang="0">
+                  <a:pos x="connsiteX22" y="connsiteY22"/>
+                </a:cxn>
+                <a:cxn ang="0">
+                  <a:pos x="connsiteX23" y="connsiteY23"/>
+                </a:cxn>
+              </a:cxnLst>
+              <a:rect l="l" t="t" r="r" b="b"/>
+              <a:pathLst>
+                <a:path w="1131864" h="995423">
+                  <a:moveTo>
+                    <a:pt x="204622" y="0"/>
+                  </a:moveTo>
+                  <a:lnTo>
+                    <a:pt x="204622" y="0"/>
+                  </a:lnTo>
+                  <a:cubicBezTo>
+                    <a:pt x="162181" y="23149"/>
+                    <a:pt x="100778" y="27188"/>
+                    <a:pt x="77300" y="69448"/>
+                  </a:cubicBezTo>
+                  <a:cubicBezTo>
+                    <a:pt x="46375" y="125112"/>
+                    <a:pt x="16008" y="447460"/>
+                    <a:pt x="7852" y="520861"/>
+                  </a:cubicBezTo>
+                  <a:cubicBezTo>
+                    <a:pt x="11710" y="644324"/>
+                    <a:pt x="-18681" y="773753"/>
+                    <a:pt x="19427" y="891251"/>
+                  </a:cubicBezTo>
+                  <a:cubicBezTo>
+                    <a:pt x="33809" y="935596"/>
+                    <a:pt x="103003" y="933008"/>
+                    <a:pt x="146748" y="949124"/>
+                  </a:cubicBezTo>
+                  <a:cubicBezTo>
+                    <a:pt x="176602" y="960123"/>
+                    <a:pt x="208345" y="965119"/>
+                    <a:pt x="239346" y="972273"/>
+                  </a:cubicBezTo>
+                  <a:cubicBezTo>
+                    <a:pt x="281413" y="981981"/>
+                    <a:pt x="324122" y="988332"/>
+                    <a:pt x="366667" y="995423"/>
+                  </a:cubicBezTo>
+                  <a:cubicBezTo>
+                    <a:pt x="497847" y="987706"/>
+                    <a:pt x="631215" y="997355"/>
+                    <a:pt x="760206" y="972273"/>
+                  </a:cubicBezTo>
+                  <a:cubicBezTo>
+                    <a:pt x="780601" y="968307"/>
+                    <a:pt x="773266" y="932562"/>
+                    <a:pt x="783356" y="914400"/>
+                  </a:cubicBezTo>
+                  <a:cubicBezTo>
+                    <a:pt x="792725" y="897537"/>
+                    <a:pt x="809453" y="885356"/>
+                    <a:pt x="818080" y="868101"/>
+                  </a:cubicBezTo>
+                  <a:cubicBezTo>
+                    <a:pt x="832822" y="838617"/>
+                    <a:pt x="838990" y="805434"/>
+                    <a:pt x="852804" y="775504"/>
+                  </a:cubicBezTo>
+                  <a:cubicBezTo>
+                    <a:pt x="862232" y="755077"/>
+                    <a:pt x="877467" y="737752"/>
+                    <a:pt x="887528" y="717630"/>
+                  </a:cubicBezTo>
+                  <a:cubicBezTo>
+                    <a:pt x="892984" y="706717"/>
+                    <a:pt x="888712" y="689300"/>
+                    <a:pt x="899103" y="682906"/>
+                  </a:cubicBezTo>
+                  <a:cubicBezTo>
+                    <a:pt x="941820" y="656619"/>
+                    <a:pt x="991700" y="644324"/>
+                    <a:pt x="1037999" y="625033"/>
+                  </a:cubicBezTo>
+                  <a:cubicBezTo>
+                    <a:pt x="1045715" y="605742"/>
+                    <a:pt x="1051058" y="585322"/>
+                    <a:pt x="1061148" y="567159"/>
+                  </a:cubicBezTo>
+                  <a:cubicBezTo>
+                    <a:pt x="1078343" y="536207"/>
+                    <a:pt x="1095851" y="520882"/>
+                    <a:pt x="1119022" y="497711"/>
+                  </a:cubicBezTo>
+                  <a:cubicBezTo>
+                    <a:pt x="1122880" y="470704"/>
+                    <a:pt x="1135946" y="443441"/>
+                    <a:pt x="1130596" y="416689"/>
+                  </a:cubicBezTo>
+                  <a:cubicBezTo>
+                    <a:pt x="1120057" y="363994"/>
+                    <a:pt x="1104966" y="309209"/>
+                    <a:pt x="1072723" y="266218"/>
+                  </a:cubicBezTo>
+                  <a:cubicBezTo>
+                    <a:pt x="1061148" y="250785"/>
+                    <a:pt x="1056850" y="224017"/>
+                    <a:pt x="1037999" y="219919"/>
+                  </a:cubicBezTo>
+                  <a:cubicBezTo>
+                    <a:pt x="962501" y="203506"/>
+                    <a:pt x="883670" y="212202"/>
+                    <a:pt x="806505" y="208344"/>
+                  </a:cubicBezTo>
+                  <a:cubicBezTo>
+                    <a:pt x="591133" y="154502"/>
+                    <a:pt x="684450" y="169939"/>
+                    <a:pt x="528713" y="150471"/>
+                  </a:cubicBezTo>
+                  <a:cubicBezTo>
+                    <a:pt x="519530" y="142599"/>
+                    <a:pt x="421953" y="51120"/>
+                    <a:pt x="389816" y="46299"/>
+                  </a:cubicBezTo>
+                  <a:cubicBezTo>
+                    <a:pt x="332583" y="37714"/>
+                    <a:pt x="235488" y="7716"/>
+                    <a:pt x="204622" y="0"/>
+                  </a:cubicBezTo>
+                  <a:close/>
+                </a:path>
+              </a:pathLst>
+            </a:custGeom>
+            <a:solidFill>
+              <a:schemeClr val="bg1"/>
+            </a:solidFill>
+            <a:ln>
+              <a:solidFill>
+                <a:schemeClr val="bg1"/>
+              </a:solidFill>
+            </a:ln>
+          </p:spPr>
+          <p:style>
+            <a:lnRef idx="2">
+              <a:schemeClr val="accent1">
+                <a:shade val="15000"/>
+              </a:schemeClr>
+            </a:lnRef>
+            <a:fillRef idx="1">
+              <a:schemeClr val="accent1"/>
+            </a:fillRef>
+            <a:effectRef idx="0">
+              <a:schemeClr val="accent1"/>
+            </a:effectRef>
+            <a:fontRef idx="minor">
+              <a:schemeClr val="lt1"/>
+            </a:fontRef>
+          </p:style>
+          <p:txBody>
+            <a:bodyPr rtlCol="0" anchor="ctr"/>
+            <a:lstStyle/>
+            <a:p>
+              <a:pPr algn="ctr"/>
+              <a:endParaRPr lang="en-US"/>
+            </a:p>
+          </p:txBody>
+        </p:sp>
+      </p:grpSp>
+      <p:sp>
+        <p:nvSpPr>
+          <p:cNvPr id="3" name="Slide Number Placeholder 2">
+            <a:extLst>
+              <a:ext uri="{FF2B5EF4-FFF2-40B4-BE49-F238E27FC236}">
+                <a16:creationId xmlns:a16="http://schemas.microsoft.com/office/drawing/2014/main" id="{9E8DDEE8-520A-F7C2-38EA-53EF7321A5BF}"/>
+              </a:ext>
+            </a:extLst>
+          </p:cNvPr>
+          <p:cNvSpPr>
+            <a:spLocks noGrp="1"/>
+          </p:cNvSpPr>
+          <p:nvPr>
+            <p:ph type="sldNum" sz="quarter" idx="11"/>
+          </p:nvPr>
+        </p:nvSpPr>
+        <p:spPr>
+          <a:xfrm>
+            <a:off x="8940799" y="6430254"/>
+            <a:ext cx="2743200" cy="365125"/>
+          </a:xfrm>
+        </p:spPr>
+        <p:txBody>
+          <a:bodyPr/>
+          <a:lstStyle/>
+          <a:p>
+            <a:pPr>
+              <a:defRPr/>
+            </a:pPr>
+            <a:fld id="{231CC523-8BC6-4921-807A-66BD262F34AB}" type="slidenum">
+              <a:rPr lang="en-US" smtClean="0"/>
+              <a:pPr>
+                <a:defRPr/>
+              </a:pPr>
+              <a:t>2</a:t>
+            </a:fld>
+            <a:endParaRPr lang="en-US"/>
+          </a:p>
+        </p:txBody>
+      </p:sp>
+      <p:sp>
+        <p:nvSpPr>
+          <p:cNvPr id="9" name="Title 8">
+            <a:extLst>
+              <a:ext uri="{FF2B5EF4-FFF2-40B4-BE49-F238E27FC236}">
+                <a16:creationId xmlns:a16="http://schemas.microsoft.com/office/drawing/2014/main" id="{E7950969-982B-7184-6C48-3778E6BBBD39}"/>
+              </a:ext>
+            </a:extLst>
+          </p:cNvPr>
+          <p:cNvSpPr>
+            <a:spLocks noGrp="1"/>
+          </p:cNvSpPr>
+          <p:nvPr>
+            <p:ph type="ctrTitle"/>
+          </p:nvPr>
+        </p:nvSpPr>
+        <p:spPr>
+          <a:xfrm>
+            <a:off x="381000" y="126366"/>
+            <a:ext cx="11302999" cy="612648"/>
+          </a:xfrm>
+        </p:spPr>
+        <p:txBody>
+          <a:bodyPr>
+            <a:normAutofit/>
+          </a:bodyPr>
+          <a:lstStyle/>
+          <a:p>
+            <a:r>
+              <a:rPr lang="en-US" dirty="0"/>
+              <a:t>Bridge Problem</a:t>
+            </a:r>
+          </a:p>
+        </p:txBody>
+      </p:sp>
+      <p:sp>
+        <p:nvSpPr>
+          <p:cNvPr id="4" name="TextBox 3">
+            <a:extLst>
+              <a:ext uri="{FF2B5EF4-FFF2-40B4-BE49-F238E27FC236}">
+                <a16:creationId xmlns:a16="http://schemas.microsoft.com/office/drawing/2014/main" id="{56C57D43-619A-7BB2-C76B-1EEBCB7DDBE7}"/>
+              </a:ext>
+            </a:extLst>
+          </p:cNvPr>
+          <p:cNvSpPr txBox="1"/>
+          <p:nvPr/>
+        </p:nvSpPr>
+        <p:spPr>
+          <a:xfrm>
+            <a:off x="1003459" y="5461748"/>
+            <a:ext cx="10854160" cy="646331"/>
+          </a:xfrm>
+          <a:prstGeom prst="rect">
+            <a:avLst/>
+          </a:prstGeom>
+          <a:noFill/>
+        </p:spPr>
+        <p:txBody>
+          <a:bodyPr wrap="square">
+            <a:spAutoFit/>
+          </a:bodyPr>
+          <a:lstStyle/>
+          <a:p>
+            <a:r>
+              <a:rPr lang="en-US" b="0" i="0" dirty="0">
+                <a:solidFill>
+                  <a:srgbClr val="222222"/>
+                </a:solidFill>
+                <a:effectLst/>
+                <a:latin typeface="Arial" panose="020B0604020202020204" pitchFamily="34" charset="0"/>
+              </a:rPr>
+              <a:t>Zuo, W. and Saitou, K., 2017. Multi-material topology optimization using ordered SIMP interpolation. </a:t>
+            </a:r>
+            <a:r>
+              <a:rPr lang="en-US" b="0" i="1" dirty="0">
+                <a:solidFill>
+                  <a:srgbClr val="222222"/>
+                </a:solidFill>
+                <a:effectLst/>
+                <a:latin typeface="Arial" panose="020B0604020202020204" pitchFamily="34" charset="0"/>
+              </a:rPr>
+              <a:t>Structural and Multidisciplinary Optimization</a:t>
+            </a:r>
+            <a:r>
+              <a:rPr lang="en-US" b="0" i="0" dirty="0">
+                <a:solidFill>
+                  <a:srgbClr val="222222"/>
+                </a:solidFill>
+                <a:effectLst/>
+                <a:latin typeface="Arial" panose="020B0604020202020204" pitchFamily="34" charset="0"/>
+              </a:rPr>
+              <a:t>, </a:t>
+            </a:r>
+            <a:r>
+              <a:rPr lang="en-US" b="0" i="1" dirty="0">
+                <a:solidFill>
+                  <a:srgbClr val="222222"/>
+                </a:solidFill>
+                <a:effectLst/>
+                <a:latin typeface="Arial" panose="020B0604020202020204" pitchFamily="34" charset="0"/>
+              </a:rPr>
+              <a:t>55</a:t>
+            </a:r>
+            <a:r>
+              <a:rPr lang="en-US" b="0" i="0" dirty="0">
+                <a:solidFill>
+                  <a:srgbClr val="222222"/>
+                </a:solidFill>
+                <a:effectLst/>
+                <a:latin typeface="Arial" panose="020B0604020202020204" pitchFamily="34" charset="0"/>
+              </a:rPr>
+              <a:t>(2), pp.477-491</a:t>
+            </a:r>
+            <a:endParaRPr lang="en-US" dirty="0"/>
+          </a:p>
+        </p:txBody>
+      </p:sp>
+      <p:pic>
+        <p:nvPicPr>
+          <p:cNvPr id="5" name="Picture 4">
+            <a:extLst>
+              <a:ext uri="{FF2B5EF4-FFF2-40B4-BE49-F238E27FC236}">
+                <a16:creationId xmlns:a16="http://schemas.microsoft.com/office/drawing/2014/main" id="{D7B55B5B-70B4-7550-8D09-F5CE22A547A8}"/>
+              </a:ext>
+            </a:extLst>
+          </p:cNvPr>
+          <p:cNvPicPr>
+            <a:picLocks noChangeAspect="1"/>
+          </p:cNvPicPr>
+          <p:nvPr/>
+        </p:nvPicPr>
+        <p:blipFill>
+          <a:blip r:embed="rId3"/>
+          <a:stretch>
+            <a:fillRect/>
+          </a:stretch>
+        </p:blipFill>
+        <p:spPr>
+          <a:xfrm>
+            <a:off x="134519" y="968915"/>
+            <a:ext cx="5012332" cy="2318789"/>
+          </a:xfrm>
+          <a:prstGeom prst="rect">
+            <a:avLst/>
+          </a:prstGeom>
+        </p:spPr>
+      </p:pic>
+      <p:pic>
+        <p:nvPicPr>
+          <p:cNvPr id="11" name="Picture 10">
+            <a:extLst>
+              <a:ext uri="{FF2B5EF4-FFF2-40B4-BE49-F238E27FC236}">
+                <a16:creationId xmlns:a16="http://schemas.microsoft.com/office/drawing/2014/main" id="{740024DF-8A5D-C34E-B3D0-ED24AE2897A1}"/>
+              </a:ext>
+            </a:extLst>
+          </p:cNvPr>
+          <p:cNvPicPr>
+            <a:picLocks noChangeAspect="1"/>
+          </p:cNvPicPr>
+          <p:nvPr/>
+        </p:nvPicPr>
+        <p:blipFill>
+          <a:blip r:embed="rId4"/>
+          <a:stretch>
+            <a:fillRect/>
+          </a:stretch>
+        </p:blipFill>
+        <p:spPr>
+          <a:xfrm>
+            <a:off x="1306518" y="3517605"/>
+            <a:ext cx="8704738" cy="1368890"/>
+          </a:xfrm>
+          <a:prstGeom prst="rect">
+            <a:avLst/>
+          </a:prstGeom>
+        </p:spPr>
+      </p:pic>
+      <p:sp>
+        <p:nvSpPr>
+          <p:cNvPr id="12" name="TextBox 11">
+            <a:extLst>
+              <a:ext uri="{FF2B5EF4-FFF2-40B4-BE49-F238E27FC236}">
+                <a16:creationId xmlns:a16="http://schemas.microsoft.com/office/drawing/2014/main" id="{C3437C16-B94D-BFBF-8C33-48F386590C31}"/>
+              </a:ext>
+            </a:extLst>
+          </p:cNvPr>
+          <p:cNvSpPr txBox="1"/>
+          <p:nvPr/>
+        </p:nvSpPr>
+        <p:spPr>
+          <a:xfrm>
+            <a:off x="8690833" y="1128999"/>
+            <a:ext cx="3243132" cy="830997"/>
+          </a:xfrm>
+          <a:prstGeom prst="rect">
+            <a:avLst/>
+          </a:prstGeom>
+          <a:noFill/>
+        </p:spPr>
+        <p:txBody>
+          <a:bodyPr wrap="none" rtlCol="0">
+            <a:spAutoFit/>
+          </a:bodyPr>
+          <a:lstStyle/>
+          <a:p>
+            <a:pPr algn="ctr"/>
+            <a:r>
+              <a:rPr lang="en-US" sz="2400" b="1" dirty="0"/>
+              <a:t>2D; 5000 elements</a:t>
+            </a:r>
+          </a:p>
+          <a:p>
+            <a:pPr algn="ctr"/>
+            <a:r>
+              <a:rPr lang="en-US" sz="2400" b="1" dirty="0"/>
+              <a:t>Final compliance: </a:t>
+            </a:r>
+            <a:r>
+              <a:rPr lang="en-US" sz="2400" b="1" dirty="0">
+                <a:solidFill>
+                  <a:srgbClr val="00B050"/>
+                </a:solidFill>
+              </a:rPr>
+              <a:t>238</a:t>
+            </a:r>
+          </a:p>
+        </p:txBody>
+      </p:sp>
+    </p:spTree>
+    <p:extLst>
+      <p:ext uri="{BB962C8B-B14F-4D97-AF65-F5344CB8AC3E}">
+        <p14:creationId xmlns:p14="http://schemas.microsoft.com/office/powerpoint/2010/main" val="480139892"/>
+      </p:ext>
+    </p:extLst>
+  </p:cSld>
+  <p:clrMapOvr>
+    <a:masterClrMapping/>
+  </p:clrMapOvr>
+</p:sld>
+</file>
+
+<file path=ppt/slides/slide3.xml><?xml version="1.0" encoding="utf-8"?>
+<p:sld xmlns:a="http://schemas.openxmlformats.org/drawingml/2006/main" xmlns:r="http://schemas.openxmlformats.org/officeDocument/2006/relationships" xmlns:p="http://schemas.openxmlformats.org/presentationml/2006/main">
+  <p:cSld>
+    <p:spTree>
+      <p:nvGrpSpPr>
+        <p:cNvPr id="1" name="">
+          <a:extLst>
+            <a:ext uri="{FF2B5EF4-FFF2-40B4-BE49-F238E27FC236}">
+              <a16:creationId xmlns:a16="http://schemas.microsoft.com/office/drawing/2014/main" id="{4AE4B27E-328C-6268-13B3-D754432541F6}"/>
+            </a:ext>
+          </a:extLst>
+        </p:cNvPr>
+        <p:cNvGrpSpPr/>
+        <p:nvPr/>
+      </p:nvGrpSpPr>
+      <p:grpSpPr>
+        <a:xfrm>
+          <a:off x="0" y="0"/>
+          <a:ext cx="0" cy="0"/>
+          <a:chOff x="0" y="0"/>
+          <a:chExt cx="0" cy="0"/>
+        </a:xfrm>
+      </p:grpSpPr>
+      <p:sp>
+        <p:nvSpPr>
+          <p:cNvPr id="3" name="Slide Number Placeholder 2">
+            <a:extLst>
+              <a:ext uri="{FF2B5EF4-FFF2-40B4-BE49-F238E27FC236}">
+                <a16:creationId xmlns:a16="http://schemas.microsoft.com/office/drawing/2014/main" id="{B61F6F3C-CF16-ACA6-D142-CFF4F473CD9C}"/>
+              </a:ext>
+            </a:extLst>
+          </p:cNvPr>
+          <p:cNvSpPr>
+            <a:spLocks noGrp="1"/>
+          </p:cNvSpPr>
+          <p:nvPr>
+            <p:ph type="sldNum" sz="quarter" idx="11"/>
+          </p:nvPr>
+        </p:nvSpPr>
+        <p:spPr/>
+        <p:txBody>
+          <a:bodyPr/>
+          <a:lstStyle/>
+          <a:p>
+            <a:pPr>
+              <a:defRPr/>
+            </a:pPr>
+            <a:fld id="{231CC523-8BC6-4921-807A-66BD262F34AB}" type="slidenum">
+              <a:rPr lang="en-US" smtClean="0"/>
+              <a:pPr>
+                <a:defRPr/>
+              </a:pPr>
+              <a:t>3</a:t>
+            </a:fld>
+            <a:endParaRPr lang="en-US"/>
+          </a:p>
+        </p:txBody>
+      </p:sp>
+      <p:sp>
+        <p:nvSpPr>
+          <p:cNvPr id="9" name="Title 8">
+            <a:extLst>
+              <a:ext uri="{FF2B5EF4-FFF2-40B4-BE49-F238E27FC236}">
+                <a16:creationId xmlns:a16="http://schemas.microsoft.com/office/drawing/2014/main" id="{C0A9B06D-AE06-B074-A9BB-8FC83E410A52}"/>
+              </a:ext>
+            </a:extLst>
+          </p:cNvPr>
+          <p:cNvSpPr>
+            <a:spLocks noGrp="1"/>
+          </p:cNvSpPr>
+          <p:nvPr>
+            <p:ph type="ctrTitle"/>
+          </p:nvPr>
+        </p:nvSpPr>
+        <p:spPr>
+          <a:xfrm>
+            <a:off x="381000" y="126366"/>
+            <a:ext cx="11302999" cy="612648"/>
+          </a:xfrm>
+        </p:spPr>
+        <p:txBody>
+          <a:bodyPr>
+            <a:normAutofit/>
+          </a:bodyPr>
+          <a:lstStyle/>
+          <a:p>
+            <a:r>
+              <a:rPr lang="en-US" dirty="0"/>
+              <a:t>Materials: </a:t>
+            </a:r>
+            <a:r>
+              <a:rPr lang="en-US" dirty="0" err="1"/>
+              <a:t>DataConstantTemperature</a:t>
+            </a:r>
+            <a:r>
+              <a:rPr lang="en-US" dirty="0"/>
+              <a:t>/3MaterialsBridge.xlsx </a:t>
+            </a:r>
+          </a:p>
+        </p:txBody>
+      </p:sp>
+      <p:pic>
+        <p:nvPicPr>
+          <p:cNvPr id="5" name="Picture 4">
+            <a:extLst>
+              <a:ext uri="{FF2B5EF4-FFF2-40B4-BE49-F238E27FC236}">
+                <a16:creationId xmlns:a16="http://schemas.microsoft.com/office/drawing/2014/main" id="{42FF1BBE-3EBF-49F3-AB76-7598016489A4}"/>
+              </a:ext>
+            </a:extLst>
+          </p:cNvPr>
+          <p:cNvPicPr>
+            <a:picLocks noChangeAspect="1"/>
+          </p:cNvPicPr>
+          <p:nvPr/>
+        </p:nvPicPr>
+        <p:blipFill>
+          <a:blip r:embed="rId2"/>
+          <a:stretch>
+            <a:fillRect/>
+          </a:stretch>
+        </p:blipFill>
+        <p:spPr>
+          <a:xfrm>
+            <a:off x="756602" y="1824128"/>
+            <a:ext cx="8704738" cy="1368890"/>
+          </a:xfrm>
+          <a:prstGeom prst="rect">
+            <a:avLst/>
+          </a:prstGeom>
+        </p:spPr>
+      </p:pic>
+      <p:pic>
+        <p:nvPicPr>
+          <p:cNvPr id="4" name="Picture 3">
+            <a:extLst>
+              <a:ext uri="{FF2B5EF4-FFF2-40B4-BE49-F238E27FC236}">
+                <a16:creationId xmlns:a16="http://schemas.microsoft.com/office/drawing/2014/main" id="{B0EF52A4-1A8D-3177-2D88-3F7A13099E14}"/>
+              </a:ext>
+            </a:extLst>
+          </p:cNvPr>
+          <p:cNvPicPr>
+            <a:picLocks noChangeAspect="1"/>
+          </p:cNvPicPr>
+          <p:nvPr/>
+        </p:nvPicPr>
+        <p:blipFill>
+          <a:blip r:embed="rId3"/>
+          <a:stretch>
+            <a:fillRect/>
+          </a:stretch>
+        </p:blipFill>
+        <p:spPr>
+          <a:xfrm>
+            <a:off x="542941" y="3511774"/>
+            <a:ext cx="5771961" cy="1877385"/>
+          </a:xfrm>
+          <a:prstGeom prst="rect">
+            <a:avLst/>
+          </a:prstGeom>
+        </p:spPr>
+      </p:pic>
+      <p:sp>
+        <p:nvSpPr>
+          <p:cNvPr id="6" name="TextBox 5">
+            <a:extLst>
+              <a:ext uri="{FF2B5EF4-FFF2-40B4-BE49-F238E27FC236}">
+                <a16:creationId xmlns:a16="http://schemas.microsoft.com/office/drawing/2014/main" id="{8B4CE608-B458-7F30-98B5-5D52DCFF8E38}"/>
+              </a:ext>
+            </a:extLst>
+          </p:cNvPr>
+          <p:cNvSpPr txBox="1"/>
+          <p:nvPr/>
+        </p:nvSpPr>
+        <p:spPr>
+          <a:xfrm>
+            <a:off x="838200" y="5707915"/>
+            <a:ext cx="3965583" cy="830997"/>
+          </a:xfrm>
+          <a:prstGeom prst="rect">
+            <a:avLst/>
+          </a:prstGeom>
+          <a:noFill/>
+        </p:spPr>
+        <p:txBody>
+          <a:bodyPr wrap="square" rtlCol="0">
+            <a:spAutoFit/>
+          </a:bodyPr>
+          <a:lstStyle/>
+          <a:p>
+            <a:r>
+              <a:rPr lang="en-US" sz="2400" dirty="0">
+                <a:highlight>
+                  <a:srgbClr val="FFFF00"/>
+                </a:highlight>
+              </a:rPr>
+              <a:t>All attributes reconstruction errors are within 0.001% </a:t>
+            </a:r>
+          </a:p>
+        </p:txBody>
+      </p:sp>
+      <p:sp>
+        <p:nvSpPr>
+          <p:cNvPr id="8" name="TextBox 7">
+            <a:extLst>
+              <a:ext uri="{FF2B5EF4-FFF2-40B4-BE49-F238E27FC236}">
+                <a16:creationId xmlns:a16="http://schemas.microsoft.com/office/drawing/2014/main" id="{DF06315A-BC0F-69F2-E24A-FFEB049682D0}"/>
+              </a:ext>
+            </a:extLst>
+          </p:cNvPr>
+          <p:cNvSpPr txBox="1"/>
+          <p:nvPr/>
+        </p:nvSpPr>
+        <p:spPr>
+          <a:xfrm>
+            <a:off x="24642" y="961000"/>
+            <a:ext cx="1676036" cy="646331"/>
+          </a:xfrm>
+          <a:prstGeom prst="rect">
+            <a:avLst/>
+          </a:prstGeom>
+          <a:noFill/>
+        </p:spPr>
+        <p:txBody>
+          <a:bodyPr wrap="none" rtlCol="0">
+            <a:spAutoFit/>
+          </a:bodyPr>
+          <a:lstStyle/>
+          <a:p>
+            <a:pPr marL="285750" indent="-285750">
+              <a:buFont typeface="Arial" panose="020B0604020202020204" pitchFamily="34" charset="0"/>
+              <a:buChar char="•"/>
+            </a:pPr>
+            <a:r>
+              <a:rPr lang="en-US" b="1" dirty="0"/>
+              <a:t>3 materials</a:t>
+            </a:r>
+          </a:p>
+          <a:p>
+            <a:pPr marL="285750" indent="-285750">
+              <a:buFont typeface="Arial" panose="020B0604020202020204" pitchFamily="34" charset="0"/>
+              <a:buChar char="•"/>
+            </a:pPr>
+            <a:r>
+              <a:rPr lang="en-US" b="1" dirty="0"/>
+              <a:t>3 attributes</a:t>
+            </a:r>
+          </a:p>
+        </p:txBody>
+      </p:sp>
+    </p:spTree>
+    <p:extLst>
+      <p:ext uri="{BB962C8B-B14F-4D97-AF65-F5344CB8AC3E}">
+        <p14:creationId xmlns:p14="http://schemas.microsoft.com/office/powerpoint/2010/main" val="3645681231"/>
+      </p:ext>
+    </p:extLst>
+  </p:cSld>
+  <p:clrMapOvr>
+    <a:masterClrMapping/>
+  </p:clrMapOvr>
+</p:sld>
+</file>
+
+<file path=ppt/slides/slide4.xml><?xml version="1.0" encoding="utf-8"?>
+<p:sld xmlns:a="http://schemas.openxmlformats.org/drawingml/2006/main" xmlns:r="http://schemas.openxmlformats.org/officeDocument/2006/relationships" xmlns:p="http://schemas.openxmlformats.org/presentationml/2006/main">
+  <p:cSld>
+    <p:spTree>
+      <p:nvGrpSpPr>
+        <p:cNvPr id="1" name="">
+          <a:extLst>
+            <a:ext uri="{FF2B5EF4-FFF2-40B4-BE49-F238E27FC236}">
+              <a16:creationId xmlns:a16="http://schemas.microsoft.com/office/drawing/2014/main" id="{386CC742-F933-ED31-BA54-310CD7A1B29F}"/>
+            </a:ext>
+          </a:extLst>
+        </p:cNvPr>
+        <p:cNvGrpSpPr/>
+        <p:nvPr/>
+      </p:nvGrpSpPr>
+      <p:grpSpPr>
+        <a:xfrm>
+          <a:off x="0" y="0"/>
+          <a:ext cx="0" cy="0"/>
+          <a:chOff x="0" y="0"/>
+          <a:chExt cx="0" cy="0"/>
+        </a:xfrm>
+      </p:grpSpPr>
+      <p:sp>
+        <p:nvSpPr>
+          <p:cNvPr id="3" name="Slide Number Placeholder 2">
+            <a:extLst>
+              <a:ext uri="{FF2B5EF4-FFF2-40B4-BE49-F238E27FC236}">
+                <a16:creationId xmlns:a16="http://schemas.microsoft.com/office/drawing/2014/main" id="{7E9FA46C-5AF9-0EC6-DCAE-069A53484C7D}"/>
+              </a:ext>
+            </a:extLst>
+          </p:cNvPr>
+          <p:cNvSpPr>
+            <a:spLocks noGrp="1"/>
+          </p:cNvSpPr>
+          <p:nvPr>
+            <p:ph type="sldNum" sz="quarter" idx="11"/>
+          </p:nvPr>
+        </p:nvSpPr>
+        <p:spPr/>
+        <p:txBody>
+          <a:bodyPr/>
+          <a:lstStyle/>
+          <a:p>
+            <a:pPr>
+              <a:defRPr/>
+            </a:pPr>
+            <a:fld id="{231CC523-8BC6-4921-807A-66BD262F34AB}" type="slidenum">
+              <a:rPr lang="en-US" smtClean="0"/>
+              <a:pPr>
+                <a:defRPr/>
+              </a:pPr>
+              <a:t>4</a:t>
+            </a:fld>
+            <a:endParaRPr lang="en-US"/>
+          </a:p>
+        </p:txBody>
+      </p:sp>
+      <p:sp>
+        <p:nvSpPr>
+          <p:cNvPr id="9" name="Title 8">
+            <a:extLst>
+              <a:ext uri="{FF2B5EF4-FFF2-40B4-BE49-F238E27FC236}">
+                <a16:creationId xmlns:a16="http://schemas.microsoft.com/office/drawing/2014/main" id="{5B3126C4-A307-5B7B-3E27-D485DC5C1A72}"/>
+              </a:ext>
+            </a:extLst>
+          </p:cNvPr>
+          <p:cNvSpPr>
+            <a:spLocks noGrp="1"/>
+          </p:cNvSpPr>
+          <p:nvPr>
+            <p:ph type="ctrTitle"/>
+          </p:nvPr>
+        </p:nvSpPr>
+        <p:spPr>
+          <a:xfrm>
+            <a:off x="381000" y="126366"/>
+            <a:ext cx="11302999" cy="612648"/>
+          </a:xfrm>
+        </p:spPr>
+        <p:txBody>
+          <a:bodyPr>
+            <a:normAutofit/>
+          </a:bodyPr>
+          <a:lstStyle/>
+          <a:p>
+            <a:r>
+              <a:rPr lang="en-US" dirty="0"/>
+              <a:t>Sample Latent Spaces</a:t>
+            </a:r>
+          </a:p>
+        </p:txBody>
+      </p:sp>
+      <p:pic>
+        <p:nvPicPr>
+          <p:cNvPr id="7" name="Picture 6">
+            <a:extLst>
+              <a:ext uri="{FF2B5EF4-FFF2-40B4-BE49-F238E27FC236}">
+                <a16:creationId xmlns:a16="http://schemas.microsoft.com/office/drawing/2014/main" id="{FB15BCAF-8C60-DCAC-80C9-F1F38C028EA1}"/>
+              </a:ext>
+            </a:extLst>
+          </p:cNvPr>
+          <p:cNvPicPr>
+            <a:picLocks noChangeAspect="1"/>
+          </p:cNvPicPr>
+          <p:nvPr/>
+        </p:nvPicPr>
+        <p:blipFill>
+          <a:blip r:embed="rId2"/>
+          <a:stretch>
+            <a:fillRect/>
+          </a:stretch>
+        </p:blipFill>
+        <p:spPr>
+          <a:xfrm>
+            <a:off x="109778" y="1667020"/>
+            <a:ext cx="4460631" cy="3480564"/>
+          </a:xfrm>
+          <a:prstGeom prst="rect">
+            <a:avLst/>
+          </a:prstGeom>
+        </p:spPr>
+      </p:pic>
+      <p:pic>
+        <p:nvPicPr>
+          <p:cNvPr id="10" name="Picture 9">
+            <a:extLst>
+              <a:ext uri="{FF2B5EF4-FFF2-40B4-BE49-F238E27FC236}">
+                <a16:creationId xmlns:a16="http://schemas.microsoft.com/office/drawing/2014/main" id="{DD82F49D-C946-EF73-03B2-BB18EDDF81A8}"/>
+              </a:ext>
+            </a:extLst>
+          </p:cNvPr>
+          <p:cNvPicPr>
+            <a:picLocks noChangeAspect="1"/>
+          </p:cNvPicPr>
+          <p:nvPr/>
+        </p:nvPicPr>
+        <p:blipFill>
+          <a:blip r:embed="rId3"/>
+          <a:stretch>
+            <a:fillRect/>
+          </a:stretch>
+        </p:blipFill>
+        <p:spPr>
+          <a:xfrm>
+            <a:off x="5592514" y="1563291"/>
+            <a:ext cx="4359343" cy="3594452"/>
+          </a:xfrm>
+          <a:prstGeom prst="rect">
+            <a:avLst/>
+          </a:prstGeom>
+        </p:spPr>
+      </p:pic>
+      <p:sp>
+        <p:nvSpPr>
+          <p:cNvPr id="12" name="TextBox 11">
+            <a:extLst>
+              <a:ext uri="{FF2B5EF4-FFF2-40B4-BE49-F238E27FC236}">
+                <a16:creationId xmlns:a16="http://schemas.microsoft.com/office/drawing/2014/main" id="{B29B9F72-7672-17DE-4911-FCE24A32662A}"/>
+              </a:ext>
+            </a:extLst>
+          </p:cNvPr>
+          <p:cNvSpPr txBox="1"/>
+          <p:nvPr/>
+        </p:nvSpPr>
+        <p:spPr>
+          <a:xfrm>
+            <a:off x="6855329" y="1188961"/>
+            <a:ext cx="1761810" cy="523220"/>
+          </a:xfrm>
+          <a:prstGeom prst="rect">
+            <a:avLst/>
+          </a:prstGeom>
+          <a:noFill/>
+        </p:spPr>
+        <p:txBody>
+          <a:bodyPr wrap="square" rtlCol="0">
+            <a:spAutoFit/>
+          </a:bodyPr>
+          <a:lstStyle/>
+          <a:p>
+            <a:r>
+              <a:rPr lang="en-US" sz="2800" b="1" dirty="0"/>
+              <a:t>Density</a:t>
+            </a:r>
+          </a:p>
+        </p:txBody>
+      </p:sp>
+      <p:sp>
+        <p:nvSpPr>
+          <p:cNvPr id="13" name="TextBox 12">
+            <a:extLst>
+              <a:ext uri="{FF2B5EF4-FFF2-40B4-BE49-F238E27FC236}">
+                <a16:creationId xmlns:a16="http://schemas.microsoft.com/office/drawing/2014/main" id="{B7E918EB-AAEA-E66C-8EBB-2DD43EC89BB7}"/>
+              </a:ext>
+            </a:extLst>
+          </p:cNvPr>
+          <p:cNvSpPr txBox="1"/>
+          <p:nvPr/>
+        </p:nvSpPr>
+        <p:spPr>
+          <a:xfrm>
+            <a:off x="823963" y="1200830"/>
+            <a:ext cx="2942537" cy="523220"/>
+          </a:xfrm>
+          <a:prstGeom prst="rect">
+            <a:avLst/>
+          </a:prstGeom>
+          <a:noFill/>
+        </p:spPr>
+        <p:txBody>
+          <a:bodyPr wrap="none" rtlCol="0">
+            <a:spAutoFit/>
+          </a:bodyPr>
+          <a:lstStyle/>
+          <a:p>
+            <a:r>
+              <a:rPr lang="en-US" sz="2800" b="1" dirty="0"/>
+              <a:t>Young’s Modulus</a:t>
+            </a:r>
+          </a:p>
+        </p:txBody>
+      </p:sp>
+    </p:spTree>
+    <p:extLst>
+      <p:ext uri="{BB962C8B-B14F-4D97-AF65-F5344CB8AC3E}">
+        <p14:creationId xmlns:p14="http://schemas.microsoft.com/office/powerpoint/2010/main" val="2830521947"/>
+      </p:ext>
+    </p:extLst>
+  </p:cSld>
+  <p:clrMapOvr>
+    <a:masterClrMapping/>
+  </p:clrMapOvr>
+</p:sld>
+</file>
+
+<file path=ppt/slides/slide5.xml><?xml version="1.0" encoding="utf-8"?>
+<p:sld xmlns:a="http://schemas.openxmlformats.org/drawingml/2006/main" xmlns:r="http://schemas.openxmlformats.org/officeDocument/2006/relationships" xmlns:p="http://schemas.openxmlformats.org/presentationml/2006/main">
+  <p:cSld>
+    <p:spTree>
+      <p:nvGrpSpPr>
+        <p:cNvPr id="1" name="">
+          <a:extLst>
+            <a:ext uri="{FF2B5EF4-FFF2-40B4-BE49-F238E27FC236}">
               <a16:creationId xmlns:a16="http://schemas.microsoft.com/office/drawing/2014/main" id="{8AA82AB9-3C4F-7EE5-5414-906B0218480D}"/>
             </a:ext>
           </a:extLst>
@@ -4039,7 +7571,7 @@
               <a:pPr>
                 <a:defRPr/>
               </a:pPr>
-              <a:t>1</a:t>
+              <a:t>5</a:t>
             </a:fld>
             <a:endParaRPr lang="en-US"/>
           </a:p>
@@ -4185,7 +7717,7 @@
         </p:blipFill>
         <p:spPr>
           <a:xfrm>
-            <a:off x="647218" y="1579280"/>
+            <a:off x="885313" y="1579280"/>
             <a:ext cx="3685714" cy="2200000"/>
           </a:xfrm>
           <a:prstGeom prst="rect">
@@ -4215,7 +7747,7 @@
         </p:blipFill>
         <p:spPr>
           <a:xfrm>
-            <a:off x="409122" y="4056233"/>
+            <a:off x="409122" y="3927439"/>
             <a:ext cx="4161905" cy="990476"/>
           </a:xfrm>
           <a:prstGeom prst="rect">
@@ -4245,14 +7777,141 @@
         </p:blipFill>
         <p:spPr>
           <a:xfrm>
-            <a:off x="6032499" y="1127317"/>
-            <a:ext cx="5780952" cy="4190476"/>
+            <a:off x="6924938" y="1302327"/>
+            <a:ext cx="4461271" cy="3233872"/>
           </a:xfrm>
           <a:prstGeom prst="rect">
             <a:avLst/>
           </a:prstGeom>
         </p:spPr>
       </p:pic>
+      <p:sp>
+        <p:nvSpPr>
+          <p:cNvPr id="11" name="TextBox 10">
+            <a:extLst>
+              <a:ext uri="{FF2B5EF4-FFF2-40B4-BE49-F238E27FC236}">
+                <a16:creationId xmlns:a16="http://schemas.microsoft.com/office/drawing/2014/main" id="{12A2CA8D-2930-41CC-82A9-00B031DA0BE8}"/>
+              </a:ext>
+            </a:extLst>
+          </p:cNvPr>
+          <p:cNvSpPr txBox="1"/>
+          <p:nvPr/>
+        </p:nvSpPr>
+        <p:spPr>
+          <a:xfrm>
+            <a:off x="950233" y="5066074"/>
+            <a:ext cx="3079690" cy="461665"/>
+          </a:xfrm>
+          <a:prstGeom prst="rect">
+            <a:avLst/>
+          </a:prstGeom>
+          <a:noFill/>
+        </p:spPr>
+        <p:txBody>
+          <a:bodyPr wrap="none" rtlCol="0">
+            <a:spAutoFit/>
+          </a:bodyPr>
+          <a:lstStyle/>
+          <a:p>
+            <a:pPr algn="ctr"/>
+            <a:r>
+              <a:rPr lang="en-US" sz="2400" b="1" dirty="0"/>
+              <a:t>Our compliance: </a:t>
+            </a:r>
+            <a:r>
+              <a:rPr lang="en-US" sz="2400" b="1" dirty="0">
+                <a:solidFill>
+                  <a:srgbClr val="00B050"/>
+                </a:solidFill>
+              </a:rPr>
+              <a:t>243</a:t>
+            </a:r>
+          </a:p>
+        </p:txBody>
+      </p:sp>
+      <p:sp>
+        <p:nvSpPr>
+          <p:cNvPr id="12" name="TextBox 11">
+            <a:extLst>
+              <a:ext uri="{FF2B5EF4-FFF2-40B4-BE49-F238E27FC236}">
+                <a16:creationId xmlns:a16="http://schemas.microsoft.com/office/drawing/2014/main" id="{3477E2DB-EE12-DA94-35E3-0AC1504D7975}"/>
+              </a:ext>
+            </a:extLst>
+          </p:cNvPr>
+          <p:cNvSpPr txBox="1"/>
+          <p:nvPr/>
+        </p:nvSpPr>
+        <p:spPr>
+          <a:xfrm>
+            <a:off x="5091886" y="5065385"/>
+            <a:ext cx="6922635" cy="830997"/>
+          </a:xfrm>
+          <a:prstGeom prst="rect">
+            <a:avLst/>
+          </a:prstGeom>
+          <a:noFill/>
+        </p:spPr>
+        <p:txBody>
+          <a:bodyPr wrap="square" rtlCol="0">
+            <a:spAutoFit/>
+          </a:bodyPr>
+          <a:lstStyle/>
+          <a:p>
+            <a:r>
+              <a:rPr lang="en-US" sz="2400" dirty="0">
+                <a:highlight>
+                  <a:srgbClr val="FFFF00"/>
+                </a:highlight>
+              </a:rPr>
+              <a:t>Our 3D solution is within 2% of the 2D benchmark solution. We can easily handle 20+ materials.</a:t>
+            </a:r>
+          </a:p>
+        </p:txBody>
+      </p:sp>
+      <p:sp>
+        <p:nvSpPr>
+          <p:cNvPr id="14" name="TextBox 13">
+            <a:extLst>
+              <a:ext uri="{FF2B5EF4-FFF2-40B4-BE49-F238E27FC236}">
+                <a16:creationId xmlns:a16="http://schemas.microsoft.com/office/drawing/2014/main" id="{25C67D6A-AE71-E9BA-858B-A61D06EA9CEF}"/>
+              </a:ext>
+            </a:extLst>
+          </p:cNvPr>
+          <p:cNvSpPr txBox="1"/>
+          <p:nvPr/>
+        </p:nvSpPr>
+        <p:spPr>
+          <a:xfrm>
+            <a:off x="426600" y="5942727"/>
+            <a:ext cx="3997120" cy="461665"/>
+          </a:xfrm>
+          <a:prstGeom prst="rect">
+            <a:avLst/>
+          </a:prstGeom>
+          <a:noFill/>
+        </p:spPr>
+        <p:txBody>
+          <a:bodyPr wrap="none" rtlCol="0">
+            <a:spAutoFit/>
+          </a:bodyPr>
+          <a:lstStyle/>
+          <a:p>
+            <a:pPr algn="ctr"/>
+            <a:r>
+              <a:rPr lang="en-US" sz="2400" b="1" dirty="0"/>
+              <a:t>Reference compliance: </a:t>
+            </a:r>
+            <a:r>
+              <a:rPr lang="en-US" sz="2400" b="1" dirty="0">
+                <a:solidFill>
+                  <a:srgbClr val="00B050"/>
+                </a:solidFill>
+              </a:rPr>
+              <a:t>238</a:t>
+            </a:r>
+          </a:p>
+        </p:txBody>
+      </p:sp>
     </p:spTree>
     <p:extLst>
       <p:ext uri="{BB962C8B-B14F-4D97-AF65-F5344CB8AC3E}">
@@ -4266,7 +7925,574 @@
 </p:sld>
 </file>
 
-<file path=ppt/slides/slide2.xml><?xml version="1.0" encoding="utf-8"?>
+<file path=ppt/slides/slide6.xml><?xml version="1.0" encoding="utf-8"?>
+<p:sld xmlns:a="http://schemas.openxmlformats.org/drawingml/2006/main" xmlns:r="http://schemas.openxmlformats.org/officeDocument/2006/relationships" xmlns:p="http://schemas.openxmlformats.org/presentationml/2006/main">
+  <p:cSld>
+    <p:spTree>
+      <p:nvGrpSpPr>
+        <p:cNvPr id="1" name="">
+          <a:extLst>
+            <a:ext uri="{FF2B5EF4-FFF2-40B4-BE49-F238E27FC236}">
+              <a16:creationId xmlns:a16="http://schemas.microsoft.com/office/drawing/2014/main" id="{D4B21D0B-75C3-AA5C-D584-A0BCE6F17B35}"/>
+            </a:ext>
+          </a:extLst>
+        </p:cNvPr>
+        <p:cNvGrpSpPr/>
+        <p:nvPr/>
+      </p:nvGrpSpPr>
+      <p:grpSpPr>
+        <a:xfrm>
+          <a:off x="0" y="0"/>
+          <a:ext cx="0" cy="0"/>
+          <a:chOff x="0" y="0"/>
+          <a:chExt cx="0" cy="0"/>
+        </a:xfrm>
+      </p:grpSpPr>
+      <p:sp>
+        <p:nvSpPr>
+          <p:cNvPr id="3" name="Slide Number Placeholder 2">
+            <a:extLst>
+              <a:ext uri="{FF2B5EF4-FFF2-40B4-BE49-F238E27FC236}">
+                <a16:creationId xmlns:a16="http://schemas.microsoft.com/office/drawing/2014/main" id="{C93F1F15-0ADB-0359-ECCB-3C1EE02D34A6}"/>
+              </a:ext>
+            </a:extLst>
+          </p:cNvPr>
+          <p:cNvSpPr>
+            <a:spLocks noGrp="1"/>
+          </p:cNvSpPr>
+          <p:nvPr>
+            <p:ph type="sldNum" sz="quarter" idx="11"/>
+          </p:nvPr>
+        </p:nvSpPr>
+        <p:spPr/>
+        <p:txBody>
+          <a:bodyPr/>
+          <a:lstStyle/>
+          <a:p>
+            <a:pPr>
+              <a:defRPr/>
+            </a:pPr>
+            <a:fld id="{231CC523-8BC6-4921-807A-66BD262F34AB}" type="slidenum">
+              <a:rPr lang="en-US" smtClean="0"/>
+              <a:pPr>
+                <a:defRPr/>
+              </a:pPr>
+              <a:t>6</a:t>
+            </a:fld>
+            <a:endParaRPr lang="en-US"/>
+          </a:p>
+        </p:txBody>
+      </p:sp>
+      <p:sp>
+        <p:nvSpPr>
+          <p:cNvPr id="9" name="Title 8">
+            <a:extLst>
+              <a:ext uri="{FF2B5EF4-FFF2-40B4-BE49-F238E27FC236}">
+                <a16:creationId xmlns:a16="http://schemas.microsoft.com/office/drawing/2014/main" id="{3D042F7B-6140-1EEC-7013-46EB01614128}"/>
+              </a:ext>
+            </a:extLst>
+          </p:cNvPr>
+          <p:cNvSpPr>
+            <a:spLocks noGrp="1"/>
+          </p:cNvSpPr>
+          <p:nvPr>
+            <p:ph type="ctrTitle"/>
+          </p:nvPr>
+        </p:nvSpPr>
+        <p:spPr>
+          <a:xfrm>
+            <a:off x="381000" y="126366"/>
+            <a:ext cx="11302999" cy="612648"/>
+          </a:xfrm>
+        </p:spPr>
+        <p:txBody>
+          <a:bodyPr>
+            <a:normAutofit/>
+          </a:bodyPr>
+          <a:lstStyle/>
+          <a:p>
+            <a:r>
+              <a:rPr lang="en-US" dirty="0"/>
+              <a:t>Materials: </a:t>
+            </a:r>
+            <a:r>
+              <a:rPr lang="en-US" dirty="0" err="1"/>
+              <a:t>DataConstantTemperature</a:t>
+            </a:r>
+            <a:r>
+              <a:rPr lang="en-US" dirty="0"/>
+              <a:t>/3Materials.xlsx </a:t>
+            </a:r>
+          </a:p>
+        </p:txBody>
+      </p:sp>
+      <p:pic>
+        <p:nvPicPr>
+          <p:cNvPr id="4" name="Picture 3">
+            <a:extLst>
+              <a:ext uri="{FF2B5EF4-FFF2-40B4-BE49-F238E27FC236}">
+                <a16:creationId xmlns:a16="http://schemas.microsoft.com/office/drawing/2014/main" id="{75F737E2-02FD-53EC-5B55-B097B91C82DE}"/>
+              </a:ext>
+            </a:extLst>
+          </p:cNvPr>
+          <p:cNvPicPr>
+            <a:picLocks noChangeAspect="1"/>
+          </p:cNvPicPr>
+          <p:nvPr/>
+        </p:nvPicPr>
+        <p:blipFill>
+          <a:blip r:embed="rId2"/>
+          <a:stretch>
+            <a:fillRect/>
+          </a:stretch>
+        </p:blipFill>
+        <p:spPr>
+          <a:xfrm>
+            <a:off x="503096" y="1936191"/>
+            <a:ext cx="10388070" cy="1210080"/>
+          </a:xfrm>
+          <a:prstGeom prst="rect">
+            <a:avLst/>
+          </a:prstGeom>
+        </p:spPr>
+      </p:pic>
+      <p:pic>
+        <p:nvPicPr>
+          <p:cNvPr id="5" name="Picture 4">
+            <a:extLst>
+              <a:ext uri="{FF2B5EF4-FFF2-40B4-BE49-F238E27FC236}">
+                <a16:creationId xmlns:a16="http://schemas.microsoft.com/office/drawing/2014/main" id="{DD1A2036-8428-7DEA-1542-12DF20CF4430}"/>
+              </a:ext>
+            </a:extLst>
+          </p:cNvPr>
+          <p:cNvPicPr>
+            <a:picLocks noChangeAspect="1"/>
+          </p:cNvPicPr>
+          <p:nvPr/>
+        </p:nvPicPr>
+        <p:blipFill>
+          <a:blip r:embed="rId3"/>
+          <a:stretch>
+            <a:fillRect/>
+          </a:stretch>
+        </p:blipFill>
+        <p:spPr>
+          <a:xfrm>
+            <a:off x="6160975" y="3608844"/>
+            <a:ext cx="5650025" cy="2226404"/>
+          </a:xfrm>
+          <a:prstGeom prst="rect">
+            <a:avLst/>
+          </a:prstGeom>
+        </p:spPr>
+      </p:pic>
+      <p:sp>
+        <p:nvSpPr>
+          <p:cNvPr id="6" name="TextBox 5">
+            <a:extLst>
+              <a:ext uri="{FF2B5EF4-FFF2-40B4-BE49-F238E27FC236}">
+                <a16:creationId xmlns:a16="http://schemas.microsoft.com/office/drawing/2014/main" id="{5E864340-D4BD-EDE1-B57A-92621709DE33}"/>
+              </a:ext>
+            </a:extLst>
+          </p:cNvPr>
+          <p:cNvSpPr txBox="1"/>
+          <p:nvPr/>
+        </p:nvSpPr>
+        <p:spPr>
+          <a:xfrm>
+            <a:off x="7439628" y="5893777"/>
+            <a:ext cx="4036268" cy="827698"/>
+          </a:xfrm>
+          <a:prstGeom prst="rect">
+            <a:avLst/>
+          </a:prstGeom>
+          <a:noFill/>
+        </p:spPr>
+        <p:txBody>
+          <a:bodyPr wrap="square" rtlCol="0">
+            <a:spAutoFit/>
+          </a:bodyPr>
+          <a:lstStyle/>
+          <a:p>
+            <a:r>
+              <a:rPr lang="en-US" sz="2400" dirty="0">
+                <a:highlight>
+                  <a:srgbClr val="FFFF00"/>
+                </a:highlight>
+              </a:rPr>
+              <a:t>All attributes reconstruction errors are within 0.1% </a:t>
+            </a:r>
+          </a:p>
+        </p:txBody>
+      </p:sp>
+      <p:pic>
+        <p:nvPicPr>
+          <p:cNvPr id="13" name="Picture 12">
+            <a:extLst>
+              <a:ext uri="{FF2B5EF4-FFF2-40B4-BE49-F238E27FC236}">
+                <a16:creationId xmlns:a16="http://schemas.microsoft.com/office/drawing/2014/main" id="{65207502-5985-B756-A1E7-0A7BE218A011}"/>
+              </a:ext>
+            </a:extLst>
+          </p:cNvPr>
+          <p:cNvPicPr>
+            <a:picLocks noChangeAspect="1"/>
+          </p:cNvPicPr>
+          <p:nvPr/>
+        </p:nvPicPr>
+        <p:blipFill>
+          <a:blip r:embed="rId4"/>
+          <a:stretch>
+            <a:fillRect/>
+          </a:stretch>
+        </p:blipFill>
+        <p:spPr>
+          <a:xfrm>
+            <a:off x="503096" y="4149874"/>
+            <a:ext cx="4759802" cy="612648"/>
+          </a:xfrm>
+          <a:prstGeom prst="rect">
+            <a:avLst/>
+          </a:prstGeom>
+        </p:spPr>
+      </p:pic>
+      <p:sp>
+        <p:nvSpPr>
+          <p:cNvPr id="14" name="TextBox 13">
+            <a:extLst>
+              <a:ext uri="{FF2B5EF4-FFF2-40B4-BE49-F238E27FC236}">
+                <a16:creationId xmlns:a16="http://schemas.microsoft.com/office/drawing/2014/main" id="{02F19186-93C2-63CE-DE54-6A1F87991422}"/>
+              </a:ext>
+            </a:extLst>
+          </p:cNvPr>
+          <p:cNvSpPr txBox="1"/>
+          <p:nvPr/>
+        </p:nvSpPr>
+        <p:spPr>
+          <a:xfrm>
+            <a:off x="381000" y="5066079"/>
+            <a:ext cx="4036268" cy="1200329"/>
+          </a:xfrm>
+          <a:prstGeom prst="rect">
+            <a:avLst/>
+          </a:prstGeom>
+          <a:noFill/>
+        </p:spPr>
+        <p:txBody>
+          <a:bodyPr wrap="square" rtlCol="0">
+            <a:spAutoFit/>
+          </a:bodyPr>
+          <a:lstStyle/>
+          <a:p>
+            <a:r>
+              <a:rPr lang="en-US" sz="2400" dirty="0">
+                <a:highlight>
+                  <a:srgbClr val="FFFF00"/>
+                </a:highlight>
+              </a:rPr>
+              <a:t>Training takes about 4 mins. This is usually negligible for large scale TO problems</a:t>
+            </a:r>
+          </a:p>
+        </p:txBody>
+      </p:sp>
+      <p:sp>
+        <p:nvSpPr>
+          <p:cNvPr id="15" name="TextBox 14">
+            <a:extLst>
+              <a:ext uri="{FF2B5EF4-FFF2-40B4-BE49-F238E27FC236}">
+                <a16:creationId xmlns:a16="http://schemas.microsoft.com/office/drawing/2014/main" id="{99BC58F5-C32D-6DA9-940F-836CBCC1B4C2}"/>
+              </a:ext>
+            </a:extLst>
+          </p:cNvPr>
+          <p:cNvSpPr txBox="1"/>
+          <p:nvPr/>
+        </p:nvSpPr>
+        <p:spPr>
+          <a:xfrm>
+            <a:off x="24642" y="961000"/>
+            <a:ext cx="1676036" cy="646331"/>
+          </a:xfrm>
+          <a:prstGeom prst="rect">
+            <a:avLst/>
+          </a:prstGeom>
+          <a:noFill/>
+        </p:spPr>
+        <p:txBody>
+          <a:bodyPr wrap="none" rtlCol="0">
+            <a:spAutoFit/>
+          </a:bodyPr>
+          <a:lstStyle/>
+          <a:p>
+            <a:pPr marL="285750" indent="-285750">
+              <a:buFont typeface="Arial" panose="020B0604020202020204" pitchFamily="34" charset="0"/>
+              <a:buChar char="•"/>
+            </a:pPr>
+            <a:r>
+              <a:rPr lang="en-US" b="1" dirty="0"/>
+              <a:t>3 materials</a:t>
+            </a:r>
+          </a:p>
+          <a:p>
+            <a:pPr marL="285750" indent="-285750">
+              <a:buFont typeface="Arial" panose="020B0604020202020204" pitchFamily="34" charset="0"/>
+              <a:buChar char="•"/>
+            </a:pPr>
+            <a:r>
+              <a:rPr lang="en-US" b="1" dirty="0"/>
+              <a:t>5 attributes</a:t>
+            </a:r>
+          </a:p>
+        </p:txBody>
+      </p:sp>
+    </p:spTree>
+    <p:extLst>
+      <p:ext uri="{BB962C8B-B14F-4D97-AF65-F5344CB8AC3E}">
+        <p14:creationId xmlns:p14="http://schemas.microsoft.com/office/powerpoint/2010/main" val="1957936417"/>
+      </p:ext>
+    </p:extLst>
+  </p:cSld>
+  <p:clrMapOvr>
+    <a:masterClrMapping/>
+  </p:clrMapOvr>
+</p:sld>
+</file>
+
+<file path=ppt/slides/slide7.xml><?xml version="1.0" encoding="utf-8"?>
+<p:sld xmlns:a="http://schemas.openxmlformats.org/drawingml/2006/main" xmlns:r="http://schemas.openxmlformats.org/officeDocument/2006/relationships" xmlns:p="http://schemas.openxmlformats.org/presentationml/2006/main">
+  <p:cSld>
+    <p:spTree>
+      <p:nvGrpSpPr>
+        <p:cNvPr id="1" name="">
+          <a:extLst>
+            <a:ext uri="{FF2B5EF4-FFF2-40B4-BE49-F238E27FC236}">
+              <a16:creationId xmlns:a16="http://schemas.microsoft.com/office/drawing/2014/main" id="{F887FA04-10F2-CB07-817F-77440344310C}"/>
+            </a:ext>
+          </a:extLst>
+        </p:cNvPr>
+        <p:cNvGrpSpPr/>
+        <p:nvPr/>
+      </p:nvGrpSpPr>
+      <p:grpSpPr>
+        <a:xfrm>
+          <a:off x="0" y="0"/>
+          <a:ext cx="0" cy="0"/>
+          <a:chOff x="0" y="0"/>
+          <a:chExt cx="0" cy="0"/>
+        </a:xfrm>
+      </p:grpSpPr>
+      <p:sp>
+        <p:nvSpPr>
+          <p:cNvPr id="3" name="Slide Number Placeholder 2">
+            <a:extLst>
+              <a:ext uri="{FF2B5EF4-FFF2-40B4-BE49-F238E27FC236}">
+                <a16:creationId xmlns:a16="http://schemas.microsoft.com/office/drawing/2014/main" id="{72E74969-485B-8368-D67A-A9BB36837E4D}"/>
+              </a:ext>
+            </a:extLst>
+          </p:cNvPr>
+          <p:cNvSpPr>
+            <a:spLocks noGrp="1"/>
+          </p:cNvSpPr>
+          <p:nvPr>
+            <p:ph type="sldNum" sz="quarter" idx="11"/>
+          </p:nvPr>
+        </p:nvSpPr>
+        <p:spPr/>
+        <p:txBody>
+          <a:bodyPr/>
+          <a:lstStyle/>
+          <a:p>
+            <a:pPr>
+              <a:defRPr/>
+            </a:pPr>
+            <a:fld id="{231CC523-8BC6-4921-807A-66BD262F34AB}" type="slidenum">
+              <a:rPr lang="en-US" smtClean="0"/>
+              <a:pPr>
+                <a:defRPr/>
+              </a:pPr>
+              <a:t>7</a:t>
+            </a:fld>
+            <a:endParaRPr lang="en-US"/>
+          </a:p>
+        </p:txBody>
+      </p:sp>
+      <p:sp>
+        <p:nvSpPr>
+          <p:cNvPr id="9" name="Title 8">
+            <a:extLst>
+              <a:ext uri="{FF2B5EF4-FFF2-40B4-BE49-F238E27FC236}">
+                <a16:creationId xmlns:a16="http://schemas.microsoft.com/office/drawing/2014/main" id="{C017ED49-7031-8023-E441-14DF867C38E0}"/>
+              </a:ext>
+            </a:extLst>
+          </p:cNvPr>
+          <p:cNvSpPr>
+            <a:spLocks noGrp="1"/>
+          </p:cNvSpPr>
+          <p:nvPr>
+            <p:ph type="ctrTitle"/>
+          </p:nvPr>
+        </p:nvSpPr>
+        <p:spPr>
+          <a:xfrm>
+            <a:off x="381000" y="126366"/>
+            <a:ext cx="11302999" cy="612648"/>
+          </a:xfrm>
+        </p:spPr>
+        <p:txBody>
+          <a:bodyPr>
+            <a:normAutofit/>
+          </a:bodyPr>
+          <a:lstStyle/>
+          <a:p>
+            <a:r>
+              <a:rPr lang="en-US" dirty="0"/>
+              <a:t>Sample Latent Spaces</a:t>
+            </a:r>
+          </a:p>
+        </p:txBody>
+      </p:sp>
+      <p:pic>
+        <p:nvPicPr>
+          <p:cNvPr id="7" name="Picture 6">
+            <a:extLst>
+              <a:ext uri="{FF2B5EF4-FFF2-40B4-BE49-F238E27FC236}">
+                <a16:creationId xmlns:a16="http://schemas.microsoft.com/office/drawing/2014/main" id="{64825A94-841C-9247-F669-37E73B658E1A}"/>
+              </a:ext>
+            </a:extLst>
+          </p:cNvPr>
+          <p:cNvPicPr>
+            <a:picLocks noChangeAspect="1"/>
+          </p:cNvPicPr>
+          <p:nvPr/>
+        </p:nvPicPr>
+        <p:blipFill>
+          <a:blip r:embed="rId2"/>
+          <a:stretch>
+            <a:fillRect/>
+          </a:stretch>
+        </p:blipFill>
+        <p:spPr>
+          <a:xfrm>
+            <a:off x="139199" y="1978132"/>
+            <a:ext cx="4193444" cy="3354755"/>
+          </a:xfrm>
+          <a:prstGeom prst="rect">
+            <a:avLst/>
+          </a:prstGeom>
+        </p:spPr>
+      </p:pic>
+      <p:sp>
+        <p:nvSpPr>
+          <p:cNvPr id="8" name="TextBox 7">
+            <a:extLst>
+              <a:ext uri="{FF2B5EF4-FFF2-40B4-BE49-F238E27FC236}">
+                <a16:creationId xmlns:a16="http://schemas.microsoft.com/office/drawing/2014/main" id="{AAFAEBB4-D0D1-4A27-5E08-F7A40BC36224}"/>
+              </a:ext>
+            </a:extLst>
+          </p:cNvPr>
+          <p:cNvSpPr txBox="1"/>
+          <p:nvPr/>
+        </p:nvSpPr>
+        <p:spPr>
+          <a:xfrm>
+            <a:off x="672054" y="1454912"/>
+            <a:ext cx="2942537" cy="523220"/>
+          </a:xfrm>
+          <a:prstGeom prst="rect">
+            <a:avLst/>
+          </a:prstGeom>
+          <a:noFill/>
+        </p:spPr>
+        <p:txBody>
+          <a:bodyPr wrap="none" rtlCol="0">
+            <a:spAutoFit/>
+          </a:bodyPr>
+          <a:lstStyle/>
+          <a:p>
+            <a:r>
+              <a:rPr lang="en-US" sz="2800" b="1" dirty="0"/>
+              <a:t>Young’s Modulus</a:t>
+            </a:r>
+          </a:p>
+        </p:txBody>
+      </p:sp>
+      <p:pic>
+        <p:nvPicPr>
+          <p:cNvPr id="11" name="Picture 10">
+            <a:extLst>
+              <a:ext uri="{FF2B5EF4-FFF2-40B4-BE49-F238E27FC236}">
+                <a16:creationId xmlns:a16="http://schemas.microsoft.com/office/drawing/2014/main" id="{49C9A26A-8DEA-C1F9-F4B7-CED5C79D59C9}"/>
+              </a:ext>
+            </a:extLst>
+          </p:cNvPr>
+          <p:cNvPicPr>
+            <a:picLocks noChangeAspect="1"/>
+          </p:cNvPicPr>
+          <p:nvPr/>
+        </p:nvPicPr>
+        <p:blipFill>
+          <a:blip r:embed="rId3"/>
+          <a:stretch>
+            <a:fillRect/>
+          </a:stretch>
+        </p:blipFill>
+        <p:spPr>
+          <a:xfrm>
+            <a:off x="5213547" y="1965572"/>
+            <a:ext cx="4264867" cy="3526615"/>
+          </a:xfrm>
+          <a:prstGeom prst="rect">
+            <a:avLst/>
+          </a:prstGeom>
+        </p:spPr>
+      </p:pic>
+      <p:sp>
+        <p:nvSpPr>
+          <p:cNvPr id="12" name="TextBox 11">
+            <a:extLst>
+              <a:ext uri="{FF2B5EF4-FFF2-40B4-BE49-F238E27FC236}">
+                <a16:creationId xmlns:a16="http://schemas.microsoft.com/office/drawing/2014/main" id="{AA068BAE-E697-D1D0-615E-7067041403A1}"/>
+              </a:ext>
+            </a:extLst>
+          </p:cNvPr>
+          <p:cNvSpPr txBox="1"/>
+          <p:nvPr/>
+        </p:nvSpPr>
+        <p:spPr>
+          <a:xfrm>
+            <a:off x="6584107" y="1439840"/>
+            <a:ext cx="1761810" cy="523220"/>
+          </a:xfrm>
+          <a:prstGeom prst="rect">
+            <a:avLst/>
+          </a:prstGeom>
+          <a:noFill/>
+        </p:spPr>
+        <p:txBody>
+          <a:bodyPr wrap="square" rtlCol="0">
+            <a:spAutoFit/>
+          </a:bodyPr>
+          <a:lstStyle/>
+          <a:p>
+            <a:r>
+              <a:rPr lang="en-US" sz="2800" b="1" dirty="0"/>
+              <a:t>Density</a:t>
+            </a:r>
+          </a:p>
+        </p:txBody>
+      </p:sp>
+    </p:spTree>
+    <p:extLst>
+      <p:ext uri="{BB962C8B-B14F-4D97-AF65-F5344CB8AC3E}">
+        <p14:creationId xmlns:p14="http://schemas.microsoft.com/office/powerpoint/2010/main" val="2906560088"/>
+      </p:ext>
+    </p:extLst>
+  </p:cSld>
+  <p:clrMapOvr>
+    <a:masterClrMapping/>
+  </p:clrMapOvr>
+</p:sld>
+</file>
+
+<file path=ppt/slides/slide8.xml><?xml version="1.0" encoding="utf-8"?>
 <p:sld xmlns:a="http://schemas.openxmlformats.org/drawingml/2006/main" xmlns:r="http://schemas.openxmlformats.org/officeDocument/2006/relationships" xmlns:p="http://schemas.openxmlformats.org/presentationml/2006/main">
   <p:cSld>
     <p:spTree>
@@ -4318,7 +8544,7 @@
               <a:pPr>
                 <a:defRPr/>
               </a:pPr>
-              <a:t>2</a:t>
+              <a:t>8</a:t>
             </a:fld>
             <a:endParaRPr lang="en-US"/>
           </a:p>
@@ -4381,7 +8607,7 @@
         </p:blipFill>
         <p:spPr>
           <a:xfrm>
-            <a:off x="683573" y="1932409"/>
+            <a:off x="715557" y="1422491"/>
             <a:ext cx="3276190" cy="2409524"/>
           </a:xfrm>
           <a:prstGeom prst="rect">
@@ -4403,7 +8629,7 @@
         </p:nvSpPr>
         <p:spPr>
           <a:xfrm>
-            <a:off x="187257" y="1297406"/>
+            <a:off x="299154" y="1034162"/>
             <a:ext cx="6094378" cy="286360"/>
           </a:xfrm>
           <a:prstGeom prst="rect">
@@ -4485,7 +8711,7 @@
         </p:blipFill>
         <p:spPr>
           <a:xfrm>
-            <a:off x="299154" y="5097000"/>
+            <a:off x="299154" y="4031621"/>
             <a:ext cx="4864529" cy="1172476"/>
           </a:xfrm>
           <a:prstGeom prst="rect">
@@ -4515,7 +8741,7 @@
         </p:blipFill>
         <p:spPr>
           <a:xfrm>
-            <a:off x="6096000" y="1673414"/>
+            <a:off x="6032499" y="1371857"/>
             <a:ext cx="5552381" cy="4114286"/>
           </a:xfrm>
           <a:prstGeom prst="rect">
@@ -4523,6 +8749,55 @@
           </a:prstGeom>
         </p:spPr>
       </p:pic>
+      <p:sp>
+        <p:nvSpPr>
+          <p:cNvPr id="2" name="TextBox 1">
+            <a:extLst>
+              <a:ext uri="{FF2B5EF4-FFF2-40B4-BE49-F238E27FC236}">
+                <a16:creationId xmlns:a16="http://schemas.microsoft.com/office/drawing/2014/main" id="{A756167E-21CE-6E69-3624-8CD979C15137}"/>
+              </a:ext>
+            </a:extLst>
+          </p:cNvPr>
+          <p:cNvSpPr txBox="1"/>
+          <p:nvPr/>
+        </p:nvSpPr>
+        <p:spPr>
+          <a:xfrm>
+            <a:off x="165342" y="5505748"/>
+            <a:ext cx="7417494" cy="830997"/>
+          </a:xfrm>
+          <a:prstGeom prst="rect">
+            <a:avLst/>
+          </a:prstGeom>
+          <a:noFill/>
+        </p:spPr>
+        <p:txBody>
+          <a:bodyPr wrap="square" rtlCol="0">
+            <a:spAutoFit/>
+          </a:bodyPr>
+          <a:lstStyle/>
+          <a:p>
+            <a:r>
+              <a:rPr lang="en-US" sz="2400" dirty="0">
+                <a:highlight>
+                  <a:srgbClr val="FFFF00"/>
+                </a:highlight>
+              </a:rPr>
+              <a:t>Stiff materials are added where expected.</a:t>
+            </a:r>
+          </a:p>
+          <a:p>
+            <a:r>
+              <a:rPr lang="en-US" sz="2400" dirty="0">
+                <a:highlight>
+                  <a:srgbClr val="FFFF00"/>
+                </a:highlight>
+              </a:rPr>
+              <a:t>Constraints are satisfied</a:t>
+            </a:r>
+          </a:p>
+        </p:txBody>
+      </p:sp>
     </p:spTree>
     <p:extLst>
       <p:ext uri="{BB962C8B-B14F-4D97-AF65-F5344CB8AC3E}">
@@ -4536,7 +8811,7 @@
 </p:sld>
 </file>
 
-<file path=ppt/slides/slide3.xml><?xml version="1.0" encoding="utf-8"?>
+<file path=ppt/slides/slide9.xml><?xml version="1.0" encoding="utf-8"?>
 <p:sld xmlns:a="http://schemas.openxmlformats.org/drawingml/2006/main" xmlns:r="http://schemas.openxmlformats.org/officeDocument/2006/relationships" xmlns:p="http://schemas.openxmlformats.org/presentationml/2006/main">
   <p:cSld>
     <p:spTree>
@@ -4588,7 +8863,7 @@
               <a:pPr>
                 <a:defRPr/>
               </a:pPr>
-              <a:t>3</a:t>
+              <a:t>9</a:t>
             </a:fld>
             <a:endParaRPr lang="en-US"/>
           </a:p>
@@ -4643,7 +8918,7 @@
         </p:nvSpPr>
         <p:spPr>
           <a:xfrm>
-            <a:off x="187257" y="1297407"/>
+            <a:off x="229410" y="1104406"/>
             <a:ext cx="6369186" cy="286360"/>
           </a:xfrm>
           <a:prstGeom prst="rect">
@@ -4725,7 +9000,7 @@
         </p:blipFill>
         <p:spPr>
           <a:xfrm>
-            <a:off x="0" y="1898463"/>
+            <a:off x="229410" y="1701693"/>
             <a:ext cx="3533333" cy="2419048"/>
           </a:xfrm>
           <a:prstGeom prst="rect">
@@ -4755,8 +9030,8 @@
         </p:blipFill>
         <p:spPr>
           <a:xfrm>
-            <a:off x="536769" y="4772493"/>
-            <a:ext cx="3647619" cy="1009524"/>
+            <a:off x="293211" y="4431668"/>
+            <a:ext cx="4471307" cy="1237490"/>
           </a:xfrm>
           <a:prstGeom prst="rect">
             <a:avLst/>
@@ -4793,1450 +9068,49 @@
           </a:prstGeom>
         </p:spPr>
       </p:pic>
+      <p:sp>
+        <p:nvSpPr>
+          <p:cNvPr id="2" name="TextBox 1">
+            <a:extLst>
+              <a:ext uri="{FF2B5EF4-FFF2-40B4-BE49-F238E27FC236}">
+                <a16:creationId xmlns:a16="http://schemas.microsoft.com/office/drawing/2014/main" id="{E14222D3-9AC4-E277-2495-48A2F11A90B5}"/>
+              </a:ext>
+            </a:extLst>
+          </p:cNvPr>
+          <p:cNvSpPr txBox="1"/>
+          <p:nvPr/>
+        </p:nvSpPr>
+        <p:spPr>
+          <a:xfrm>
+            <a:off x="229410" y="5900637"/>
+            <a:ext cx="7417494" cy="830997"/>
+          </a:xfrm>
+          <a:prstGeom prst="rect">
+            <a:avLst/>
+          </a:prstGeom>
+          <a:noFill/>
+        </p:spPr>
+        <p:txBody>
+          <a:bodyPr wrap="square" rtlCol="0">
+            <a:spAutoFit/>
+          </a:bodyPr>
+          <a:lstStyle/>
+          <a:p>
+            <a:r>
+              <a:rPr lang="en-US" sz="2400" dirty="0">
+                <a:highlight>
+                  <a:srgbClr val="FFFF00"/>
+                </a:highlight>
+              </a:rPr>
+              <a:t>Adding more constraints does not significantly increase computational cost</a:t>
+            </a:r>
+          </a:p>
+        </p:txBody>
+      </p:sp>
     </p:spTree>
     <p:extLst>
       <p:ext uri="{BB962C8B-B14F-4D97-AF65-F5344CB8AC3E}">
         <p14:creationId xmlns:p14="http://schemas.microsoft.com/office/powerpoint/2010/main" val="3690270338"/>
-      </p:ext>
-    </p:extLst>
-  </p:cSld>
-  <p:clrMapOvr>
-    <a:masterClrMapping/>
-  </p:clrMapOvr>
-</p:sld>
-</file>
-
-<file path=ppt/slides/slide4.xml><?xml version="1.0" encoding="utf-8"?>
-<p:sld xmlns:a="http://schemas.openxmlformats.org/drawingml/2006/main" xmlns:r="http://schemas.openxmlformats.org/officeDocument/2006/relationships" xmlns:p="http://schemas.openxmlformats.org/presentationml/2006/main">
-  <p:cSld>
-    <p:spTree>
-      <p:nvGrpSpPr>
-        <p:cNvPr id="1" name="">
-          <a:extLst>
-            <a:ext uri="{FF2B5EF4-FFF2-40B4-BE49-F238E27FC236}">
-              <a16:creationId xmlns:a16="http://schemas.microsoft.com/office/drawing/2014/main" id="{3474BEB7-381A-92B9-858C-B8615447E85D}"/>
-            </a:ext>
-          </a:extLst>
-        </p:cNvPr>
-        <p:cNvGrpSpPr/>
-        <p:nvPr/>
-      </p:nvGrpSpPr>
-      <p:grpSpPr>
-        <a:xfrm>
-          <a:off x="0" y="0"/>
-          <a:ext cx="0" cy="0"/>
-          <a:chOff x="0" y="0"/>
-          <a:chExt cx="0" cy="0"/>
-        </a:xfrm>
-      </p:grpSpPr>
-      <p:sp>
-        <p:nvSpPr>
-          <p:cNvPr id="3" name="Slide Number Placeholder 2">
-            <a:extLst>
-              <a:ext uri="{FF2B5EF4-FFF2-40B4-BE49-F238E27FC236}">
-                <a16:creationId xmlns:a16="http://schemas.microsoft.com/office/drawing/2014/main" id="{BD86F46A-6FBD-2762-42AA-0B99BC9C37CB}"/>
-              </a:ext>
-            </a:extLst>
-          </p:cNvPr>
-          <p:cNvSpPr>
-            <a:spLocks noGrp="1"/>
-          </p:cNvSpPr>
-          <p:nvPr>
-            <p:ph type="sldNum" sz="quarter" idx="11"/>
-          </p:nvPr>
-        </p:nvSpPr>
-        <p:spPr/>
-        <p:txBody>
-          <a:bodyPr/>
-          <a:lstStyle/>
-          <a:p>
-            <a:pPr>
-              <a:defRPr/>
-            </a:pPr>
-            <a:fld id="{231CC523-8BC6-4921-807A-66BD262F34AB}" type="slidenum">
-              <a:rPr lang="en-US" smtClean="0"/>
-              <a:pPr>
-                <a:defRPr/>
-              </a:pPr>
-              <a:t>4</a:t>
-            </a:fld>
-            <a:endParaRPr lang="en-US"/>
-          </a:p>
-        </p:txBody>
-      </p:sp>
-      <p:sp>
-        <p:nvSpPr>
-          <p:cNvPr id="9" name="Title 8">
-            <a:extLst>
-              <a:ext uri="{FF2B5EF4-FFF2-40B4-BE49-F238E27FC236}">
-                <a16:creationId xmlns:a16="http://schemas.microsoft.com/office/drawing/2014/main" id="{7A51E40B-FA75-0448-F479-3F7E6BBF7001}"/>
-              </a:ext>
-            </a:extLst>
-          </p:cNvPr>
-          <p:cNvSpPr>
-            <a:spLocks noGrp="1"/>
-          </p:cNvSpPr>
-          <p:nvPr>
-            <p:ph type="ctrTitle"/>
-          </p:nvPr>
-        </p:nvSpPr>
-        <p:spPr>
-          <a:xfrm>
-            <a:off x="381000" y="126366"/>
-            <a:ext cx="11302999" cy="612648"/>
-          </a:xfrm>
-        </p:spPr>
-        <p:txBody>
-          <a:bodyPr>
-            <a:normAutofit/>
-          </a:bodyPr>
-          <a:lstStyle/>
-          <a:p>
-            <a:r>
-              <a:rPr lang="en-US" dirty="0"/>
-              <a:t>Example 4</a:t>
-            </a:r>
-          </a:p>
-        </p:txBody>
-      </p:sp>
-      <p:sp>
-        <p:nvSpPr>
-          <p:cNvPr id="6" name="TextBox 5">
-            <a:extLst>
-              <a:ext uri="{FF2B5EF4-FFF2-40B4-BE49-F238E27FC236}">
-                <a16:creationId xmlns:a16="http://schemas.microsoft.com/office/drawing/2014/main" id="{84435818-279E-6DB7-25EA-65ED6FAD8590}"/>
-              </a:ext>
-            </a:extLst>
-          </p:cNvPr>
-          <p:cNvSpPr txBox="1"/>
-          <p:nvPr/>
-        </p:nvSpPr>
-        <p:spPr>
-          <a:xfrm>
-            <a:off x="187257" y="1297408"/>
-            <a:ext cx="7341952" cy="286360"/>
-          </a:xfrm>
-          <a:prstGeom prst="rect">
-            <a:avLst/>
-          </a:prstGeom>
-          <a:noFill/>
-        </p:spPr>
-        <p:txBody>
-          <a:bodyPr wrap="square">
-            <a:spAutoFit/>
-          </a:bodyPr>
-          <a:lstStyle/>
-          <a:p>
-            <a:pPr>
-              <a:lnSpc>
-                <a:spcPts val="1425"/>
-              </a:lnSpc>
-              <a:buNone/>
-            </a:pPr>
-            <a:r>
-              <a:rPr lang="en-US" b="0" dirty="0" err="1">
-                <a:solidFill>
-                  <a:srgbClr val="4EC9B0"/>
-                </a:solidFill>
-                <a:effectLst/>
-                <a:latin typeface="Consolas" panose="020B0609020204030204" pitchFamily="49" charset="0"/>
-              </a:rPr>
-              <a:t>MMTOExamples</a:t>
-            </a:r>
-            <a:r>
-              <a:rPr lang="en-US" b="0" dirty="0" err="1">
-                <a:solidFill>
-                  <a:srgbClr val="CCCCCC"/>
-                </a:solidFill>
-                <a:effectLst/>
-                <a:latin typeface="Consolas" panose="020B0609020204030204" pitchFamily="49" charset="0"/>
-              </a:rPr>
-              <a:t>.</a:t>
-            </a:r>
-            <a:r>
-              <a:rPr lang="en-US" b="0" dirty="0" err="1">
-                <a:solidFill>
-                  <a:srgbClr val="4FC1FF"/>
-                </a:solidFill>
-                <a:effectLst/>
-                <a:latin typeface="Consolas" panose="020B0609020204030204" pitchFamily="49" charset="0"/>
-              </a:rPr>
-              <a:t>LBracketTopLoad_Compliance_MassCriticality</a:t>
-            </a:r>
-            <a:endParaRPr lang="en-US" b="0" dirty="0">
-              <a:solidFill>
-                <a:srgbClr val="CCCCCC"/>
-              </a:solidFill>
-              <a:effectLst/>
-              <a:latin typeface="Consolas" panose="020B0609020204030204" pitchFamily="49" charset="0"/>
-            </a:endParaRPr>
-          </a:p>
-        </p:txBody>
-      </p:sp>
-      <p:pic>
-        <p:nvPicPr>
-          <p:cNvPr id="4" name="Picture 3">
-            <a:extLst>
-              <a:ext uri="{FF2B5EF4-FFF2-40B4-BE49-F238E27FC236}">
-                <a16:creationId xmlns:a16="http://schemas.microsoft.com/office/drawing/2014/main" id="{E5F5AA58-2830-EC77-3ED8-CC5BC05DDB3C}"/>
-              </a:ext>
-            </a:extLst>
-          </p:cNvPr>
-          <p:cNvPicPr>
-            <a:picLocks noChangeAspect="1"/>
-          </p:cNvPicPr>
-          <p:nvPr/>
-        </p:nvPicPr>
-        <p:blipFill>
-          <a:blip r:embed="rId2"/>
-          <a:stretch>
-            <a:fillRect/>
-          </a:stretch>
-        </p:blipFill>
-        <p:spPr>
-          <a:xfrm>
-            <a:off x="660579" y="2030511"/>
-            <a:ext cx="3523809" cy="2295238"/>
-          </a:xfrm>
-          <a:prstGeom prst="rect">
-            <a:avLst/>
-          </a:prstGeom>
-        </p:spPr>
-      </p:pic>
-      <p:pic>
-        <p:nvPicPr>
-          <p:cNvPr id="10" name="Picture 9">
-            <a:extLst>
-              <a:ext uri="{FF2B5EF4-FFF2-40B4-BE49-F238E27FC236}">
-                <a16:creationId xmlns:a16="http://schemas.microsoft.com/office/drawing/2014/main" id="{B5DA8A92-6E9E-F394-1AC5-237AAA7F0141}"/>
-              </a:ext>
-            </a:extLst>
-          </p:cNvPr>
-          <p:cNvPicPr>
-            <a:picLocks noChangeAspect="1"/>
-          </p:cNvPicPr>
-          <p:nvPr/>
-        </p:nvPicPr>
-        <p:blipFill>
-          <a:blip r:embed="rId3"/>
-          <a:stretch>
-            <a:fillRect/>
-          </a:stretch>
-        </p:blipFill>
-        <p:spPr>
-          <a:xfrm>
-            <a:off x="660579" y="4772492"/>
-            <a:ext cx="3980952" cy="1066667"/>
-          </a:xfrm>
-          <a:prstGeom prst="rect">
-            <a:avLst/>
-          </a:prstGeom>
-        </p:spPr>
-      </p:pic>
-      <p:pic>
-        <p:nvPicPr>
-          <p:cNvPr id="13" name="Picture 12">
-            <a:extLst>
-              <a:ext uri="{FF2B5EF4-FFF2-40B4-BE49-F238E27FC236}">
-                <a16:creationId xmlns:a16="http://schemas.microsoft.com/office/drawing/2014/main" id="{5B86AE06-3CC8-9464-1860-F21B26CF0614}"/>
-              </a:ext>
-            </a:extLst>
-          </p:cNvPr>
-          <p:cNvPicPr>
-            <a:picLocks noChangeAspect="1"/>
-          </p:cNvPicPr>
-          <p:nvPr/>
-        </p:nvPicPr>
-        <p:blipFill>
-          <a:blip r:embed="rId4"/>
-          <a:stretch>
-            <a:fillRect/>
-          </a:stretch>
-        </p:blipFill>
-        <p:spPr>
-          <a:xfrm>
-            <a:off x="5961623" y="1737765"/>
-            <a:ext cx="5647619" cy="4219048"/>
-          </a:xfrm>
-          <a:prstGeom prst="rect">
-            <a:avLst/>
-          </a:prstGeom>
-        </p:spPr>
-      </p:pic>
-    </p:spTree>
-    <p:extLst>
-      <p:ext uri="{BB962C8B-B14F-4D97-AF65-F5344CB8AC3E}">
-        <p14:creationId xmlns:p14="http://schemas.microsoft.com/office/powerpoint/2010/main" val="2732281813"/>
-      </p:ext>
-    </p:extLst>
-  </p:cSld>
-  <p:clrMapOvr>
-    <a:masterClrMapping/>
-  </p:clrMapOvr>
-</p:sld>
-</file>
-
-<file path=ppt/slides/slide5.xml><?xml version="1.0" encoding="utf-8"?>
-<p:sld xmlns:a="http://schemas.openxmlformats.org/drawingml/2006/main" xmlns:r="http://schemas.openxmlformats.org/officeDocument/2006/relationships" xmlns:p="http://schemas.openxmlformats.org/presentationml/2006/main">
-  <p:cSld>
-    <p:spTree>
-      <p:nvGrpSpPr>
-        <p:cNvPr id="1" name="">
-          <a:extLst>
-            <a:ext uri="{FF2B5EF4-FFF2-40B4-BE49-F238E27FC236}">
-              <a16:creationId xmlns:a16="http://schemas.microsoft.com/office/drawing/2014/main" id="{94B97CFD-C5C6-1271-F679-32510BB95907}"/>
-            </a:ext>
-          </a:extLst>
-        </p:cNvPr>
-        <p:cNvGrpSpPr/>
-        <p:nvPr/>
-      </p:nvGrpSpPr>
-      <p:grpSpPr>
-        <a:xfrm>
-          <a:off x="0" y="0"/>
-          <a:ext cx="0" cy="0"/>
-          <a:chOff x="0" y="0"/>
-          <a:chExt cx="0" cy="0"/>
-        </a:xfrm>
-      </p:grpSpPr>
-      <p:sp>
-        <p:nvSpPr>
-          <p:cNvPr id="3" name="Slide Number Placeholder 2">
-            <a:extLst>
-              <a:ext uri="{FF2B5EF4-FFF2-40B4-BE49-F238E27FC236}">
-                <a16:creationId xmlns:a16="http://schemas.microsoft.com/office/drawing/2014/main" id="{49CE5945-E73B-EA98-079F-91C3A159C393}"/>
-              </a:ext>
-            </a:extLst>
-          </p:cNvPr>
-          <p:cNvSpPr>
-            <a:spLocks noGrp="1"/>
-          </p:cNvSpPr>
-          <p:nvPr>
-            <p:ph type="sldNum" sz="quarter" idx="11"/>
-          </p:nvPr>
-        </p:nvSpPr>
-        <p:spPr/>
-        <p:txBody>
-          <a:bodyPr/>
-          <a:lstStyle/>
-          <a:p>
-            <a:pPr>
-              <a:defRPr/>
-            </a:pPr>
-            <a:fld id="{231CC523-8BC6-4921-807A-66BD262F34AB}" type="slidenum">
-              <a:rPr lang="en-US" smtClean="0"/>
-              <a:pPr>
-                <a:defRPr/>
-              </a:pPr>
-              <a:t>5</a:t>
-            </a:fld>
-            <a:endParaRPr lang="en-US"/>
-          </a:p>
-        </p:txBody>
-      </p:sp>
-      <p:sp>
-        <p:nvSpPr>
-          <p:cNvPr id="9" name="Title 8">
-            <a:extLst>
-              <a:ext uri="{FF2B5EF4-FFF2-40B4-BE49-F238E27FC236}">
-                <a16:creationId xmlns:a16="http://schemas.microsoft.com/office/drawing/2014/main" id="{D1CF4163-1892-01D1-B5F8-6E9E107C8DD6}"/>
-              </a:ext>
-            </a:extLst>
-          </p:cNvPr>
-          <p:cNvSpPr>
-            <a:spLocks noGrp="1"/>
-          </p:cNvSpPr>
-          <p:nvPr>
-            <p:ph type="ctrTitle"/>
-          </p:nvPr>
-        </p:nvSpPr>
-        <p:spPr>
-          <a:xfrm>
-            <a:off x="381000" y="126366"/>
-            <a:ext cx="11302999" cy="612648"/>
-          </a:xfrm>
-        </p:spPr>
-        <p:txBody>
-          <a:bodyPr>
-            <a:normAutofit/>
-          </a:bodyPr>
-          <a:lstStyle/>
-          <a:p>
-            <a:r>
-              <a:rPr lang="en-US" dirty="0"/>
-              <a:t>Example 5</a:t>
-            </a:r>
-          </a:p>
-        </p:txBody>
-      </p:sp>
-      <p:sp>
-        <p:nvSpPr>
-          <p:cNvPr id="5" name="TextBox 4">
-            <a:extLst>
-              <a:ext uri="{FF2B5EF4-FFF2-40B4-BE49-F238E27FC236}">
-                <a16:creationId xmlns:a16="http://schemas.microsoft.com/office/drawing/2014/main" id="{9A59264C-C039-C674-F32B-A0BFFAF6CB08}"/>
-              </a:ext>
-            </a:extLst>
-          </p:cNvPr>
-          <p:cNvSpPr txBox="1"/>
-          <p:nvPr/>
-        </p:nvSpPr>
-        <p:spPr>
-          <a:xfrm>
-            <a:off x="206712" y="1262467"/>
-            <a:ext cx="6094378" cy="286360"/>
-          </a:xfrm>
-          <a:prstGeom prst="rect">
-            <a:avLst/>
-          </a:prstGeom>
-          <a:noFill/>
-        </p:spPr>
-        <p:txBody>
-          <a:bodyPr wrap="square">
-            <a:spAutoFit/>
-          </a:bodyPr>
-          <a:lstStyle/>
-          <a:p>
-            <a:pPr>
-              <a:lnSpc>
-                <a:spcPts val="1425"/>
-              </a:lnSpc>
-              <a:buNone/>
-            </a:pPr>
-            <a:r>
-              <a:rPr lang="en-US" b="0" dirty="0" err="1">
-                <a:solidFill>
-                  <a:srgbClr val="4EC9B0"/>
-                </a:solidFill>
-                <a:effectLst/>
-                <a:latin typeface="Consolas" panose="020B0609020204030204" pitchFamily="49" charset="0"/>
-              </a:rPr>
-              <a:t>MMTOExamples</a:t>
-            </a:r>
-            <a:r>
-              <a:rPr lang="en-US" b="0" dirty="0" err="1">
-                <a:solidFill>
-                  <a:srgbClr val="CCCCCC"/>
-                </a:solidFill>
-                <a:effectLst/>
-                <a:latin typeface="Consolas" panose="020B0609020204030204" pitchFamily="49" charset="0"/>
-              </a:rPr>
-              <a:t>.</a:t>
-            </a:r>
-            <a:r>
-              <a:rPr lang="en-US" b="0" dirty="0" err="1">
-                <a:solidFill>
-                  <a:srgbClr val="4FC1FF"/>
-                </a:solidFill>
-                <a:effectLst/>
-                <a:latin typeface="Consolas" panose="020B0609020204030204" pitchFamily="49" charset="0"/>
-              </a:rPr>
-              <a:t>LBracketTopLoad_Stress_Compliance</a:t>
-            </a:r>
-            <a:endParaRPr lang="en-US" b="0" dirty="0">
-              <a:solidFill>
-                <a:srgbClr val="CCCCCC"/>
-              </a:solidFill>
-              <a:effectLst/>
-              <a:latin typeface="Consolas" panose="020B0609020204030204" pitchFamily="49" charset="0"/>
-            </a:endParaRPr>
-          </a:p>
-        </p:txBody>
-      </p:sp>
-      <p:pic>
-        <p:nvPicPr>
-          <p:cNvPr id="4" name="Picture 3">
-            <a:extLst>
-              <a:ext uri="{FF2B5EF4-FFF2-40B4-BE49-F238E27FC236}">
-                <a16:creationId xmlns:a16="http://schemas.microsoft.com/office/drawing/2014/main" id="{662F36F5-8DA5-AD25-4C0A-50562B827858}"/>
-              </a:ext>
-            </a:extLst>
-          </p:cNvPr>
-          <p:cNvPicPr>
-            <a:picLocks noChangeAspect="1"/>
-          </p:cNvPicPr>
-          <p:nvPr/>
-        </p:nvPicPr>
-        <p:blipFill>
-          <a:blip r:embed="rId2"/>
-          <a:stretch>
-            <a:fillRect/>
-          </a:stretch>
-        </p:blipFill>
-        <p:spPr>
-          <a:xfrm>
-            <a:off x="1198026" y="1934419"/>
-            <a:ext cx="4168966" cy="2741753"/>
-          </a:xfrm>
-          <a:prstGeom prst="rect">
-            <a:avLst/>
-          </a:prstGeom>
-        </p:spPr>
-      </p:pic>
-      <p:pic>
-        <p:nvPicPr>
-          <p:cNvPr id="7" name="Picture 6">
-            <a:extLst>
-              <a:ext uri="{FF2B5EF4-FFF2-40B4-BE49-F238E27FC236}">
-                <a16:creationId xmlns:a16="http://schemas.microsoft.com/office/drawing/2014/main" id="{70325408-D924-2902-FD3D-ABCAA2213D93}"/>
-              </a:ext>
-            </a:extLst>
-          </p:cNvPr>
-          <p:cNvPicPr>
-            <a:picLocks noChangeAspect="1"/>
-          </p:cNvPicPr>
-          <p:nvPr/>
-        </p:nvPicPr>
-        <p:blipFill>
-          <a:blip r:embed="rId3"/>
-          <a:stretch>
-            <a:fillRect/>
-          </a:stretch>
-        </p:blipFill>
-        <p:spPr>
-          <a:xfrm>
-            <a:off x="6301090" y="916055"/>
-            <a:ext cx="5593565" cy="4099915"/>
-          </a:xfrm>
-          <a:prstGeom prst="rect">
-            <a:avLst/>
-          </a:prstGeom>
-        </p:spPr>
-      </p:pic>
-      <p:pic>
-        <p:nvPicPr>
-          <p:cNvPr id="10" name="Picture 9">
-            <a:extLst>
-              <a:ext uri="{FF2B5EF4-FFF2-40B4-BE49-F238E27FC236}">
-                <a16:creationId xmlns:a16="http://schemas.microsoft.com/office/drawing/2014/main" id="{C5EED1B8-7B1E-16E6-B557-3E153A0E7E34}"/>
-              </a:ext>
-            </a:extLst>
-          </p:cNvPr>
-          <p:cNvPicPr>
-            <a:picLocks noChangeAspect="1"/>
-          </p:cNvPicPr>
-          <p:nvPr/>
-        </p:nvPicPr>
-        <p:blipFill>
-          <a:blip r:embed="rId4"/>
-          <a:stretch>
-            <a:fillRect/>
-          </a:stretch>
-        </p:blipFill>
-        <p:spPr>
-          <a:xfrm>
-            <a:off x="895212" y="5340616"/>
-            <a:ext cx="4313294" cy="899238"/>
-          </a:xfrm>
-          <a:prstGeom prst="rect">
-            <a:avLst/>
-          </a:prstGeom>
-        </p:spPr>
-      </p:pic>
-    </p:spTree>
-    <p:extLst>
-      <p:ext uri="{BB962C8B-B14F-4D97-AF65-F5344CB8AC3E}">
-        <p14:creationId xmlns:p14="http://schemas.microsoft.com/office/powerpoint/2010/main" val="3267386641"/>
-      </p:ext>
-    </p:extLst>
-  </p:cSld>
-  <p:clrMapOvr>
-    <a:masterClrMapping/>
-  </p:clrMapOvr>
-</p:sld>
-</file>
-
-<file path=ppt/slides/slide6.xml><?xml version="1.0" encoding="utf-8"?>
-<p:sld xmlns:a="http://schemas.openxmlformats.org/drawingml/2006/main" xmlns:r="http://schemas.openxmlformats.org/officeDocument/2006/relationships" xmlns:p="http://schemas.openxmlformats.org/presentationml/2006/main">
-  <p:cSld>
-    <p:spTree>
-      <p:nvGrpSpPr>
-        <p:cNvPr id="1" name="">
-          <a:extLst>
-            <a:ext uri="{FF2B5EF4-FFF2-40B4-BE49-F238E27FC236}">
-              <a16:creationId xmlns:a16="http://schemas.microsoft.com/office/drawing/2014/main" id="{781AEE13-D697-5547-F668-E880C8B41F77}"/>
-            </a:ext>
-          </a:extLst>
-        </p:cNvPr>
-        <p:cNvGrpSpPr/>
-        <p:nvPr/>
-      </p:nvGrpSpPr>
-      <p:grpSpPr>
-        <a:xfrm>
-          <a:off x="0" y="0"/>
-          <a:ext cx="0" cy="0"/>
-          <a:chOff x="0" y="0"/>
-          <a:chExt cx="0" cy="0"/>
-        </a:xfrm>
-      </p:grpSpPr>
-      <p:sp>
-        <p:nvSpPr>
-          <p:cNvPr id="3" name="Slide Number Placeholder 2">
-            <a:extLst>
-              <a:ext uri="{FF2B5EF4-FFF2-40B4-BE49-F238E27FC236}">
-                <a16:creationId xmlns:a16="http://schemas.microsoft.com/office/drawing/2014/main" id="{F9C0A3E4-D999-5BEC-A054-DDC27D3F9D81}"/>
-              </a:ext>
-            </a:extLst>
-          </p:cNvPr>
-          <p:cNvSpPr>
-            <a:spLocks noGrp="1"/>
-          </p:cNvSpPr>
-          <p:nvPr>
-            <p:ph type="sldNum" sz="quarter" idx="11"/>
-          </p:nvPr>
-        </p:nvSpPr>
-        <p:spPr/>
-        <p:txBody>
-          <a:bodyPr/>
-          <a:lstStyle/>
-          <a:p>
-            <a:pPr>
-              <a:defRPr/>
-            </a:pPr>
-            <a:fld id="{231CC523-8BC6-4921-807A-66BD262F34AB}" type="slidenum">
-              <a:rPr lang="en-US" smtClean="0"/>
-              <a:pPr>
-                <a:defRPr/>
-              </a:pPr>
-              <a:t>6</a:t>
-            </a:fld>
-            <a:endParaRPr lang="en-US"/>
-          </a:p>
-        </p:txBody>
-      </p:sp>
-      <p:sp>
-        <p:nvSpPr>
-          <p:cNvPr id="9" name="Title 8">
-            <a:extLst>
-              <a:ext uri="{FF2B5EF4-FFF2-40B4-BE49-F238E27FC236}">
-                <a16:creationId xmlns:a16="http://schemas.microsoft.com/office/drawing/2014/main" id="{63D2F44B-0386-1B22-32E8-0A99D83B8089}"/>
-              </a:ext>
-            </a:extLst>
-          </p:cNvPr>
-          <p:cNvSpPr>
-            <a:spLocks noGrp="1"/>
-          </p:cNvSpPr>
-          <p:nvPr>
-            <p:ph type="ctrTitle"/>
-          </p:nvPr>
-        </p:nvSpPr>
-        <p:spPr>
-          <a:xfrm>
-            <a:off x="381000" y="126366"/>
-            <a:ext cx="11302999" cy="612648"/>
-          </a:xfrm>
-        </p:spPr>
-        <p:txBody>
-          <a:bodyPr>
-            <a:normAutofit/>
-          </a:bodyPr>
-          <a:lstStyle/>
-          <a:p>
-            <a:r>
-              <a:rPr lang="en-US" dirty="0"/>
-              <a:t>Example 6</a:t>
-            </a:r>
-          </a:p>
-        </p:txBody>
-      </p:sp>
-      <p:sp>
-        <p:nvSpPr>
-          <p:cNvPr id="4" name="TextBox 3">
-            <a:extLst>
-              <a:ext uri="{FF2B5EF4-FFF2-40B4-BE49-F238E27FC236}">
-                <a16:creationId xmlns:a16="http://schemas.microsoft.com/office/drawing/2014/main" id="{6C05F39A-4D66-E48D-0C00-9AA82410DAFE}"/>
-              </a:ext>
-            </a:extLst>
-          </p:cNvPr>
-          <p:cNvSpPr txBox="1"/>
-          <p:nvPr/>
-        </p:nvSpPr>
-        <p:spPr>
-          <a:xfrm>
-            <a:off x="138618" y="1211610"/>
-            <a:ext cx="8636810" cy="286360"/>
-          </a:xfrm>
-          <a:prstGeom prst="rect">
-            <a:avLst/>
-          </a:prstGeom>
-          <a:noFill/>
-        </p:spPr>
-        <p:txBody>
-          <a:bodyPr wrap="square">
-            <a:spAutoFit/>
-          </a:bodyPr>
-          <a:lstStyle/>
-          <a:p>
-            <a:pPr>
-              <a:lnSpc>
-                <a:spcPts val="1425"/>
-              </a:lnSpc>
-              <a:buNone/>
-            </a:pPr>
-            <a:r>
-              <a:rPr lang="en-US" b="0" dirty="0" err="1">
-                <a:solidFill>
-                  <a:srgbClr val="4EC9B0"/>
-                </a:solidFill>
-                <a:effectLst/>
-                <a:latin typeface="Consolas" panose="020B0609020204030204" pitchFamily="49" charset="0"/>
-              </a:rPr>
-              <a:t>MMTOExamples</a:t>
-            </a:r>
-            <a:r>
-              <a:rPr lang="en-US" b="0" dirty="0" err="1">
-                <a:solidFill>
-                  <a:srgbClr val="CCCCCC"/>
-                </a:solidFill>
-                <a:effectLst/>
-                <a:latin typeface="Consolas" panose="020B0609020204030204" pitchFamily="49" charset="0"/>
-              </a:rPr>
-              <a:t>.</a:t>
-            </a:r>
-            <a:r>
-              <a:rPr lang="en-US" b="0" dirty="0" err="1">
-                <a:solidFill>
-                  <a:srgbClr val="4FC1FF"/>
-                </a:solidFill>
-                <a:effectLst/>
-                <a:latin typeface="Consolas" panose="020B0609020204030204" pitchFamily="49" charset="0"/>
-              </a:rPr>
-              <a:t>LBracketTopLoad_Mass_StressSafetyFactorCompliance</a:t>
-            </a:r>
-            <a:endParaRPr lang="en-US" b="0" dirty="0">
-              <a:solidFill>
-                <a:srgbClr val="CCCCCC"/>
-              </a:solidFill>
-              <a:effectLst/>
-              <a:latin typeface="Consolas" panose="020B0609020204030204" pitchFamily="49" charset="0"/>
-            </a:endParaRPr>
-          </a:p>
-        </p:txBody>
-      </p:sp>
-    </p:spTree>
-    <p:extLst>
-      <p:ext uri="{BB962C8B-B14F-4D97-AF65-F5344CB8AC3E}">
-        <p14:creationId xmlns:p14="http://schemas.microsoft.com/office/powerpoint/2010/main" val="2201040890"/>
-      </p:ext>
-    </p:extLst>
-  </p:cSld>
-  <p:clrMapOvr>
-    <a:masterClrMapping/>
-  </p:clrMapOvr>
-</p:sld>
-</file>
-
-<file path=ppt/slides/slide7.xml><?xml version="1.0" encoding="utf-8"?>
-<p:sld xmlns:a="http://schemas.openxmlformats.org/drawingml/2006/main" xmlns:r="http://schemas.openxmlformats.org/officeDocument/2006/relationships" xmlns:p="http://schemas.openxmlformats.org/presentationml/2006/main">
-  <p:cSld>
-    <p:spTree>
-      <p:nvGrpSpPr>
-        <p:cNvPr id="1" name="">
-          <a:extLst>
-            <a:ext uri="{FF2B5EF4-FFF2-40B4-BE49-F238E27FC236}">
-              <a16:creationId xmlns:a16="http://schemas.microsoft.com/office/drawing/2014/main" id="{8CA9616D-FB0C-7757-E05B-DDA8A2FA76CE}"/>
-            </a:ext>
-          </a:extLst>
-        </p:cNvPr>
-        <p:cNvGrpSpPr/>
-        <p:nvPr/>
-      </p:nvGrpSpPr>
-      <p:grpSpPr>
-        <a:xfrm>
-          <a:off x="0" y="0"/>
-          <a:ext cx="0" cy="0"/>
-          <a:chOff x="0" y="0"/>
-          <a:chExt cx="0" cy="0"/>
-        </a:xfrm>
-      </p:grpSpPr>
-      <p:sp>
-        <p:nvSpPr>
-          <p:cNvPr id="3" name="Slide Number Placeholder 2">
-            <a:extLst>
-              <a:ext uri="{FF2B5EF4-FFF2-40B4-BE49-F238E27FC236}">
-                <a16:creationId xmlns:a16="http://schemas.microsoft.com/office/drawing/2014/main" id="{4F2D889A-5827-F49F-A506-1FBE086D828E}"/>
-              </a:ext>
-            </a:extLst>
-          </p:cNvPr>
-          <p:cNvSpPr>
-            <a:spLocks noGrp="1"/>
-          </p:cNvSpPr>
-          <p:nvPr>
-            <p:ph type="sldNum" sz="quarter" idx="11"/>
-          </p:nvPr>
-        </p:nvSpPr>
-        <p:spPr/>
-        <p:txBody>
-          <a:bodyPr/>
-          <a:lstStyle/>
-          <a:p>
-            <a:pPr>
-              <a:defRPr/>
-            </a:pPr>
-            <a:fld id="{231CC523-8BC6-4921-807A-66BD262F34AB}" type="slidenum">
-              <a:rPr lang="en-US" smtClean="0"/>
-              <a:pPr>
-                <a:defRPr/>
-              </a:pPr>
-              <a:t>7</a:t>
-            </a:fld>
-            <a:endParaRPr lang="en-US"/>
-          </a:p>
-        </p:txBody>
-      </p:sp>
-      <p:sp>
-        <p:nvSpPr>
-          <p:cNvPr id="9" name="Title 8">
-            <a:extLst>
-              <a:ext uri="{FF2B5EF4-FFF2-40B4-BE49-F238E27FC236}">
-                <a16:creationId xmlns:a16="http://schemas.microsoft.com/office/drawing/2014/main" id="{DA164B79-3C92-2B55-8050-A9B3707C5FF2}"/>
-              </a:ext>
-            </a:extLst>
-          </p:cNvPr>
-          <p:cNvSpPr>
-            <a:spLocks noGrp="1"/>
-          </p:cNvSpPr>
-          <p:nvPr>
-            <p:ph type="ctrTitle"/>
-          </p:nvPr>
-        </p:nvSpPr>
-        <p:spPr>
-          <a:xfrm>
-            <a:off x="381000" y="126366"/>
-            <a:ext cx="11302999" cy="612648"/>
-          </a:xfrm>
-        </p:spPr>
-        <p:txBody>
-          <a:bodyPr>
-            <a:normAutofit/>
-          </a:bodyPr>
-          <a:lstStyle/>
-          <a:p>
-            <a:r>
-              <a:rPr lang="en-US" dirty="0"/>
-              <a:t>Example 7</a:t>
-            </a:r>
-          </a:p>
-        </p:txBody>
-      </p:sp>
-      <p:sp>
-        <p:nvSpPr>
-          <p:cNvPr id="4" name="TextBox 3">
-            <a:extLst>
-              <a:ext uri="{FF2B5EF4-FFF2-40B4-BE49-F238E27FC236}">
-                <a16:creationId xmlns:a16="http://schemas.microsoft.com/office/drawing/2014/main" id="{05E4EF69-5BB0-A660-FE04-AEB90328996E}"/>
-              </a:ext>
-            </a:extLst>
-          </p:cNvPr>
-          <p:cNvSpPr txBox="1"/>
-          <p:nvPr/>
-        </p:nvSpPr>
-        <p:spPr>
-          <a:xfrm>
-            <a:off x="87764" y="1107933"/>
-            <a:ext cx="6094378" cy="286360"/>
-          </a:xfrm>
-          <a:prstGeom prst="rect">
-            <a:avLst/>
-          </a:prstGeom>
-          <a:noFill/>
-        </p:spPr>
-        <p:txBody>
-          <a:bodyPr wrap="square">
-            <a:spAutoFit/>
-          </a:bodyPr>
-          <a:lstStyle/>
-          <a:p>
-            <a:pPr>
-              <a:lnSpc>
-                <a:spcPts val="1425"/>
-              </a:lnSpc>
-              <a:buNone/>
-            </a:pPr>
-            <a:r>
-              <a:rPr lang="en-US" b="0" dirty="0" err="1">
-                <a:solidFill>
-                  <a:srgbClr val="4EC9B0"/>
-                </a:solidFill>
-                <a:effectLst/>
-                <a:latin typeface="Consolas" panose="020B0609020204030204" pitchFamily="49" charset="0"/>
-              </a:rPr>
-              <a:t>MMTOExamples</a:t>
-            </a:r>
-            <a:r>
-              <a:rPr lang="en-US" b="0" dirty="0" err="1">
-                <a:solidFill>
-                  <a:srgbClr val="CCCCCC"/>
-                </a:solidFill>
-                <a:effectLst/>
-                <a:latin typeface="Consolas" panose="020B0609020204030204" pitchFamily="49" charset="0"/>
-              </a:rPr>
-              <a:t>.</a:t>
-            </a:r>
-            <a:r>
-              <a:rPr lang="en-US" b="0" dirty="0" err="1">
-                <a:solidFill>
-                  <a:srgbClr val="4FC1FF"/>
-                </a:solidFill>
-                <a:effectLst/>
-                <a:latin typeface="Consolas" panose="020B0609020204030204" pitchFamily="49" charset="0"/>
-              </a:rPr>
-              <a:t>BliskSection_Compliance_MassCost</a:t>
-            </a:r>
-            <a:endParaRPr lang="en-US" b="0" dirty="0">
-              <a:solidFill>
-                <a:srgbClr val="CCCCCC"/>
-              </a:solidFill>
-              <a:effectLst/>
-              <a:latin typeface="Consolas" panose="020B0609020204030204" pitchFamily="49" charset="0"/>
-            </a:endParaRPr>
-          </a:p>
-        </p:txBody>
-      </p:sp>
-      <p:pic>
-        <p:nvPicPr>
-          <p:cNvPr id="5" name="Picture 4">
-            <a:extLst>
-              <a:ext uri="{FF2B5EF4-FFF2-40B4-BE49-F238E27FC236}">
-                <a16:creationId xmlns:a16="http://schemas.microsoft.com/office/drawing/2014/main" id="{9DD676ED-6E14-68CA-546A-0944F6FC8161}"/>
-              </a:ext>
-            </a:extLst>
-          </p:cNvPr>
-          <p:cNvPicPr>
-            <a:picLocks noChangeAspect="1"/>
-          </p:cNvPicPr>
-          <p:nvPr/>
-        </p:nvPicPr>
-        <p:blipFill>
-          <a:blip r:embed="rId2"/>
-          <a:stretch>
-            <a:fillRect/>
-          </a:stretch>
-        </p:blipFill>
-        <p:spPr>
-          <a:xfrm>
-            <a:off x="784930" y="1535373"/>
-            <a:ext cx="3955123" cy="2591025"/>
-          </a:xfrm>
-          <a:prstGeom prst="rect">
-            <a:avLst/>
-          </a:prstGeom>
-        </p:spPr>
-      </p:pic>
-      <p:pic>
-        <p:nvPicPr>
-          <p:cNvPr id="8" name="Picture 7">
-            <a:extLst>
-              <a:ext uri="{FF2B5EF4-FFF2-40B4-BE49-F238E27FC236}">
-                <a16:creationId xmlns:a16="http://schemas.microsoft.com/office/drawing/2014/main" id="{781D96A8-2486-4A62-4667-CA433D52955A}"/>
-              </a:ext>
-            </a:extLst>
-          </p:cNvPr>
-          <p:cNvPicPr>
-            <a:picLocks noChangeAspect="1"/>
-          </p:cNvPicPr>
-          <p:nvPr/>
-        </p:nvPicPr>
-        <p:blipFill>
-          <a:blip r:embed="rId3"/>
-          <a:stretch>
-            <a:fillRect/>
-          </a:stretch>
-        </p:blipFill>
-        <p:spPr>
-          <a:xfrm>
-            <a:off x="5930400" y="1394293"/>
-            <a:ext cx="5753599" cy="4183743"/>
-          </a:xfrm>
-          <a:prstGeom prst="rect">
-            <a:avLst/>
-          </a:prstGeom>
-        </p:spPr>
-      </p:pic>
-      <p:pic>
-        <p:nvPicPr>
-          <p:cNvPr id="13" name="Picture 12">
-            <a:extLst>
-              <a:ext uri="{FF2B5EF4-FFF2-40B4-BE49-F238E27FC236}">
-                <a16:creationId xmlns:a16="http://schemas.microsoft.com/office/drawing/2014/main" id="{00AA5BB2-E0A4-97C1-C986-3DF2FF5B4AD1}"/>
-              </a:ext>
-            </a:extLst>
-          </p:cNvPr>
-          <p:cNvPicPr>
-            <a:picLocks noChangeAspect="1"/>
-          </p:cNvPicPr>
-          <p:nvPr/>
-        </p:nvPicPr>
-        <p:blipFill>
-          <a:blip r:embed="rId4"/>
-          <a:stretch>
-            <a:fillRect/>
-          </a:stretch>
-        </p:blipFill>
-        <p:spPr>
-          <a:xfrm>
-            <a:off x="381000" y="4657968"/>
-            <a:ext cx="3741744" cy="1036410"/>
-          </a:xfrm>
-          <a:prstGeom prst="rect">
-            <a:avLst/>
-          </a:prstGeom>
-        </p:spPr>
-      </p:pic>
-    </p:spTree>
-    <p:extLst>
-      <p:ext uri="{BB962C8B-B14F-4D97-AF65-F5344CB8AC3E}">
-        <p14:creationId xmlns:p14="http://schemas.microsoft.com/office/powerpoint/2010/main" val="1806613402"/>
-      </p:ext>
-    </p:extLst>
-  </p:cSld>
-  <p:clrMapOvr>
-    <a:masterClrMapping/>
-  </p:clrMapOvr>
-</p:sld>
-</file>
-
-<file path=ppt/slides/slide8.xml><?xml version="1.0" encoding="utf-8"?>
-<p:sld xmlns:a="http://schemas.openxmlformats.org/drawingml/2006/main" xmlns:r="http://schemas.openxmlformats.org/officeDocument/2006/relationships" xmlns:p="http://schemas.openxmlformats.org/presentationml/2006/main">
-  <p:cSld>
-    <p:spTree>
-      <p:nvGrpSpPr>
-        <p:cNvPr id="1" name="">
-          <a:extLst>
-            <a:ext uri="{FF2B5EF4-FFF2-40B4-BE49-F238E27FC236}">
-              <a16:creationId xmlns:a16="http://schemas.microsoft.com/office/drawing/2014/main" id="{FAA96C86-7201-800C-271C-8A189437DE57}"/>
-            </a:ext>
-          </a:extLst>
-        </p:cNvPr>
-        <p:cNvGrpSpPr/>
-        <p:nvPr/>
-      </p:nvGrpSpPr>
-      <p:grpSpPr>
-        <a:xfrm>
-          <a:off x="0" y="0"/>
-          <a:ext cx="0" cy="0"/>
-          <a:chOff x="0" y="0"/>
-          <a:chExt cx="0" cy="0"/>
-        </a:xfrm>
-      </p:grpSpPr>
-      <p:sp>
-        <p:nvSpPr>
-          <p:cNvPr id="3" name="Slide Number Placeholder 2">
-            <a:extLst>
-              <a:ext uri="{FF2B5EF4-FFF2-40B4-BE49-F238E27FC236}">
-                <a16:creationId xmlns:a16="http://schemas.microsoft.com/office/drawing/2014/main" id="{D24706F3-601E-C0E4-6226-2CED79E6DA50}"/>
-              </a:ext>
-            </a:extLst>
-          </p:cNvPr>
-          <p:cNvSpPr>
-            <a:spLocks noGrp="1"/>
-          </p:cNvSpPr>
-          <p:nvPr>
-            <p:ph type="sldNum" sz="quarter" idx="11"/>
-          </p:nvPr>
-        </p:nvSpPr>
-        <p:spPr/>
-        <p:txBody>
-          <a:bodyPr/>
-          <a:lstStyle/>
-          <a:p>
-            <a:pPr>
-              <a:defRPr/>
-            </a:pPr>
-            <a:fld id="{231CC523-8BC6-4921-807A-66BD262F34AB}" type="slidenum">
-              <a:rPr lang="en-US" smtClean="0"/>
-              <a:pPr>
-                <a:defRPr/>
-              </a:pPr>
-              <a:t>8</a:t>
-            </a:fld>
-            <a:endParaRPr lang="en-US"/>
-          </a:p>
-        </p:txBody>
-      </p:sp>
-      <p:sp>
-        <p:nvSpPr>
-          <p:cNvPr id="9" name="Title 8">
-            <a:extLst>
-              <a:ext uri="{FF2B5EF4-FFF2-40B4-BE49-F238E27FC236}">
-                <a16:creationId xmlns:a16="http://schemas.microsoft.com/office/drawing/2014/main" id="{238CB866-BFB6-66DD-2803-70AD17CBF5E5}"/>
-              </a:ext>
-            </a:extLst>
-          </p:cNvPr>
-          <p:cNvSpPr>
-            <a:spLocks noGrp="1"/>
-          </p:cNvSpPr>
-          <p:nvPr>
-            <p:ph type="ctrTitle"/>
-          </p:nvPr>
-        </p:nvSpPr>
-        <p:spPr>
-          <a:xfrm>
-            <a:off x="381000" y="126366"/>
-            <a:ext cx="11302999" cy="612648"/>
-          </a:xfrm>
-        </p:spPr>
-        <p:txBody>
-          <a:bodyPr>
-            <a:normAutofit/>
-          </a:bodyPr>
-          <a:lstStyle/>
-          <a:p>
-            <a:r>
-              <a:rPr lang="en-US" dirty="0"/>
-              <a:t>Example 8</a:t>
-            </a:r>
-          </a:p>
-        </p:txBody>
-      </p:sp>
-      <p:pic>
-        <p:nvPicPr>
-          <p:cNvPr id="4" name="Picture 3">
-            <a:extLst>
-              <a:ext uri="{FF2B5EF4-FFF2-40B4-BE49-F238E27FC236}">
-                <a16:creationId xmlns:a16="http://schemas.microsoft.com/office/drawing/2014/main" id="{D312A068-B35E-CC70-14FD-C2F3E2EE5D2B}"/>
-              </a:ext>
-            </a:extLst>
-          </p:cNvPr>
-          <p:cNvPicPr>
-            <a:picLocks noChangeAspect="1"/>
-          </p:cNvPicPr>
-          <p:nvPr/>
-        </p:nvPicPr>
-        <p:blipFill>
-          <a:blip r:embed="rId2"/>
-          <a:stretch>
-            <a:fillRect/>
-          </a:stretch>
-        </p:blipFill>
-        <p:spPr>
-          <a:xfrm>
-            <a:off x="381000" y="1833695"/>
-            <a:ext cx="4138019" cy="2773920"/>
-          </a:xfrm>
-          <a:prstGeom prst="rect">
-            <a:avLst/>
-          </a:prstGeom>
-        </p:spPr>
-      </p:pic>
-      <p:pic>
-        <p:nvPicPr>
-          <p:cNvPr id="7" name="Picture 6">
-            <a:extLst>
-              <a:ext uri="{FF2B5EF4-FFF2-40B4-BE49-F238E27FC236}">
-                <a16:creationId xmlns:a16="http://schemas.microsoft.com/office/drawing/2014/main" id="{C115B7ED-B570-AD1E-456D-22C29485C908}"/>
-              </a:ext>
-            </a:extLst>
-          </p:cNvPr>
-          <p:cNvPicPr>
-            <a:picLocks noChangeAspect="1"/>
-          </p:cNvPicPr>
-          <p:nvPr/>
-        </p:nvPicPr>
-        <p:blipFill>
-          <a:blip r:embed="rId3"/>
-          <a:stretch>
-            <a:fillRect/>
-          </a:stretch>
-        </p:blipFill>
-        <p:spPr>
-          <a:xfrm>
-            <a:off x="525971" y="5068116"/>
-            <a:ext cx="4496190" cy="1059272"/>
-          </a:xfrm>
-          <a:prstGeom prst="rect">
-            <a:avLst/>
-          </a:prstGeom>
-        </p:spPr>
-      </p:pic>
-      <p:pic>
-        <p:nvPicPr>
-          <p:cNvPr id="10" name="Picture 9">
-            <a:extLst>
-              <a:ext uri="{FF2B5EF4-FFF2-40B4-BE49-F238E27FC236}">
-                <a16:creationId xmlns:a16="http://schemas.microsoft.com/office/drawing/2014/main" id="{7436DF42-A97A-929F-8C65-387CE8D9D82F}"/>
-              </a:ext>
-            </a:extLst>
-          </p:cNvPr>
-          <p:cNvPicPr>
-            <a:picLocks noChangeAspect="1"/>
-          </p:cNvPicPr>
-          <p:nvPr/>
-        </p:nvPicPr>
-        <p:blipFill>
-          <a:blip r:embed="rId4"/>
-          <a:stretch>
-            <a:fillRect/>
-          </a:stretch>
-        </p:blipFill>
-        <p:spPr>
-          <a:xfrm>
-            <a:off x="5930400" y="1660788"/>
-            <a:ext cx="5753599" cy="4115157"/>
-          </a:xfrm>
-          <a:prstGeom prst="rect">
-            <a:avLst/>
-          </a:prstGeom>
-        </p:spPr>
-      </p:pic>
-      <p:sp>
-        <p:nvSpPr>
-          <p:cNvPr id="6" name="TextBox 5">
-            <a:extLst>
-              <a:ext uri="{FF2B5EF4-FFF2-40B4-BE49-F238E27FC236}">
-                <a16:creationId xmlns:a16="http://schemas.microsoft.com/office/drawing/2014/main" id="{A2D0B6FA-25B9-761F-32B1-9C0DF31E0509}"/>
-              </a:ext>
-            </a:extLst>
-          </p:cNvPr>
-          <p:cNvSpPr txBox="1"/>
-          <p:nvPr/>
-        </p:nvSpPr>
-        <p:spPr>
-          <a:xfrm>
-            <a:off x="380999" y="1075848"/>
-            <a:ext cx="7837025" cy="267124"/>
-          </a:xfrm>
-          <a:prstGeom prst="rect">
-            <a:avLst/>
-          </a:prstGeom>
-          <a:noFill/>
-        </p:spPr>
-        <p:txBody>
-          <a:bodyPr wrap="square">
-            <a:spAutoFit/>
-          </a:bodyPr>
-          <a:lstStyle/>
-          <a:p>
-            <a:pPr>
-              <a:lnSpc>
-                <a:spcPts val="1200"/>
-              </a:lnSpc>
-              <a:buNone/>
-            </a:pPr>
-            <a:r>
-              <a:rPr lang="en-US" b="0" dirty="0" err="1">
-                <a:solidFill>
-                  <a:srgbClr val="4EC9B0"/>
-                </a:solidFill>
-                <a:effectLst/>
-                <a:latin typeface="Consolas" panose="020B0609020204030204" pitchFamily="49" charset="0"/>
-              </a:rPr>
-              <a:t>MMTOExamples</a:t>
-            </a:r>
-            <a:r>
-              <a:rPr lang="en-US" b="0" dirty="0" err="1">
-                <a:solidFill>
-                  <a:srgbClr val="CCCCCC"/>
-                </a:solidFill>
-                <a:effectLst/>
-                <a:latin typeface="Consolas" panose="020B0609020204030204" pitchFamily="49" charset="0"/>
-              </a:rPr>
-              <a:t>.</a:t>
-            </a:r>
-            <a:r>
-              <a:rPr lang="en-US" b="0" dirty="0" err="1">
-                <a:solidFill>
-                  <a:srgbClr val="4FC1FF"/>
-                </a:solidFill>
-                <a:effectLst/>
-                <a:latin typeface="Consolas" panose="020B0609020204030204" pitchFamily="49" charset="0"/>
-              </a:rPr>
-              <a:t>BliskSection_Compliance_MassCriticality</a:t>
-            </a:r>
-            <a:endParaRPr lang="en-US" b="0" dirty="0">
-              <a:solidFill>
-                <a:srgbClr val="CCCCCC"/>
-              </a:solidFill>
-              <a:effectLst/>
-              <a:latin typeface="Consolas" panose="020B0609020204030204" pitchFamily="49" charset="0"/>
-            </a:endParaRPr>
-          </a:p>
-        </p:txBody>
-      </p:sp>
-    </p:spTree>
-    <p:extLst>
-      <p:ext uri="{BB962C8B-B14F-4D97-AF65-F5344CB8AC3E}">
-        <p14:creationId xmlns:p14="http://schemas.microsoft.com/office/powerpoint/2010/main" val="2687041123"/>
-      </p:ext>
-    </p:extLst>
-  </p:cSld>
-  <p:clrMapOvr>
-    <a:masterClrMapping/>
-  </p:clrMapOvr>
-</p:sld>
-</file>
-
-<file path=ppt/slides/slide9.xml><?xml version="1.0" encoding="utf-8"?>
-<p:sld xmlns:a="http://schemas.openxmlformats.org/drawingml/2006/main" xmlns:r="http://schemas.openxmlformats.org/officeDocument/2006/relationships" xmlns:p="http://schemas.openxmlformats.org/presentationml/2006/main">
-  <p:cSld>
-    <p:spTree>
-      <p:nvGrpSpPr>
-        <p:cNvPr id="1" name="">
-          <a:extLst>
-            <a:ext uri="{FF2B5EF4-FFF2-40B4-BE49-F238E27FC236}">
-              <a16:creationId xmlns:a16="http://schemas.microsoft.com/office/drawing/2014/main" id="{7E6F1A8C-814F-7C47-61A6-3EA5E2054511}"/>
-            </a:ext>
-          </a:extLst>
-        </p:cNvPr>
-        <p:cNvGrpSpPr/>
-        <p:nvPr/>
-      </p:nvGrpSpPr>
-      <p:grpSpPr>
-        <a:xfrm>
-          <a:off x="0" y="0"/>
-          <a:ext cx="0" cy="0"/>
-          <a:chOff x="0" y="0"/>
-          <a:chExt cx="0" cy="0"/>
-        </a:xfrm>
-      </p:grpSpPr>
-      <p:sp>
-        <p:nvSpPr>
-          <p:cNvPr id="3" name="Slide Number Placeholder 2">
-            <a:extLst>
-              <a:ext uri="{FF2B5EF4-FFF2-40B4-BE49-F238E27FC236}">
-                <a16:creationId xmlns:a16="http://schemas.microsoft.com/office/drawing/2014/main" id="{45F96852-22AA-5E5B-2629-375771764254}"/>
-              </a:ext>
-            </a:extLst>
-          </p:cNvPr>
-          <p:cNvSpPr>
-            <a:spLocks noGrp="1"/>
-          </p:cNvSpPr>
-          <p:nvPr>
-            <p:ph type="sldNum" sz="quarter" idx="11"/>
-          </p:nvPr>
-        </p:nvSpPr>
-        <p:spPr/>
-        <p:txBody>
-          <a:bodyPr/>
-          <a:lstStyle/>
-          <a:p>
-            <a:pPr>
-              <a:defRPr/>
-            </a:pPr>
-            <a:fld id="{231CC523-8BC6-4921-807A-66BD262F34AB}" type="slidenum">
-              <a:rPr lang="en-US" smtClean="0"/>
-              <a:pPr>
-                <a:defRPr/>
-              </a:pPr>
-              <a:t>9</a:t>
-            </a:fld>
-            <a:endParaRPr lang="en-US"/>
-          </a:p>
-        </p:txBody>
-      </p:sp>
-      <p:sp>
-        <p:nvSpPr>
-          <p:cNvPr id="9" name="Title 8">
-            <a:extLst>
-              <a:ext uri="{FF2B5EF4-FFF2-40B4-BE49-F238E27FC236}">
-                <a16:creationId xmlns:a16="http://schemas.microsoft.com/office/drawing/2014/main" id="{201E4D27-C554-A0B0-BD84-A666D5EDB116}"/>
-              </a:ext>
-            </a:extLst>
-          </p:cNvPr>
-          <p:cNvSpPr>
-            <a:spLocks noGrp="1"/>
-          </p:cNvSpPr>
-          <p:nvPr>
-            <p:ph type="ctrTitle"/>
-          </p:nvPr>
-        </p:nvSpPr>
-        <p:spPr>
-          <a:xfrm>
-            <a:off x="381000" y="126366"/>
-            <a:ext cx="11302999" cy="612648"/>
-          </a:xfrm>
-        </p:spPr>
-        <p:txBody>
-          <a:bodyPr>
-            <a:normAutofit/>
-          </a:bodyPr>
-          <a:lstStyle/>
-          <a:p>
-            <a:r>
-              <a:rPr lang="en-US" dirty="0"/>
-              <a:t>Example 10</a:t>
-            </a:r>
-          </a:p>
-        </p:txBody>
-      </p:sp>
-      <p:sp>
-        <p:nvSpPr>
-          <p:cNvPr id="11" name="TextBox 10">
-            <a:extLst>
-              <a:ext uri="{FF2B5EF4-FFF2-40B4-BE49-F238E27FC236}">
-                <a16:creationId xmlns:a16="http://schemas.microsoft.com/office/drawing/2014/main" id="{823E5D6D-1EA0-15B1-F54B-BE0CBCB90C82}"/>
-              </a:ext>
-            </a:extLst>
-          </p:cNvPr>
-          <p:cNvSpPr txBox="1"/>
-          <p:nvPr/>
-        </p:nvSpPr>
-        <p:spPr>
-          <a:xfrm>
-            <a:off x="222812" y="1311564"/>
-            <a:ext cx="6953491" cy="267124"/>
-          </a:xfrm>
-          <a:prstGeom prst="rect">
-            <a:avLst/>
-          </a:prstGeom>
-          <a:noFill/>
-        </p:spPr>
-        <p:txBody>
-          <a:bodyPr wrap="square">
-            <a:spAutoFit/>
-          </a:bodyPr>
-          <a:lstStyle/>
-          <a:p>
-            <a:pPr>
-              <a:lnSpc>
-                <a:spcPts val="1200"/>
-              </a:lnSpc>
-              <a:buNone/>
-            </a:pPr>
-            <a:r>
-              <a:rPr lang="en-US" b="0" dirty="0" err="1">
-                <a:solidFill>
-                  <a:srgbClr val="4EC9B0"/>
-                </a:solidFill>
-                <a:effectLst/>
-                <a:latin typeface="Consolas" panose="020B0609020204030204" pitchFamily="49" charset="0"/>
-              </a:rPr>
-              <a:t>MMTOExamples</a:t>
-            </a:r>
-            <a:r>
-              <a:rPr lang="en-US" b="0" dirty="0" err="1">
-                <a:solidFill>
-                  <a:srgbClr val="CCCCCC"/>
-                </a:solidFill>
-                <a:effectLst/>
-                <a:latin typeface="Consolas" panose="020B0609020204030204" pitchFamily="49" charset="0"/>
-              </a:rPr>
-              <a:t>.</a:t>
-            </a:r>
-            <a:r>
-              <a:rPr lang="en-US" b="0" dirty="0" err="1">
-                <a:solidFill>
-                  <a:srgbClr val="4FC1FF"/>
-                </a:solidFill>
-                <a:effectLst/>
-                <a:latin typeface="Consolas" panose="020B0609020204030204" pitchFamily="49" charset="0"/>
-              </a:rPr>
-              <a:t>BliskSection_Mass_StressSFCriticality</a:t>
-            </a:r>
-            <a:endParaRPr lang="en-US" b="0" dirty="0">
-              <a:solidFill>
-                <a:srgbClr val="CCCCCC"/>
-              </a:solidFill>
-              <a:effectLst/>
-              <a:latin typeface="Consolas" panose="020B0609020204030204" pitchFamily="49" charset="0"/>
-            </a:endParaRPr>
-          </a:p>
-        </p:txBody>
-      </p:sp>
-    </p:spTree>
-    <p:extLst>
-      <p:ext uri="{BB962C8B-B14F-4D97-AF65-F5344CB8AC3E}">
-        <p14:creationId xmlns:p14="http://schemas.microsoft.com/office/powerpoint/2010/main" val="1956195768"/>
       </p:ext>
     </p:extLst>
   </p:cSld>

--- a/Slides/MMTOResults.pptx
+++ b/Slides/MMTOResults.pptx
@@ -4195,7 +4195,7 @@
             </a:r>
             <a:r>
               <a:rPr lang="en-US" b="1" dirty="0"/>
-              <a:t>constant-temperature</a:t>
+              <a:t>pure structural</a:t>
             </a:r>
             <a:r>
               <a:rPr lang="en-US" dirty="0"/>
@@ -4515,7 +4515,7 @@
                   <a:srgbClr val="FFFF00"/>
                 </a:highlight>
               </a:rPr>
-              <a:t>Max criticality constraint ensures that materials of criticality are avoided</a:t>
+              <a:t>Max criticality constraint ensures that materials of high criticality are avoided.</a:t>
             </a:r>
           </a:p>
         </p:txBody>
@@ -5410,8 +5410,8 @@
         </p:nvSpPr>
         <p:spPr>
           <a:xfrm>
-            <a:off x="1563304" y="6269969"/>
-            <a:ext cx="7417494" cy="461665"/>
+            <a:off x="3982751" y="5984820"/>
+            <a:ext cx="4627849" cy="461665"/>
           </a:xfrm>
           <a:prstGeom prst="rect">
             <a:avLst/>
@@ -6063,7 +6063,7 @@
                   <a:srgbClr val="FFFF00"/>
                 </a:highlight>
               </a:rPr>
-              <a:t>We can enforce mean criticality (as opposed to max criticality)</a:t>
+              <a:t>We can also enforce mean criticality (as opposed to max criticality).</a:t>
             </a:r>
           </a:p>
         </p:txBody>
@@ -6169,7 +6169,7 @@
           <a:p>
             <a:r>
               <a:rPr lang="en-US" dirty="0"/>
-              <a:t>Example 10</a:t>
+              <a:t>Example 8</a:t>
             </a:r>
           </a:p>
         </p:txBody>
@@ -7192,7 +7192,7 @@
         <p:spPr>
           <a:xfrm>
             <a:off x="838200" y="5707915"/>
-            <a:ext cx="3965583" cy="830997"/>
+            <a:ext cx="3965583" cy="1200329"/>
           </a:xfrm>
           <a:prstGeom prst="rect">
             <a:avLst/>
@@ -7211,7 +7211,7 @@
                   <a:srgbClr val="FFFF00"/>
                 </a:highlight>
               </a:rPr>
-              <a:t>All attributes reconstruction errors are within 0.001% </a:t>
+              <a:t>Training takes about 3 mins. All attributes reconstruction errors are within 0.001% </a:t>
             </a:r>
           </a:p>
         </p:txBody>
@@ -7844,7 +7844,7 @@
         <p:spPr>
           <a:xfrm>
             <a:off x="5091886" y="5065385"/>
-            <a:ext cx="6922635" cy="830997"/>
+            <a:ext cx="4927603" cy="830997"/>
           </a:xfrm>
           <a:prstGeom prst="rect">
             <a:avLst/>
@@ -7863,7 +7863,7 @@
                   <a:srgbClr val="FFFF00"/>
                 </a:highlight>
               </a:rPr>
-              <a:t>Our 3D solution is within 2% of the 2D benchmark solution. We can easily handle 20+ materials.</a:t>
+              <a:t>Our 3D solution is within 2% of the 2D benchmark solution. </a:t>
             </a:r>
           </a:p>
         </p:txBody>
@@ -8079,7 +8079,7 @@
         <p:spPr>
           <a:xfrm>
             <a:off x="6160975" y="3608844"/>
-            <a:ext cx="5650025" cy="2226404"/>
+            <a:ext cx="5385757" cy="2122269"/>
           </a:xfrm>
           <a:prstGeom prst="rect">
             <a:avLst/>
@@ -8100,7 +8100,7 @@
         </p:nvSpPr>
         <p:spPr>
           <a:xfrm>
-            <a:off x="7439628" y="5893777"/>
+            <a:off x="7323447" y="5779837"/>
             <a:ext cx="4036268" cy="827698"/>
           </a:xfrm>
           <a:prstGeom prst="rect">
